--- a/slides/CSC336-Lecture-29-Routing-and-API-Integration.pptx
+++ b/slides/CSC336-Lecture-29-Routing-and-API-Integration.pptx
@@ -3815,79 +3815,44 @@
       </p:sp>
       <p:sp>
         <p:nvSpPr>
-          <p:cNvPr id="6" name="Text 4"/>
-          <p:cNvSpPr txBox="1"/>
-          <p:nvPr/>
-        </p:nvSpPr>
-        <p:spPr>
-          <a:xfrm>
-            <a:off x="640080" y="6446520"/>
-            <a:ext cx="8686800" cy="292608"/>
-          </a:xfrm>
-          <a:prstGeom prst="rect">
-            <a:avLst/>
-          </a:prstGeom>
-          <a:noFill/>
-          <a:ln/>
-        </p:spPr>
-        <p:txBody>
-          <a:bodyPr wrap="square" lIns="0" tIns="0" rIns="0" bIns="0" rtlCol="0" anchor="ctr"/>
-          <a:lstStyle/>
-          <a:p>
-            <a:pPr algn="l" indent="0" marL="0">
-              <a:buNone/>
-            </a:pPr>
-            <a:r>
-              <a:rPr lang="en-US" sz="900" dirty="0">
-                <a:solidFill>
-                  <a:srgbClr val="9AA3D8"/>
-                </a:solidFill>
-                <a:latin typeface="Calibri" pitchFamily="34" charset="0"/>
-                <a:ea typeface="Calibri" pitchFamily="34" charset="-122"/>
-                <a:cs typeface="Calibri" pitchFamily="34" charset="-120"/>
-              </a:rPr>
-              <a:t>Usman Akram  •  COMSATS University Islamabad</a:t>
-            </a:r>
-            <a:endParaRPr lang="en-US" sz="900" dirty="0"/>
-          </a:p>
-        </p:txBody>
-      </p:sp>
-      <p:sp>
-        <p:nvSpPr>
-          <p:cNvPr id="7" name="Text 5"/>
-          <p:cNvSpPr txBox="1"/>
-          <p:nvPr/>
-        </p:nvSpPr>
-        <p:spPr>
-          <a:xfrm>
-            <a:off x="11155680" y="6446520"/>
-            <a:ext cx="457200" cy="292608"/>
-          </a:xfrm>
-          <a:prstGeom prst="rect">
-            <a:avLst/>
-          </a:prstGeom>
-          <a:noFill/>
-          <a:ln/>
-        </p:spPr>
-        <p:txBody>
-          <a:bodyPr wrap="square" lIns="0" tIns="0" rIns="0" bIns="0" rtlCol="0" anchor="ctr"/>
-          <a:lstStyle/>
-          <a:p>
-            <a:pPr algn="r" indent="0" marL="0">
-              <a:buNone/>
-            </a:pPr>
-            <a:r>
-              <a:rPr lang="en-US" sz="900" dirty="0">
-                <a:solidFill>
-                  <a:srgbClr val="9AA3D8"/>
-                </a:solidFill>
-                <a:latin typeface="Calibri" pitchFamily="34" charset="0"/>
-                <a:ea typeface="Calibri" pitchFamily="34" charset="-122"/>
-                <a:cs typeface="Calibri" pitchFamily="34" charset="-120"/>
-              </a:rPr>
-              <a:t>1</a:t>
-            </a:r>
-            <a:endParaRPr lang="en-US" sz="900" dirty="0"/>
+          <p:cNvPr id="8" name="cuinotes-footer-mark"/>
+          <p:cNvSpPr txBox="1"/>
+          <p:nvPr/>
+        </p:nvSpPr>
+        <p:spPr>
+          <a:xfrm>
+            <a:off x="9951720" y="6455664"/>
+            <a:ext cx="2011680" cy="292608"/>
+          </a:xfrm>
+          <a:prstGeom prst="rect">
+            <a:avLst/>
+          </a:prstGeom>
+          <a:noFill/>
+        </p:spPr>
+        <p:txBody>
+          <a:bodyPr wrap="none" lIns="0" rIns="0" tIns="0" bIns="0">
+            <a:spAutoFit/>
+          </a:bodyPr>
+          <a:lstStyle/>
+          <a:p>
+            <a:pPr algn="r"/>
+            <a:r>
+              <a:rPr sz="1000">
+                <a:solidFill>
+                  <a:srgbClr val="8A939B"/>
+                </a:solidFill>
+                <a:hlinkClick r:id="rId3"/>
+              </a:rPr>
+              <a:t>cuinotes.com</a:t>
+            </a:r>
+            <a:r>
+              <a:rPr sz="1000">
+                <a:solidFill>
+                  <a:srgbClr val="8A939B"/>
+                </a:solidFill>
+              </a:rPr>
+              <a:t>  ·  1</a:t>
+            </a:r>
           </a:p>
         </p:txBody>
       </p:sp>
@@ -4999,79 +4964,44 @@
       </p:graphicFrame>
       <p:sp>
         <p:nvSpPr>
-          <p:cNvPr id="5" name="Text 2"/>
-          <p:cNvSpPr txBox="1"/>
-          <p:nvPr/>
-        </p:nvSpPr>
-        <p:spPr>
-          <a:xfrm>
-            <a:off x="640080" y="6446520"/>
-            <a:ext cx="8686800" cy="292608"/>
-          </a:xfrm>
-          <a:prstGeom prst="rect">
-            <a:avLst/>
-          </a:prstGeom>
-          <a:noFill/>
-          <a:ln/>
-        </p:spPr>
-        <p:txBody>
-          <a:bodyPr wrap="square" lIns="0" tIns="0" rIns="0" bIns="0" rtlCol="0" anchor="ctr"/>
-          <a:lstStyle/>
-          <a:p>
-            <a:pPr algn="l" indent="0" marL="0">
-              <a:buNone/>
-            </a:pPr>
-            <a:r>
-              <a:rPr lang="en-US" sz="900" dirty="0">
-                <a:solidFill>
-                  <a:srgbClr val="5D5D72"/>
-                </a:solidFill>
-                <a:latin typeface="Calibri" pitchFamily="34" charset="0"/>
-                <a:ea typeface="Calibri" pitchFamily="34" charset="-122"/>
-                <a:cs typeface="Calibri" pitchFamily="34" charset="-120"/>
-              </a:rPr>
-              <a:t>Usman Akram  •  COMSATS University Islamabad</a:t>
-            </a:r>
-            <a:endParaRPr lang="en-US" sz="900" dirty="0"/>
-          </a:p>
-        </p:txBody>
-      </p:sp>
-      <p:sp>
-        <p:nvSpPr>
-          <p:cNvPr id="6" name="Text 3"/>
-          <p:cNvSpPr txBox="1"/>
-          <p:nvPr/>
-        </p:nvSpPr>
-        <p:spPr>
-          <a:xfrm>
-            <a:off x="11155680" y="6446520"/>
-            <a:ext cx="457200" cy="292608"/>
-          </a:xfrm>
-          <a:prstGeom prst="rect">
-            <a:avLst/>
-          </a:prstGeom>
-          <a:noFill/>
-          <a:ln/>
-        </p:spPr>
-        <p:txBody>
-          <a:bodyPr wrap="square" lIns="0" tIns="0" rIns="0" bIns="0" rtlCol="0" anchor="ctr"/>
-          <a:lstStyle/>
-          <a:p>
-            <a:pPr algn="r" indent="0" marL="0">
-              <a:buNone/>
-            </a:pPr>
-            <a:r>
-              <a:rPr lang="en-US" sz="900" dirty="0">
-                <a:solidFill>
-                  <a:srgbClr val="5D5D72"/>
-                </a:solidFill>
-                <a:latin typeface="Calibri" pitchFamily="34" charset="0"/>
-                <a:ea typeface="Calibri" pitchFamily="34" charset="-122"/>
-                <a:cs typeface="Calibri" pitchFamily="34" charset="-120"/>
-              </a:rPr>
-              <a:t>10</a:t>
-            </a:r>
-            <a:endParaRPr lang="en-US" sz="900" dirty="0"/>
+          <p:cNvPr id="12" name="cuinotes-footer-mark"/>
+          <p:cNvSpPr txBox="1"/>
+          <p:nvPr/>
+        </p:nvSpPr>
+        <p:spPr>
+          <a:xfrm>
+            <a:off x="9951720" y="6455664"/>
+            <a:ext cx="2011680" cy="292608"/>
+          </a:xfrm>
+          <a:prstGeom prst="rect">
+            <a:avLst/>
+          </a:prstGeom>
+          <a:noFill/>
+        </p:spPr>
+        <p:txBody>
+          <a:bodyPr wrap="none" lIns="0" rIns="0" tIns="0" bIns="0">
+            <a:spAutoFit/>
+          </a:bodyPr>
+          <a:lstStyle/>
+          <a:p>
+            <a:pPr algn="r"/>
+            <a:r>
+              <a:rPr sz="1000">
+                <a:solidFill>
+                  <a:srgbClr val="8A939B"/>
+                </a:solidFill>
+                <a:hlinkClick r:id="rId3"/>
+              </a:rPr>
+              <a:t>cuinotes.com</a:t>
+            </a:r>
+            <a:r>
+              <a:rPr sz="1000">
+                <a:solidFill>
+                  <a:srgbClr val="8A939B"/>
+                </a:solidFill>
+              </a:rPr>
+              <a:t>  ·  10</a:t>
+            </a:r>
           </a:p>
         </p:txBody>
       </p:sp>
@@ -5204,6 +5134,10 @@
           </a:solidFill>
           <a:ln/>
         </p:spPr>
+        <p:txBody>
+          <a:bodyPr/>
+          <a:p/>
+        </p:txBody>
       </p:sp>
       <p:sp>
         <p:nvSpPr>
@@ -5302,6 +5236,10 @@
           </a:solidFill>
           <a:ln/>
         </p:spPr>
+        <p:txBody>
+          <a:bodyPr/>
+          <a:p/>
+        </p:txBody>
       </p:sp>
       <p:sp>
         <p:nvSpPr>
@@ -5400,6 +5338,10 @@
           </a:solidFill>
           <a:ln/>
         </p:spPr>
+        <p:txBody>
+          <a:bodyPr/>
+          <a:p/>
+        </p:txBody>
       </p:sp>
       <p:sp>
         <p:nvSpPr>
@@ -5481,79 +5423,44 @@
       </p:sp>
       <p:sp>
         <p:nvSpPr>
-          <p:cNvPr id="13" name="Text 11"/>
-          <p:cNvSpPr txBox="1"/>
-          <p:nvPr/>
-        </p:nvSpPr>
-        <p:spPr>
-          <a:xfrm>
-            <a:off x="640080" y="6446520"/>
-            <a:ext cx="8686800" cy="292608"/>
-          </a:xfrm>
-          <a:prstGeom prst="rect">
-            <a:avLst/>
-          </a:prstGeom>
-          <a:noFill/>
-          <a:ln/>
-        </p:spPr>
-        <p:txBody>
-          <a:bodyPr wrap="square" lIns="0" tIns="0" rIns="0" bIns="0" rtlCol="0" anchor="ctr"/>
-          <a:lstStyle/>
-          <a:p>
-            <a:pPr algn="l" indent="0" marL="0">
-              <a:buNone/>
-            </a:pPr>
-            <a:r>
-              <a:rPr lang="en-US" sz="900" dirty="0">
-                <a:solidFill>
-                  <a:srgbClr val="5D5D72"/>
-                </a:solidFill>
-                <a:latin typeface="Calibri" pitchFamily="34" charset="0"/>
-                <a:ea typeface="Calibri" pitchFamily="34" charset="-122"/>
-                <a:cs typeface="Calibri" pitchFamily="34" charset="-120"/>
-              </a:rPr>
-              <a:t>Usman Akram  •  COMSATS University Islamabad</a:t>
-            </a:r>
-            <a:endParaRPr lang="en-US" sz="900" dirty="0"/>
-          </a:p>
-        </p:txBody>
-      </p:sp>
-      <p:sp>
-        <p:nvSpPr>
-          <p:cNvPr id="14" name="Text 12"/>
-          <p:cNvSpPr txBox="1"/>
-          <p:nvPr/>
-        </p:nvSpPr>
-        <p:spPr>
-          <a:xfrm>
-            <a:off x="11155680" y="6446520"/>
-            <a:ext cx="457200" cy="292608"/>
-          </a:xfrm>
-          <a:prstGeom prst="rect">
-            <a:avLst/>
-          </a:prstGeom>
-          <a:noFill/>
-          <a:ln/>
-        </p:spPr>
-        <p:txBody>
-          <a:bodyPr wrap="square" lIns="0" tIns="0" rIns="0" bIns="0" rtlCol="0" anchor="ctr"/>
-          <a:lstStyle/>
-          <a:p>
-            <a:pPr algn="r" indent="0" marL="0">
-              <a:buNone/>
-            </a:pPr>
-            <a:r>
-              <a:rPr lang="en-US" sz="900" dirty="0">
-                <a:solidFill>
-                  <a:srgbClr val="5D5D72"/>
-                </a:solidFill>
-                <a:latin typeface="Calibri" pitchFamily="34" charset="0"/>
-                <a:ea typeface="Calibri" pitchFamily="34" charset="-122"/>
-                <a:cs typeface="Calibri" pitchFamily="34" charset="-120"/>
-              </a:rPr>
-              <a:t>11</a:t>
-            </a:r>
-            <a:endParaRPr lang="en-US" sz="900" dirty="0"/>
+          <p:cNvPr id="15" name="cuinotes-footer-mark"/>
+          <p:cNvSpPr txBox="1"/>
+          <p:nvPr/>
+        </p:nvSpPr>
+        <p:spPr>
+          <a:xfrm>
+            <a:off x="9951720" y="6455664"/>
+            <a:ext cx="2011680" cy="292608"/>
+          </a:xfrm>
+          <a:prstGeom prst="rect">
+            <a:avLst/>
+          </a:prstGeom>
+          <a:noFill/>
+        </p:spPr>
+        <p:txBody>
+          <a:bodyPr wrap="none" lIns="0" rIns="0" tIns="0" bIns="0">
+            <a:spAutoFit/>
+          </a:bodyPr>
+          <a:lstStyle/>
+          <a:p>
+            <a:pPr algn="r"/>
+            <a:r>
+              <a:rPr sz="1000">
+                <a:solidFill>
+                  <a:srgbClr val="8A939B"/>
+                </a:solidFill>
+                <a:hlinkClick r:id="rId3"/>
+              </a:rPr>
+              <a:t>cuinotes.com</a:t>
+            </a:r>
+            <a:r>
+              <a:rPr sz="1000">
+                <a:solidFill>
+                  <a:srgbClr val="8A939B"/>
+                </a:solidFill>
+              </a:rPr>
+              <a:t>  ·  11</a:t>
+            </a:r>
           </a:p>
         </p:txBody>
       </p:sp>
@@ -5688,6 +5595,10 @@
           </a:solidFill>
           <a:ln/>
         </p:spPr>
+        <p:txBody>
+          <a:bodyPr/>
+          <a:p/>
+        </p:txBody>
       </p:sp>
       <p:sp>
         <p:nvSpPr>
@@ -5962,79 +5873,44 @@
       </p:sp>
       <p:sp>
         <p:nvSpPr>
-          <p:cNvPr id="6" name="Text 4"/>
-          <p:cNvSpPr txBox="1"/>
-          <p:nvPr/>
-        </p:nvSpPr>
-        <p:spPr>
-          <a:xfrm>
-            <a:off x="640080" y="6446520"/>
-            <a:ext cx="8686800" cy="292608"/>
-          </a:xfrm>
-          <a:prstGeom prst="rect">
-            <a:avLst/>
-          </a:prstGeom>
-          <a:noFill/>
-          <a:ln/>
-        </p:spPr>
-        <p:txBody>
-          <a:bodyPr wrap="square" lIns="0" tIns="0" rIns="0" bIns="0" rtlCol="0" anchor="ctr"/>
-          <a:lstStyle/>
-          <a:p>
-            <a:pPr algn="l" indent="0" marL="0">
-              <a:buNone/>
-            </a:pPr>
-            <a:r>
-              <a:rPr lang="en-US" sz="900" dirty="0">
-                <a:solidFill>
-                  <a:srgbClr val="5D5D72"/>
-                </a:solidFill>
-                <a:latin typeface="Calibri" pitchFamily="34" charset="0"/>
-                <a:ea typeface="Calibri" pitchFamily="34" charset="-122"/>
-                <a:cs typeface="Calibri" pitchFamily="34" charset="-120"/>
-              </a:rPr>
-              <a:t>Usman Akram  •  COMSATS University Islamabad</a:t>
-            </a:r>
-            <a:endParaRPr lang="en-US" sz="900" dirty="0"/>
-          </a:p>
-        </p:txBody>
-      </p:sp>
-      <p:sp>
-        <p:nvSpPr>
-          <p:cNvPr id="7" name="Text 5"/>
-          <p:cNvSpPr txBox="1"/>
-          <p:nvPr/>
-        </p:nvSpPr>
-        <p:spPr>
-          <a:xfrm>
-            <a:off x="11155680" y="6446520"/>
-            <a:ext cx="457200" cy="292608"/>
-          </a:xfrm>
-          <a:prstGeom prst="rect">
-            <a:avLst/>
-          </a:prstGeom>
-          <a:noFill/>
-          <a:ln/>
-        </p:spPr>
-        <p:txBody>
-          <a:bodyPr wrap="square" lIns="0" tIns="0" rIns="0" bIns="0" rtlCol="0" anchor="ctr"/>
-          <a:lstStyle/>
-          <a:p>
-            <a:pPr algn="r" indent="0" marL="0">
-              <a:buNone/>
-            </a:pPr>
-            <a:r>
-              <a:rPr lang="en-US" sz="900" dirty="0">
-                <a:solidFill>
-                  <a:srgbClr val="5D5D72"/>
-                </a:solidFill>
-                <a:latin typeface="Calibri" pitchFamily="34" charset="0"/>
-                <a:ea typeface="Calibri" pitchFamily="34" charset="-122"/>
-                <a:cs typeface="Calibri" pitchFamily="34" charset="-120"/>
-              </a:rPr>
-              <a:t>12</a:t>
-            </a:r>
-            <a:endParaRPr lang="en-US" sz="900" dirty="0"/>
+          <p:cNvPr id="8" name="cuinotes-footer-mark"/>
+          <p:cNvSpPr txBox="1"/>
+          <p:nvPr/>
+        </p:nvSpPr>
+        <p:spPr>
+          <a:xfrm>
+            <a:off x="9951720" y="6455664"/>
+            <a:ext cx="2011680" cy="292608"/>
+          </a:xfrm>
+          <a:prstGeom prst="rect">
+            <a:avLst/>
+          </a:prstGeom>
+          <a:noFill/>
+        </p:spPr>
+        <p:txBody>
+          <a:bodyPr wrap="none" lIns="0" rIns="0" tIns="0" bIns="0">
+            <a:spAutoFit/>
+          </a:bodyPr>
+          <a:lstStyle/>
+          <a:p>
+            <a:pPr algn="r"/>
+            <a:r>
+              <a:rPr sz="1000">
+                <a:solidFill>
+                  <a:srgbClr val="8A939B"/>
+                </a:solidFill>
+                <a:hlinkClick r:id="rId3"/>
+              </a:rPr>
+              <a:t>cuinotes.com</a:t>
+            </a:r>
+            <a:r>
+              <a:rPr sz="1000">
+                <a:solidFill>
+                  <a:srgbClr val="8A939B"/>
+                </a:solidFill>
+              </a:rPr>
+              <a:t>  ·  12</a:t>
+            </a:r>
           </a:p>
         </p:txBody>
       </p:sp>
@@ -6171,6 +6047,10 @@
             <a:tailEnd type="triangle"/>
           </a:ln>
         </p:spPr>
+        <p:txBody>
+          <a:bodyPr/>
+          <a:p/>
+        </p:txBody>
       </p:sp>
       <p:sp>
         <p:nvSpPr>
@@ -6195,6 +6075,10 @@
             <a:tailEnd type="triangle"/>
           </a:ln>
         </p:spPr>
+        <p:txBody>
+          <a:bodyPr/>
+          <a:p/>
+        </p:txBody>
       </p:sp>
       <p:sp>
         <p:nvSpPr>
@@ -6219,6 +6103,10 @@
             <a:tailEnd type="triangle"/>
           </a:ln>
         </p:spPr>
+        <p:txBody>
+          <a:bodyPr/>
+          <a:p/>
+        </p:txBody>
       </p:sp>
       <p:sp>
         <p:nvSpPr>
@@ -6243,6 +6131,10 @@
             <a:tailEnd type="triangle"/>
           </a:ln>
         </p:spPr>
+        <p:txBody>
+          <a:bodyPr/>
+          <a:p/>
+        </p:txBody>
       </p:sp>
       <p:sp>
         <p:nvSpPr>
@@ -6263,6 +6155,10 @@
           </a:solidFill>
           <a:ln/>
         </p:spPr>
+        <p:txBody>
+          <a:bodyPr/>
+          <a:p/>
+        </p:txBody>
       </p:sp>
       <p:sp>
         <p:nvSpPr>
@@ -6345,6 +6241,10 @@
           </a:solidFill>
           <a:ln/>
         </p:spPr>
+        <p:txBody>
+          <a:bodyPr/>
+          <a:p/>
+        </p:txBody>
       </p:sp>
       <p:sp>
         <p:nvSpPr>
@@ -6407,6 +6307,10 @@
           </a:solidFill>
           <a:ln/>
         </p:spPr>
+        <p:txBody>
+          <a:bodyPr/>
+          <a:p/>
+        </p:txBody>
       </p:sp>
       <p:sp>
         <p:nvSpPr>
@@ -6489,6 +6393,10 @@
           </a:solidFill>
           <a:ln/>
         </p:spPr>
+        <p:txBody>
+          <a:bodyPr/>
+          <a:p/>
+        </p:txBody>
       </p:sp>
       <p:sp>
         <p:nvSpPr>
@@ -6571,6 +6479,10 @@
           </a:solidFill>
           <a:ln/>
         </p:spPr>
+        <p:txBody>
+          <a:bodyPr/>
+          <a:p/>
+        </p:txBody>
       </p:sp>
       <p:sp>
         <p:nvSpPr>
@@ -6655,79 +6567,44 @@
       </p:sp>
       <p:sp>
         <p:nvSpPr>
-          <p:cNvPr id="19" name="Text 17"/>
-          <p:cNvSpPr txBox="1"/>
-          <p:nvPr/>
-        </p:nvSpPr>
-        <p:spPr>
-          <a:xfrm>
-            <a:off x="640080" y="6446520"/>
-            <a:ext cx="8686800" cy="292608"/>
-          </a:xfrm>
-          <a:prstGeom prst="rect">
-            <a:avLst/>
-          </a:prstGeom>
-          <a:noFill/>
-          <a:ln/>
-        </p:spPr>
-        <p:txBody>
-          <a:bodyPr wrap="square" lIns="0" tIns="0" rIns="0" bIns="0" rtlCol="0" anchor="ctr"/>
-          <a:lstStyle/>
-          <a:p>
-            <a:pPr algn="l" indent="0" marL="0">
-              <a:buNone/>
-            </a:pPr>
-            <a:r>
-              <a:rPr lang="en-US" sz="900" dirty="0">
-                <a:solidFill>
-                  <a:srgbClr val="5D5D72"/>
-                </a:solidFill>
-                <a:latin typeface="Calibri" pitchFamily="34" charset="0"/>
-                <a:ea typeface="Calibri" pitchFamily="34" charset="-122"/>
-                <a:cs typeface="Calibri" pitchFamily="34" charset="-120"/>
-              </a:rPr>
-              <a:t>Usman Akram  •  COMSATS University Islamabad</a:t>
-            </a:r>
-            <a:endParaRPr lang="en-US" sz="900" dirty="0"/>
-          </a:p>
-        </p:txBody>
-      </p:sp>
-      <p:sp>
-        <p:nvSpPr>
-          <p:cNvPr id="20" name="Text 18"/>
-          <p:cNvSpPr txBox="1"/>
-          <p:nvPr/>
-        </p:nvSpPr>
-        <p:spPr>
-          <a:xfrm>
-            <a:off x="11155680" y="6446520"/>
-            <a:ext cx="457200" cy="292608"/>
-          </a:xfrm>
-          <a:prstGeom prst="rect">
-            <a:avLst/>
-          </a:prstGeom>
-          <a:noFill/>
-          <a:ln/>
-        </p:spPr>
-        <p:txBody>
-          <a:bodyPr wrap="square" lIns="0" tIns="0" rIns="0" bIns="0" rtlCol="0" anchor="ctr"/>
-          <a:lstStyle/>
-          <a:p>
-            <a:pPr algn="r" indent="0" marL="0">
-              <a:buNone/>
-            </a:pPr>
-            <a:r>
-              <a:rPr lang="en-US" sz="900" dirty="0">
-                <a:solidFill>
-                  <a:srgbClr val="5D5D72"/>
-                </a:solidFill>
-                <a:latin typeface="Calibri" pitchFamily="34" charset="0"/>
-                <a:ea typeface="Calibri" pitchFamily="34" charset="-122"/>
-                <a:cs typeface="Calibri" pitchFamily="34" charset="-120"/>
-              </a:rPr>
-              <a:t>13</a:t>
-            </a:r>
-            <a:endParaRPr lang="en-US" sz="900" dirty="0"/>
+          <p:cNvPr id="21" name="cuinotes-footer-mark"/>
+          <p:cNvSpPr txBox="1"/>
+          <p:nvPr/>
+        </p:nvSpPr>
+        <p:spPr>
+          <a:xfrm>
+            <a:off x="9951720" y="6455664"/>
+            <a:ext cx="2011680" cy="292608"/>
+          </a:xfrm>
+          <a:prstGeom prst="rect">
+            <a:avLst/>
+          </a:prstGeom>
+          <a:noFill/>
+        </p:spPr>
+        <p:txBody>
+          <a:bodyPr wrap="none" lIns="0" rIns="0" tIns="0" bIns="0">
+            <a:spAutoFit/>
+          </a:bodyPr>
+          <a:lstStyle/>
+          <a:p>
+            <a:pPr algn="r"/>
+            <a:r>
+              <a:rPr sz="1000">
+                <a:solidFill>
+                  <a:srgbClr val="8A939B"/>
+                </a:solidFill>
+                <a:hlinkClick r:id="rId3"/>
+              </a:rPr>
+              <a:t>cuinotes.com</a:t>
+            </a:r>
+            <a:r>
+              <a:rPr sz="1000">
+                <a:solidFill>
+                  <a:srgbClr val="8A939B"/>
+                </a:solidFill>
+              </a:rPr>
+              <a:t>  ·  13</a:t>
+            </a:r>
           </a:p>
         </p:txBody>
       </p:sp>
@@ -6862,6 +6739,10 @@
           </a:solidFill>
           <a:ln/>
         </p:spPr>
+        <p:txBody>
+          <a:bodyPr/>
+          <a:p/>
+        </p:txBody>
       </p:sp>
       <p:sp>
         <p:nvSpPr>
@@ -7035,79 +6916,44 @@
       </p:sp>
       <p:sp>
         <p:nvSpPr>
-          <p:cNvPr id="7" name="Text 5"/>
-          <p:cNvSpPr txBox="1"/>
-          <p:nvPr/>
-        </p:nvSpPr>
-        <p:spPr>
-          <a:xfrm>
-            <a:off x="640080" y="6446520"/>
-            <a:ext cx="8686800" cy="292608"/>
-          </a:xfrm>
-          <a:prstGeom prst="rect">
-            <a:avLst/>
-          </a:prstGeom>
-          <a:noFill/>
-          <a:ln/>
-        </p:spPr>
-        <p:txBody>
-          <a:bodyPr wrap="square" lIns="0" tIns="0" rIns="0" bIns="0" rtlCol="0" anchor="ctr"/>
-          <a:lstStyle/>
-          <a:p>
-            <a:pPr algn="l" indent="0" marL="0">
-              <a:buNone/>
-            </a:pPr>
-            <a:r>
-              <a:rPr lang="en-US" sz="900" dirty="0">
-                <a:solidFill>
-                  <a:srgbClr val="5D5D72"/>
-                </a:solidFill>
-                <a:latin typeface="Calibri" pitchFamily="34" charset="0"/>
-                <a:ea typeface="Calibri" pitchFamily="34" charset="-122"/>
-                <a:cs typeface="Calibri" pitchFamily="34" charset="-120"/>
-              </a:rPr>
-              <a:t>Usman Akram  •  COMSATS University Islamabad</a:t>
-            </a:r>
-            <a:endParaRPr lang="en-US" sz="900" dirty="0"/>
-          </a:p>
-        </p:txBody>
-      </p:sp>
-      <p:sp>
-        <p:nvSpPr>
-          <p:cNvPr id="8" name="Text 6"/>
-          <p:cNvSpPr txBox="1"/>
-          <p:nvPr/>
-        </p:nvSpPr>
-        <p:spPr>
-          <a:xfrm>
-            <a:off x="11155680" y="6446520"/>
-            <a:ext cx="457200" cy="292608"/>
-          </a:xfrm>
-          <a:prstGeom prst="rect">
-            <a:avLst/>
-          </a:prstGeom>
-          <a:noFill/>
-          <a:ln/>
-        </p:spPr>
-        <p:txBody>
-          <a:bodyPr wrap="square" lIns="0" tIns="0" rIns="0" bIns="0" rtlCol="0" anchor="ctr"/>
-          <a:lstStyle/>
-          <a:p>
-            <a:pPr algn="r" indent="0" marL="0">
-              <a:buNone/>
-            </a:pPr>
-            <a:r>
-              <a:rPr lang="en-US" sz="900" dirty="0">
-                <a:solidFill>
-                  <a:srgbClr val="5D5D72"/>
-                </a:solidFill>
-                <a:latin typeface="Calibri" pitchFamily="34" charset="0"/>
-                <a:ea typeface="Calibri" pitchFamily="34" charset="-122"/>
-                <a:cs typeface="Calibri" pitchFamily="34" charset="-120"/>
-              </a:rPr>
-              <a:t>14</a:t>
-            </a:r>
-            <a:endParaRPr lang="en-US" sz="900" dirty="0"/>
+          <p:cNvPr id="9" name="cuinotes-footer-mark"/>
+          <p:cNvSpPr txBox="1"/>
+          <p:nvPr/>
+        </p:nvSpPr>
+        <p:spPr>
+          <a:xfrm>
+            <a:off x="9951720" y="6455664"/>
+            <a:ext cx="2011680" cy="292608"/>
+          </a:xfrm>
+          <a:prstGeom prst="rect">
+            <a:avLst/>
+          </a:prstGeom>
+          <a:noFill/>
+        </p:spPr>
+        <p:txBody>
+          <a:bodyPr wrap="none" lIns="0" rIns="0" tIns="0" bIns="0">
+            <a:spAutoFit/>
+          </a:bodyPr>
+          <a:lstStyle/>
+          <a:p>
+            <a:pPr algn="r"/>
+            <a:r>
+              <a:rPr sz="1000">
+                <a:solidFill>
+                  <a:srgbClr val="8A939B"/>
+                </a:solidFill>
+                <a:hlinkClick r:id="rId3"/>
+              </a:rPr>
+              <a:t>cuinotes.com</a:t>
+            </a:r>
+            <a:r>
+              <a:rPr sz="1000">
+                <a:solidFill>
+                  <a:srgbClr val="8A939B"/>
+                </a:solidFill>
+              </a:rPr>
+              <a:t>  ·  14</a:t>
+            </a:r>
           </a:p>
         </p:txBody>
       </p:sp>
@@ -7240,6 +7086,10 @@
           </a:solidFill>
           <a:ln/>
         </p:spPr>
+        <p:txBody>
+          <a:bodyPr/>
+          <a:p/>
+        </p:txBody>
       </p:sp>
       <p:sp>
         <p:nvSpPr>
@@ -7338,6 +7188,10 @@
           </a:solidFill>
           <a:ln/>
         </p:spPr>
+        <p:txBody>
+          <a:bodyPr/>
+          <a:p/>
+        </p:txBody>
       </p:sp>
       <p:sp>
         <p:nvSpPr>
@@ -7419,79 +7273,44 @@
       </p:sp>
       <p:sp>
         <p:nvSpPr>
-          <p:cNvPr id="10" name="Text 8"/>
-          <p:cNvSpPr txBox="1"/>
-          <p:nvPr/>
-        </p:nvSpPr>
-        <p:spPr>
-          <a:xfrm>
-            <a:off x="640080" y="6446520"/>
-            <a:ext cx="8686800" cy="292608"/>
-          </a:xfrm>
-          <a:prstGeom prst="rect">
-            <a:avLst/>
-          </a:prstGeom>
-          <a:noFill/>
-          <a:ln/>
-        </p:spPr>
-        <p:txBody>
-          <a:bodyPr wrap="square" lIns="0" tIns="0" rIns="0" bIns="0" rtlCol="0" anchor="ctr"/>
-          <a:lstStyle/>
-          <a:p>
-            <a:pPr algn="l" indent="0" marL="0">
-              <a:buNone/>
-            </a:pPr>
-            <a:r>
-              <a:rPr lang="en-US" sz="900" dirty="0">
-                <a:solidFill>
-                  <a:srgbClr val="5D5D72"/>
-                </a:solidFill>
-                <a:latin typeface="Calibri" pitchFamily="34" charset="0"/>
-                <a:ea typeface="Calibri" pitchFamily="34" charset="-122"/>
-                <a:cs typeface="Calibri" pitchFamily="34" charset="-120"/>
-              </a:rPr>
-              <a:t>Usman Akram  •  COMSATS University Islamabad</a:t>
-            </a:r>
-            <a:endParaRPr lang="en-US" sz="900" dirty="0"/>
-          </a:p>
-        </p:txBody>
-      </p:sp>
-      <p:sp>
-        <p:nvSpPr>
-          <p:cNvPr id="11" name="Text 9"/>
-          <p:cNvSpPr txBox="1"/>
-          <p:nvPr/>
-        </p:nvSpPr>
-        <p:spPr>
-          <a:xfrm>
-            <a:off x="11155680" y="6446520"/>
-            <a:ext cx="457200" cy="292608"/>
-          </a:xfrm>
-          <a:prstGeom prst="rect">
-            <a:avLst/>
-          </a:prstGeom>
-          <a:noFill/>
-          <a:ln/>
-        </p:spPr>
-        <p:txBody>
-          <a:bodyPr wrap="square" lIns="0" tIns="0" rIns="0" bIns="0" rtlCol="0" anchor="ctr"/>
-          <a:lstStyle/>
-          <a:p>
-            <a:pPr algn="r" indent="0" marL="0">
-              <a:buNone/>
-            </a:pPr>
-            <a:r>
-              <a:rPr lang="en-US" sz="900" dirty="0">
-                <a:solidFill>
-                  <a:srgbClr val="5D5D72"/>
-                </a:solidFill>
-                <a:latin typeface="Calibri" pitchFamily="34" charset="0"/>
-                <a:ea typeface="Calibri" pitchFamily="34" charset="-122"/>
-                <a:cs typeface="Calibri" pitchFamily="34" charset="-120"/>
-              </a:rPr>
-              <a:t>15</a:t>
-            </a:r>
-            <a:endParaRPr lang="en-US" sz="900" dirty="0"/>
+          <p:cNvPr id="12" name="cuinotes-footer-mark"/>
+          <p:cNvSpPr txBox="1"/>
+          <p:nvPr/>
+        </p:nvSpPr>
+        <p:spPr>
+          <a:xfrm>
+            <a:off x="9951720" y="6455664"/>
+            <a:ext cx="2011680" cy="292608"/>
+          </a:xfrm>
+          <a:prstGeom prst="rect">
+            <a:avLst/>
+          </a:prstGeom>
+          <a:noFill/>
+        </p:spPr>
+        <p:txBody>
+          <a:bodyPr wrap="none" lIns="0" rIns="0" tIns="0" bIns="0">
+            <a:spAutoFit/>
+          </a:bodyPr>
+          <a:lstStyle/>
+          <a:p>
+            <a:pPr algn="r"/>
+            <a:r>
+              <a:rPr sz="1000">
+                <a:solidFill>
+                  <a:srgbClr val="8A939B"/>
+                </a:solidFill>
+                <a:hlinkClick r:id="rId3"/>
+              </a:rPr>
+              <a:t>cuinotes.com</a:t>
+            </a:r>
+            <a:r>
+              <a:rPr sz="1000">
+                <a:solidFill>
+                  <a:srgbClr val="8A939B"/>
+                </a:solidFill>
+              </a:rPr>
+              <a:t>  ·  15</a:t>
+            </a:r>
           </a:p>
         </p:txBody>
       </p:sp>
@@ -7626,6 +7445,10 @@
           </a:solidFill>
           <a:ln/>
         </p:spPr>
+        <p:txBody>
+          <a:bodyPr/>
+          <a:p/>
+        </p:txBody>
       </p:sp>
       <p:sp>
         <p:nvSpPr>
@@ -7878,79 +7701,44 @@
       </p:sp>
       <p:sp>
         <p:nvSpPr>
-          <p:cNvPr id="6" name="Text 4"/>
-          <p:cNvSpPr txBox="1"/>
-          <p:nvPr/>
-        </p:nvSpPr>
-        <p:spPr>
-          <a:xfrm>
-            <a:off x="640080" y="6446520"/>
-            <a:ext cx="8686800" cy="292608"/>
-          </a:xfrm>
-          <a:prstGeom prst="rect">
-            <a:avLst/>
-          </a:prstGeom>
-          <a:noFill/>
-          <a:ln/>
-        </p:spPr>
-        <p:txBody>
-          <a:bodyPr wrap="square" lIns="0" tIns="0" rIns="0" bIns="0" rtlCol="0" anchor="ctr"/>
-          <a:lstStyle/>
-          <a:p>
-            <a:pPr algn="l" indent="0" marL="0">
-              <a:buNone/>
-            </a:pPr>
-            <a:r>
-              <a:rPr lang="en-US" sz="900" dirty="0">
-                <a:solidFill>
-                  <a:srgbClr val="5D5D72"/>
-                </a:solidFill>
-                <a:latin typeface="Calibri" pitchFamily="34" charset="0"/>
-                <a:ea typeface="Calibri" pitchFamily="34" charset="-122"/>
-                <a:cs typeface="Calibri" pitchFamily="34" charset="-120"/>
-              </a:rPr>
-              <a:t>Usman Akram  •  COMSATS University Islamabad</a:t>
-            </a:r>
-            <a:endParaRPr lang="en-US" sz="900" dirty="0"/>
-          </a:p>
-        </p:txBody>
-      </p:sp>
-      <p:sp>
-        <p:nvSpPr>
-          <p:cNvPr id="7" name="Text 5"/>
-          <p:cNvSpPr txBox="1"/>
-          <p:nvPr/>
-        </p:nvSpPr>
-        <p:spPr>
-          <a:xfrm>
-            <a:off x="11155680" y="6446520"/>
-            <a:ext cx="457200" cy="292608"/>
-          </a:xfrm>
-          <a:prstGeom prst="rect">
-            <a:avLst/>
-          </a:prstGeom>
-          <a:noFill/>
-          <a:ln/>
-        </p:spPr>
-        <p:txBody>
-          <a:bodyPr wrap="square" lIns="0" tIns="0" rIns="0" bIns="0" rtlCol="0" anchor="ctr"/>
-          <a:lstStyle/>
-          <a:p>
-            <a:pPr algn="r" indent="0" marL="0">
-              <a:buNone/>
-            </a:pPr>
-            <a:r>
-              <a:rPr lang="en-US" sz="900" dirty="0">
-                <a:solidFill>
-                  <a:srgbClr val="5D5D72"/>
-                </a:solidFill>
-                <a:latin typeface="Calibri" pitchFamily="34" charset="0"/>
-                <a:ea typeface="Calibri" pitchFamily="34" charset="-122"/>
-                <a:cs typeface="Calibri" pitchFamily="34" charset="-120"/>
-              </a:rPr>
-              <a:t>16</a:t>
-            </a:r>
-            <a:endParaRPr lang="en-US" sz="900" dirty="0"/>
+          <p:cNvPr id="8" name="cuinotes-footer-mark"/>
+          <p:cNvSpPr txBox="1"/>
+          <p:nvPr/>
+        </p:nvSpPr>
+        <p:spPr>
+          <a:xfrm>
+            <a:off x="9951720" y="6455664"/>
+            <a:ext cx="2011680" cy="292608"/>
+          </a:xfrm>
+          <a:prstGeom prst="rect">
+            <a:avLst/>
+          </a:prstGeom>
+          <a:noFill/>
+        </p:spPr>
+        <p:txBody>
+          <a:bodyPr wrap="none" lIns="0" rIns="0" tIns="0" bIns="0">
+            <a:spAutoFit/>
+          </a:bodyPr>
+          <a:lstStyle/>
+          <a:p>
+            <a:pPr algn="r"/>
+            <a:r>
+              <a:rPr sz="1000">
+                <a:solidFill>
+                  <a:srgbClr val="8A939B"/>
+                </a:solidFill>
+                <a:hlinkClick r:id="rId3"/>
+              </a:rPr>
+              <a:t>cuinotes.com</a:t>
+            </a:r>
+            <a:r>
+              <a:rPr sz="1000">
+                <a:solidFill>
+                  <a:srgbClr val="8A939B"/>
+                </a:solidFill>
+              </a:rPr>
+              <a:t>  ·  16</a:t>
+            </a:r>
           </a:p>
         </p:txBody>
       </p:sp>
@@ -8083,6 +7871,10 @@
           </a:solidFill>
           <a:ln/>
         </p:spPr>
+        <p:txBody>
+          <a:bodyPr/>
+          <a:p/>
+        </p:txBody>
       </p:sp>
       <p:sp>
         <p:nvSpPr>
@@ -8181,6 +7973,10 @@
           </a:solidFill>
           <a:ln/>
         </p:spPr>
+        <p:txBody>
+          <a:bodyPr/>
+          <a:p/>
+        </p:txBody>
       </p:sp>
       <p:sp>
         <p:nvSpPr>
@@ -8262,79 +8058,44 @@
       </p:sp>
       <p:sp>
         <p:nvSpPr>
-          <p:cNvPr id="10" name="Text 8"/>
-          <p:cNvSpPr txBox="1"/>
-          <p:nvPr/>
-        </p:nvSpPr>
-        <p:spPr>
-          <a:xfrm>
-            <a:off x="640080" y="6446520"/>
-            <a:ext cx="8686800" cy="292608"/>
-          </a:xfrm>
-          <a:prstGeom prst="rect">
-            <a:avLst/>
-          </a:prstGeom>
-          <a:noFill/>
-          <a:ln/>
-        </p:spPr>
-        <p:txBody>
-          <a:bodyPr wrap="square" lIns="0" tIns="0" rIns="0" bIns="0" rtlCol="0" anchor="ctr"/>
-          <a:lstStyle/>
-          <a:p>
-            <a:pPr algn="l" indent="0" marL="0">
-              <a:buNone/>
-            </a:pPr>
-            <a:r>
-              <a:rPr lang="en-US" sz="900" dirty="0">
-                <a:solidFill>
-                  <a:srgbClr val="5D5D72"/>
-                </a:solidFill>
-                <a:latin typeface="Calibri" pitchFamily="34" charset="0"/>
-                <a:ea typeface="Calibri" pitchFamily="34" charset="-122"/>
-                <a:cs typeface="Calibri" pitchFamily="34" charset="-120"/>
-              </a:rPr>
-              <a:t>Usman Akram  •  COMSATS University Islamabad</a:t>
-            </a:r>
-            <a:endParaRPr lang="en-US" sz="900" dirty="0"/>
-          </a:p>
-        </p:txBody>
-      </p:sp>
-      <p:sp>
-        <p:nvSpPr>
-          <p:cNvPr id="11" name="Text 9"/>
-          <p:cNvSpPr txBox="1"/>
-          <p:nvPr/>
-        </p:nvSpPr>
-        <p:spPr>
-          <a:xfrm>
-            <a:off x="11155680" y="6446520"/>
-            <a:ext cx="457200" cy="292608"/>
-          </a:xfrm>
-          <a:prstGeom prst="rect">
-            <a:avLst/>
-          </a:prstGeom>
-          <a:noFill/>
-          <a:ln/>
-        </p:spPr>
-        <p:txBody>
-          <a:bodyPr wrap="square" lIns="0" tIns="0" rIns="0" bIns="0" rtlCol="0" anchor="ctr"/>
-          <a:lstStyle/>
-          <a:p>
-            <a:pPr algn="r" indent="0" marL="0">
-              <a:buNone/>
-            </a:pPr>
-            <a:r>
-              <a:rPr lang="en-US" sz="900" dirty="0">
-                <a:solidFill>
-                  <a:srgbClr val="5D5D72"/>
-                </a:solidFill>
-                <a:latin typeface="Calibri" pitchFamily="34" charset="0"/>
-                <a:ea typeface="Calibri" pitchFamily="34" charset="-122"/>
-                <a:cs typeface="Calibri" pitchFamily="34" charset="-120"/>
-              </a:rPr>
-              <a:t>17</a:t>
-            </a:r>
-            <a:endParaRPr lang="en-US" sz="900" dirty="0"/>
+          <p:cNvPr id="12" name="cuinotes-footer-mark"/>
+          <p:cNvSpPr txBox="1"/>
+          <p:nvPr/>
+        </p:nvSpPr>
+        <p:spPr>
+          <a:xfrm>
+            <a:off x="9951720" y="6455664"/>
+            <a:ext cx="2011680" cy="292608"/>
+          </a:xfrm>
+          <a:prstGeom prst="rect">
+            <a:avLst/>
+          </a:prstGeom>
+          <a:noFill/>
+        </p:spPr>
+        <p:txBody>
+          <a:bodyPr wrap="none" lIns="0" rIns="0" tIns="0" bIns="0">
+            <a:spAutoFit/>
+          </a:bodyPr>
+          <a:lstStyle/>
+          <a:p>
+            <a:pPr algn="r"/>
+            <a:r>
+              <a:rPr sz="1000">
+                <a:solidFill>
+                  <a:srgbClr val="8A939B"/>
+                </a:solidFill>
+                <a:hlinkClick r:id="rId3"/>
+              </a:rPr>
+              <a:t>cuinotes.com</a:t>
+            </a:r>
+            <a:r>
+              <a:rPr sz="1000">
+                <a:solidFill>
+                  <a:srgbClr val="8A939B"/>
+                </a:solidFill>
+              </a:rPr>
+              <a:t>  ·  17</a:t>
+            </a:r>
           </a:p>
         </p:txBody>
       </p:sp>
@@ -8469,6 +8230,10 @@
           </a:solidFill>
           <a:ln/>
         </p:spPr>
+        <p:txBody>
+          <a:bodyPr/>
+          <a:p/>
+        </p:txBody>
       </p:sp>
       <p:sp>
         <p:nvSpPr>
@@ -8673,79 +8438,44 @@
       </p:sp>
       <p:sp>
         <p:nvSpPr>
-          <p:cNvPr id="7" name="Text 5"/>
-          <p:cNvSpPr txBox="1"/>
-          <p:nvPr/>
-        </p:nvSpPr>
-        <p:spPr>
-          <a:xfrm>
-            <a:off x="640080" y="6446520"/>
-            <a:ext cx="8686800" cy="292608"/>
-          </a:xfrm>
-          <a:prstGeom prst="rect">
-            <a:avLst/>
-          </a:prstGeom>
-          <a:noFill/>
-          <a:ln/>
-        </p:spPr>
-        <p:txBody>
-          <a:bodyPr wrap="square" lIns="0" tIns="0" rIns="0" bIns="0" rtlCol="0" anchor="ctr"/>
-          <a:lstStyle/>
-          <a:p>
-            <a:pPr algn="l" indent="0" marL="0">
-              <a:buNone/>
-            </a:pPr>
-            <a:r>
-              <a:rPr lang="en-US" sz="900" dirty="0">
-                <a:solidFill>
-                  <a:srgbClr val="5D5D72"/>
-                </a:solidFill>
-                <a:latin typeface="Calibri" pitchFamily="34" charset="0"/>
-                <a:ea typeface="Calibri" pitchFamily="34" charset="-122"/>
-                <a:cs typeface="Calibri" pitchFamily="34" charset="-120"/>
-              </a:rPr>
-              <a:t>Usman Akram  •  COMSATS University Islamabad</a:t>
-            </a:r>
-            <a:endParaRPr lang="en-US" sz="900" dirty="0"/>
-          </a:p>
-        </p:txBody>
-      </p:sp>
-      <p:sp>
-        <p:nvSpPr>
-          <p:cNvPr id="8" name="Text 6"/>
-          <p:cNvSpPr txBox="1"/>
-          <p:nvPr/>
-        </p:nvSpPr>
-        <p:spPr>
-          <a:xfrm>
-            <a:off x="11155680" y="6446520"/>
-            <a:ext cx="457200" cy="292608"/>
-          </a:xfrm>
-          <a:prstGeom prst="rect">
-            <a:avLst/>
-          </a:prstGeom>
-          <a:noFill/>
-          <a:ln/>
-        </p:spPr>
-        <p:txBody>
-          <a:bodyPr wrap="square" lIns="0" tIns="0" rIns="0" bIns="0" rtlCol="0" anchor="ctr"/>
-          <a:lstStyle/>
-          <a:p>
-            <a:pPr algn="r" indent="0" marL="0">
-              <a:buNone/>
-            </a:pPr>
-            <a:r>
-              <a:rPr lang="en-US" sz="900" dirty="0">
-                <a:solidFill>
-                  <a:srgbClr val="5D5D72"/>
-                </a:solidFill>
-                <a:latin typeface="Calibri" pitchFamily="34" charset="0"/>
-                <a:ea typeface="Calibri" pitchFamily="34" charset="-122"/>
-                <a:cs typeface="Calibri" pitchFamily="34" charset="-120"/>
-              </a:rPr>
-              <a:t>18</a:t>
-            </a:r>
-            <a:endParaRPr lang="en-US" sz="900" dirty="0"/>
+          <p:cNvPr id="9" name="cuinotes-footer-mark"/>
+          <p:cNvSpPr txBox="1"/>
+          <p:nvPr/>
+        </p:nvSpPr>
+        <p:spPr>
+          <a:xfrm>
+            <a:off x="9951720" y="6455664"/>
+            <a:ext cx="2011680" cy="292608"/>
+          </a:xfrm>
+          <a:prstGeom prst="rect">
+            <a:avLst/>
+          </a:prstGeom>
+          <a:noFill/>
+        </p:spPr>
+        <p:txBody>
+          <a:bodyPr wrap="none" lIns="0" rIns="0" tIns="0" bIns="0">
+            <a:spAutoFit/>
+          </a:bodyPr>
+          <a:lstStyle/>
+          <a:p>
+            <a:pPr algn="r"/>
+            <a:r>
+              <a:rPr sz="1000">
+                <a:solidFill>
+                  <a:srgbClr val="8A939B"/>
+                </a:solidFill>
+                <a:hlinkClick r:id="rId3"/>
+              </a:rPr>
+              <a:t>cuinotes.com</a:t>
+            </a:r>
+            <a:r>
+              <a:rPr sz="1000">
+                <a:solidFill>
+                  <a:srgbClr val="8A939B"/>
+                </a:solidFill>
+              </a:rPr>
+              <a:t>  ·  18</a:t>
+            </a:r>
           </a:p>
         </p:txBody>
       </p:sp>
@@ -8878,6 +8608,10 @@
           </a:solidFill>
           <a:ln/>
         </p:spPr>
+        <p:txBody>
+          <a:bodyPr/>
+          <a:p/>
+        </p:txBody>
       </p:sp>
       <p:sp>
         <p:nvSpPr>
@@ -8976,6 +8710,10 @@
           </a:solidFill>
           <a:ln/>
         </p:spPr>
+        <p:txBody>
+          <a:bodyPr/>
+          <a:p/>
+        </p:txBody>
       </p:sp>
       <p:sp>
         <p:nvSpPr>
@@ -9057,79 +8795,44 @@
       </p:sp>
       <p:sp>
         <p:nvSpPr>
-          <p:cNvPr id="10" name="Text 8"/>
-          <p:cNvSpPr txBox="1"/>
-          <p:nvPr/>
-        </p:nvSpPr>
-        <p:spPr>
-          <a:xfrm>
-            <a:off x="640080" y="6446520"/>
-            <a:ext cx="8686800" cy="292608"/>
-          </a:xfrm>
-          <a:prstGeom prst="rect">
-            <a:avLst/>
-          </a:prstGeom>
-          <a:noFill/>
-          <a:ln/>
-        </p:spPr>
-        <p:txBody>
-          <a:bodyPr wrap="square" lIns="0" tIns="0" rIns="0" bIns="0" rtlCol="0" anchor="ctr"/>
-          <a:lstStyle/>
-          <a:p>
-            <a:pPr algn="l" indent="0" marL="0">
-              <a:buNone/>
-            </a:pPr>
-            <a:r>
-              <a:rPr lang="en-US" sz="900" dirty="0">
-                <a:solidFill>
-                  <a:srgbClr val="5D5D72"/>
-                </a:solidFill>
-                <a:latin typeface="Calibri" pitchFamily="34" charset="0"/>
-                <a:ea typeface="Calibri" pitchFamily="34" charset="-122"/>
-                <a:cs typeface="Calibri" pitchFamily="34" charset="-120"/>
-              </a:rPr>
-              <a:t>Usman Akram  •  COMSATS University Islamabad</a:t>
-            </a:r>
-            <a:endParaRPr lang="en-US" sz="900" dirty="0"/>
-          </a:p>
-        </p:txBody>
-      </p:sp>
-      <p:sp>
-        <p:nvSpPr>
-          <p:cNvPr id="11" name="Text 9"/>
-          <p:cNvSpPr txBox="1"/>
-          <p:nvPr/>
-        </p:nvSpPr>
-        <p:spPr>
-          <a:xfrm>
-            <a:off x="11155680" y="6446520"/>
-            <a:ext cx="457200" cy="292608"/>
-          </a:xfrm>
-          <a:prstGeom prst="rect">
-            <a:avLst/>
-          </a:prstGeom>
-          <a:noFill/>
-          <a:ln/>
-        </p:spPr>
-        <p:txBody>
-          <a:bodyPr wrap="square" lIns="0" tIns="0" rIns="0" bIns="0" rtlCol="0" anchor="ctr"/>
-          <a:lstStyle/>
-          <a:p>
-            <a:pPr algn="r" indent="0" marL="0">
-              <a:buNone/>
-            </a:pPr>
-            <a:r>
-              <a:rPr lang="en-US" sz="900" dirty="0">
-                <a:solidFill>
-                  <a:srgbClr val="5D5D72"/>
-                </a:solidFill>
-                <a:latin typeface="Calibri" pitchFamily="34" charset="0"/>
-                <a:ea typeface="Calibri" pitchFamily="34" charset="-122"/>
-                <a:cs typeface="Calibri" pitchFamily="34" charset="-120"/>
-              </a:rPr>
-              <a:t>19</a:t>
-            </a:r>
-            <a:endParaRPr lang="en-US" sz="900" dirty="0"/>
+          <p:cNvPr id="12" name="cuinotes-footer-mark"/>
+          <p:cNvSpPr txBox="1"/>
+          <p:nvPr/>
+        </p:nvSpPr>
+        <p:spPr>
+          <a:xfrm>
+            <a:off x="9951720" y="6455664"/>
+            <a:ext cx="2011680" cy="292608"/>
+          </a:xfrm>
+          <a:prstGeom prst="rect">
+            <a:avLst/>
+          </a:prstGeom>
+          <a:noFill/>
+        </p:spPr>
+        <p:txBody>
+          <a:bodyPr wrap="none" lIns="0" rIns="0" tIns="0" bIns="0">
+            <a:spAutoFit/>
+          </a:bodyPr>
+          <a:lstStyle/>
+          <a:p>
+            <a:pPr algn="r"/>
+            <a:r>
+              <a:rPr sz="1000">
+                <a:solidFill>
+                  <a:srgbClr val="8A939B"/>
+                </a:solidFill>
+                <a:hlinkClick r:id="rId3"/>
+              </a:rPr>
+              <a:t>cuinotes.com</a:t>
+            </a:r>
+            <a:r>
+              <a:rPr sz="1000">
+                <a:solidFill>
+                  <a:srgbClr val="8A939B"/>
+                </a:solidFill>
+              </a:rPr>
+              <a:t>  ·  19</a:t>
+            </a:r>
           </a:p>
         </p:txBody>
       </p:sp>
@@ -9262,6 +8965,10 @@
           </a:solidFill>
           <a:ln/>
         </p:spPr>
+        <p:txBody>
+          <a:bodyPr/>
+          <a:p/>
+        </p:txBody>
       </p:sp>
       <p:sp>
         <p:nvSpPr>
@@ -9360,6 +9067,10 @@
           </a:solidFill>
           <a:ln/>
         </p:spPr>
+        <p:txBody>
+          <a:bodyPr/>
+          <a:p/>
+        </p:txBody>
       </p:sp>
       <p:sp>
         <p:nvSpPr>
@@ -9458,6 +9169,10 @@
           </a:solidFill>
           <a:ln/>
         </p:spPr>
+        <p:txBody>
+          <a:bodyPr/>
+          <a:p/>
+        </p:txBody>
       </p:sp>
       <p:sp>
         <p:nvSpPr>
@@ -9556,6 +9271,10 @@
           </a:solidFill>
           <a:ln/>
         </p:spPr>
+        <p:txBody>
+          <a:bodyPr/>
+          <a:p/>
+        </p:txBody>
       </p:sp>
       <p:sp>
         <p:nvSpPr>
@@ -9637,79 +9356,44 @@
       </p:sp>
       <p:sp>
         <p:nvSpPr>
-          <p:cNvPr id="16" name="Text 14"/>
-          <p:cNvSpPr txBox="1"/>
-          <p:nvPr/>
-        </p:nvSpPr>
-        <p:spPr>
-          <a:xfrm>
-            <a:off x="640080" y="6446520"/>
-            <a:ext cx="8686800" cy="292608"/>
-          </a:xfrm>
-          <a:prstGeom prst="rect">
-            <a:avLst/>
-          </a:prstGeom>
-          <a:noFill/>
-          <a:ln/>
-        </p:spPr>
-        <p:txBody>
-          <a:bodyPr wrap="square" lIns="0" tIns="0" rIns="0" bIns="0" rtlCol="0" anchor="ctr"/>
-          <a:lstStyle/>
-          <a:p>
-            <a:pPr algn="l" indent="0" marL="0">
-              <a:buNone/>
-            </a:pPr>
-            <a:r>
-              <a:rPr lang="en-US" sz="900" dirty="0">
-                <a:solidFill>
-                  <a:srgbClr val="5D5D72"/>
-                </a:solidFill>
-                <a:latin typeface="Calibri" pitchFamily="34" charset="0"/>
-                <a:ea typeface="Calibri" pitchFamily="34" charset="-122"/>
-                <a:cs typeface="Calibri" pitchFamily="34" charset="-120"/>
-              </a:rPr>
-              <a:t>Usman Akram  •  COMSATS University Islamabad</a:t>
-            </a:r>
-            <a:endParaRPr lang="en-US" sz="900" dirty="0"/>
-          </a:p>
-        </p:txBody>
-      </p:sp>
-      <p:sp>
-        <p:nvSpPr>
-          <p:cNvPr id="17" name="Text 15"/>
-          <p:cNvSpPr txBox="1"/>
-          <p:nvPr/>
-        </p:nvSpPr>
-        <p:spPr>
-          <a:xfrm>
-            <a:off x="11155680" y="6446520"/>
-            <a:ext cx="457200" cy="292608"/>
-          </a:xfrm>
-          <a:prstGeom prst="rect">
-            <a:avLst/>
-          </a:prstGeom>
-          <a:noFill/>
-          <a:ln/>
-        </p:spPr>
-        <p:txBody>
-          <a:bodyPr wrap="square" lIns="0" tIns="0" rIns="0" bIns="0" rtlCol="0" anchor="ctr"/>
-          <a:lstStyle/>
-          <a:p>
-            <a:pPr algn="r" indent="0" marL="0">
-              <a:buNone/>
-            </a:pPr>
-            <a:r>
-              <a:rPr lang="en-US" sz="900" dirty="0">
-                <a:solidFill>
-                  <a:srgbClr val="5D5D72"/>
-                </a:solidFill>
-                <a:latin typeface="Calibri" pitchFamily="34" charset="0"/>
-                <a:ea typeface="Calibri" pitchFamily="34" charset="-122"/>
-                <a:cs typeface="Calibri" pitchFamily="34" charset="-120"/>
-              </a:rPr>
-              <a:t>2</a:t>
-            </a:r>
-            <a:endParaRPr lang="en-US" sz="900" dirty="0"/>
+          <p:cNvPr id="18" name="cuinotes-footer-mark"/>
+          <p:cNvSpPr txBox="1"/>
+          <p:nvPr/>
+        </p:nvSpPr>
+        <p:spPr>
+          <a:xfrm>
+            <a:off x="9951720" y="6455664"/>
+            <a:ext cx="2011680" cy="292608"/>
+          </a:xfrm>
+          <a:prstGeom prst="rect">
+            <a:avLst/>
+          </a:prstGeom>
+          <a:noFill/>
+        </p:spPr>
+        <p:txBody>
+          <a:bodyPr wrap="none" lIns="0" rIns="0" tIns="0" bIns="0">
+            <a:spAutoFit/>
+          </a:bodyPr>
+          <a:lstStyle/>
+          <a:p>
+            <a:pPr algn="r"/>
+            <a:r>
+              <a:rPr sz="1000">
+                <a:solidFill>
+                  <a:srgbClr val="8A939B"/>
+                </a:solidFill>
+                <a:hlinkClick r:id="rId3"/>
+              </a:rPr>
+              <a:t>cuinotes.com</a:t>
+            </a:r>
+            <a:r>
+              <a:rPr sz="1000">
+                <a:solidFill>
+                  <a:srgbClr val="8A939B"/>
+                </a:solidFill>
+              </a:rPr>
+              <a:t>  ·  2</a:t>
+            </a:r>
           </a:p>
         </p:txBody>
       </p:sp>
@@ -9844,6 +9528,10 @@
           </a:solidFill>
           <a:ln/>
         </p:spPr>
+        <p:txBody>
+          <a:bodyPr/>
+          <a:p/>
+        </p:txBody>
       </p:sp>
       <p:sp>
         <p:nvSpPr>
@@ -10189,79 +9877,44 @@
       </p:sp>
       <p:sp>
         <p:nvSpPr>
-          <p:cNvPr id="6" name="Text 4"/>
-          <p:cNvSpPr txBox="1"/>
-          <p:nvPr/>
-        </p:nvSpPr>
-        <p:spPr>
-          <a:xfrm>
-            <a:off x="640080" y="6446520"/>
-            <a:ext cx="8686800" cy="292608"/>
-          </a:xfrm>
-          <a:prstGeom prst="rect">
-            <a:avLst/>
-          </a:prstGeom>
-          <a:noFill/>
-          <a:ln/>
-        </p:spPr>
-        <p:txBody>
-          <a:bodyPr wrap="square" lIns="0" tIns="0" rIns="0" bIns="0" rtlCol="0" anchor="ctr"/>
-          <a:lstStyle/>
-          <a:p>
-            <a:pPr algn="l" indent="0" marL="0">
-              <a:buNone/>
-            </a:pPr>
-            <a:r>
-              <a:rPr lang="en-US" sz="900" dirty="0">
-                <a:solidFill>
-                  <a:srgbClr val="5D5D72"/>
-                </a:solidFill>
-                <a:latin typeface="Calibri" pitchFamily="34" charset="0"/>
-                <a:ea typeface="Calibri" pitchFamily="34" charset="-122"/>
-                <a:cs typeface="Calibri" pitchFamily="34" charset="-120"/>
-              </a:rPr>
-              <a:t>Usman Akram  •  COMSATS University Islamabad</a:t>
-            </a:r>
-            <a:endParaRPr lang="en-US" sz="900" dirty="0"/>
-          </a:p>
-        </p:txBody>
-      </p:sp>
-      <p:sp>
-        <p:nvSpPr>
-          <p:cNvPr id="7" name="Text 5"/>
-          <p:cNvSpPr txBox="1"/>
-          <p:nvPr/>
-        </p:nvSpPr>
-        <p:spPr>
-          <a:xfrm>
-            <a:off x="11155680" y="6446520"/>
-            <a:ext cx="457200" cy="292608"/>
-          </a:xfrm>
-          <a:prstGeom prst="rect">
-            <a:avLst/>
-          </a:prstGeom>
-          <a:noFill/>
-          <a:ln/>
-        </p:spPr>
-        <p:txBody>
-          <a:bodyPr wrap="square" lIns="0" tIns="0" rIns="0" bIns="0" rtlCol="0" anchor="ctr"/>
-          <a:lstStyle/>
-          <a:p>
-            <a:pPr algn="r" indent="0" marL="0">
-              <a:buNone/>
-            </a:pPr>
-            <a:r>
-              <a:rPr lang="en-US" sz="900" dirty="0">
-                <a:solidFill>
-                  <a:srgbClr val="5D5D72"/>
-                </a:solidFill>
-                <a:latin typeface="Calibri" pitchFamily="34" charset="0"/>
-                <a:ea typeface="Calibri" pitchFamily="34" charset="-122"/>
-                <a:cs typeface="Calibri" pitchFamily="34" charset="-120"/>
-              </a:rPr>
-              <a:t>20</a:t>
-            </a:r>
-            <a:endParaRPr lang="en-US" sz="900" dirty="0"/>
+          <p:cNvPr id="8" name="cuinotes-footer-mark"/>
+          <p:cNvSpPr txBox="1"/>
+          <p:nvPr/>
+        </p:nvSpPr>
+        <p:spPr>
+          <a:xfrm>
+            <a:off x="9951720" y="6455664"/>
+            <a:ext cx="2011680" cy="292608"/>
+          </a:xfrm>
+          <a:prstGeom prst="rect">
+            <a:avLst/>
+          </a:prstGeom>
+          <a:noFill/>
+        </p:spPr>
+        <p:txBody>
+          <a:bodyPr wrap="none" lIns="0" rIns="0" tIns="0" bIns="0">
+            <a:spAutoFit/>
+          </a:bodyPr>
+          <a:lstStyle/>
+          <a:p>
+            <a:pPr algn="r"/>
+            <a:r>
+              <a:rPr sz="1000">
+                <a:solidFill>
+                  <a:srgbClr val="8A939B"/>
+                </a:solidFill>
+                <a:hlinkClick r:id="rId3"/>
+              </a:rPr>
+              <a:t>cuinotes.com</a:t>
+            </a:r>
+            <a:r>
+              <a:rPr sz="1000">
+                <a:solidFill>
+                  <a:srgbClr val="8A939B"/>
+                </a:solidFill>
+              </a:rPr>
+              <a:t>  ·  20</a:t>
+            </a:r>
           </a:p>
         </p:txBody>
       </p:sp>
@@ -10396,6 +10049,10 @@
           </a:solidFill>
           <a:ln/>
         </p:spPr>
+        <p:txBody>
+          <a:bodyPr/>
+          <a:p/>
+        </p:txBody>
       </p:sp>
       <p:sp>
         <p:nvSpPr>
@@ -10741,79 +10398,44 @@
       </p:sp>
       <p:sp>
         <p:nvSpPr>
-          <p:cNvPr id="6" name="Text 4"/>
-          <p:cNvSpPr txBox="1"/>
-          <p:nvPr/>
-        </p:nvSpPr>
-        <p:spPr>
-          <a:xfrm>
-            <a:off x="640080" y="6446520"/>
-            <a:ext cx="8686800" cy="292608"/>
-          </a:xfrm>
-          <a:prstGeom prst="rect">
-            <a:avLst/>
-          </a:prstGeom>
-          <a:noFill/>
-          <a:ln/>
-        </p:spPr>
-        <p:txBody>
-          <a:bodyPr wrap="square" lIns="0" tIns="0" rIns="0" bIns="0" rtlCol="0" anchor="ctr"/>
-          <a:lstStyle/>
-          <a:p>
-            <a:pPr algn="l" indent="0" marL="0">
-              <a:buNone/>
-            </a:pPr>
-            <a:r>
-              <a:rPr lang="en-US" sz="900" dirty="0">
-                <a:solidFill>
-                  <a:srgbClr val="5D5D72"/>
-                </a:solidFill>
-                <a:latin typeface="Calibri" pitchFamily="34" charset="0"/>
-                <a:ea typeface="Calibri" pitchFamily="34" charset="-122"/>
-                <a:cs typeface="Calibri" pitchFamily="34" charset="-120"/>
-              </a:rPr>
-              <a:t>Usman Akram  •  COMSATS University Islamabad</a:t>
-            </a:r>
-            <a:endParaRPr lang="en-US" sz="900" dirty="0"/>
-          </a:p>
-        </p:txBody>
-      </p:sp>
-      <p:sp>
-        <p:nvSpPr>
-          <p:cNvPr id="7" name="Text 5"/>
-          <p:cNvSpPr txBox="1"/>
-          <p:nvPr/>
-        </p:nvSpPr>
-        <p:spPr>
-          <a:xfrm>
-            <a:off x="11155680" y="6446520"/>
-            <a:ext cx="457200" cy="292608"/>
-          </a:xfrm>
-          <a:prstGeom prst="rect">
-            <a:avLst/>
-          </a:prstGeom>
-          <a:noFill/>
-          <a:ln/>
-        </p:spPr>
-        <p:txBody>
-          <a:bodyPr wrap="square" lIns="0" tIns="0" rIns="0" bIns="0" rtlCol="0" anchor="ctr"/>
-          <a:lstStyle/>
-          <a:p>
-            <a:pPr algn="r" indent="0" marL="0">
-              <a:buNone/>
-            </a:pPr>
-            <a:r>
-              <a:rPr lang="en-US" sz="900" dirty="0">
-                <a:solidFill>
-                  <a:srgbClr val="5D5D72"/>
-                </a:solidFill>
-                <a:latin typeface="Calibri" pitchFamily="34" charset="0"/>
-                <a:ea typeface="Calibri" pitchFamily="34" charset="-122"/>
-                <a:cs typeface="Calibri" pitchFamily="34" charset="-120"/>
-              </a:rPr>
-              <a:t>21</a:t>
-            </a:r>
-            <a:endParaRPr lang="en-US" sz="900" dirty="0"/>
+          <p:cNvPr id="8" name="cuinotes-footer-mark"/>
+          <p:cNvSpPr txBox="1"/>
+          <p:nvPr/>
+        </p:nvSpPr>
+        <p:spPr>
+          <a:xfrm>
+            <a:off x="9951720" y="6455664"/>
+            <a:ext cx="2011680" cy="292608"/>
+          </a:xfrm>
+          <a:prstGeom prst="rect">
+            <a:avLst/>
+          </a:prstGeom>
+          <a:noFill/>
+        </p:spPr>
+        <p:txBody>
+          <a:bodyPr wrap="none" lIns="0" rIns="0" tIns="0" bIns="0">
+            <a:spAutoFit/>
+          </a:bodyPr>
+          <a:lstStyle/>
+          <a:p>
+            <a:pPr algn="r"/>
+            <a:r>
+              <a:rPr sz="1000">
+                <a:solidFill>
+                  <a:srgbClr val="8A939B"/>
+                </a:solidFill>
+                <a:hlinkClick r:id="rId3"/>
+              </a:rPr>
+              <a:t>cuinotes.com</a:t>
+            </a:r>
+            <a:r>
+              <a:rPr sz="1000">
+                <a:solidFill>
+                  <a:srgbClr val="8A939B"/>
+                </a:solidFill>
+              </a:rPr>
+              <a:t>  ·  21</a:t>
+            </a:r>
           </a:p>
         </p:txBody>
       </p:sp>
@@ -10946,6 +10568,10 @@
           </a:solidFill>
           <a:ln/>
         </p:spPr>
+        <p:txBody>
+          <a:bodyPr/>
+          <a:p/>
+        </p:txBody>
       </p:sp>
       <p:sp>
         <p:nvSpPr>
@@ -11044,6 +10670,10 @@
           </a:solidFill>
           <a:ln/>
         </p:spPr>
+        <p:txBody>
+          <a:bodyPr/>
+          <a:p/>
+        </p:txBody>
       </p:sp>
       <p:sp>
         <p:nvSpPr>
@@ -11142,6 +10772,10 @@
           </a:solidFill>
           <a:ln/>
         </p:spPr>
+        <p:txBody>
+          <a:bodyPr/>
+          <a:p/>
+        </p:txBody>
       </p:sp>
       <p:sp>
         <p:nvSpPr>
@@ -11223,79 +10857,44 @@
       </p:sp>
       <p:sp>
         <p:nvSpPr>
-          <p:cNvPr id="13" name="Text 11"/>
-          <p:cNvSpPr txBox="1"/>
-          <p:nvPr/>
-        </p:nvSpPr>
-        <p:spPr>
-          <a:xfrm>
-            <a:off x="640080" y="6446520"/>
-            <a:ext cx="8686800" cy="292608"/>
-          </a:xfrm>
-          <a:prstGeom prst="rect">
-            <a:avLst/>
-          </a:prstGeom>
-          <a:noFill/>
-          <a:ln/>
-        </p:spPr>
-        <p:txBody>
-          <a:bodyPr wrap="square" lIns="0" tIns="0" rIns="0" bIns="0" rtlCol="0" anchor="ctr"/>
-          <a:lstStyle/>
-          <a:p>
-            <a:pPr algn="l" indent="0" marL="0">
-              <a:buNone/>
-            </a:pPr>
-            <a:r>
-              <a:rPr lang="en-US" sz="900" dirty="0">
-                <a:solidFill>
-                  <a:srgbClr val="5D5D72"/>
-                </a:solidFill>
-                <a:latin typeface="Calibri" pitchFamily="34" charset="0"/>
-                <a:ea typeface="Calibri" pitchFamily="34" charset="-122"/>
-                <a:cs typeface="Calibri" pitchFamily="34" charset="-120"/>
-              </a:rPr>
-              <a:t>Usman Akram  •  COMSATS University Islamabad</a:t>
-            </a:r>
-            <a:endParaRPr lang="en-US" sz="900" dirty="0"/>
-          </a:p>
-        </p:txBody>
-      </p:sp>
-      <p:sp>
-        <p:nvSpPr>
-          <p:cNvPr id="14" name="Text 12"/>
-          <p:cNvSpPr txBox="1"/>
-          <p:nvPr/>
-        </p:nvSpPr>
-        <p:spPr>
-          <a:xfrm>
-            <a:off x="11155680" y="6446520"/>
-            <a:ext cx="457200" cy="292608"/>
-          </a:xfrm>
-          <a:prstGeom prst="rect">
-            <a:avLst/>
-          </a:prstGeom>
-          <a:noFill/>
-          <a:ln/>
-        </p:spPr>
-        <p:txBody>
-          <a:bodyPr wrap="square" lIns="0" tIns="0" rIns="0" bIns="0" rtlCol="0" anchor="ctr"/>
-          <a:lstStyle/>
-          <a:p>
-            <a:pPr algn="r" indent="0" marL="0">
-              <a:buNone/>
-            </a:pPr>
-            <a:r>
-              <a:rPr lang="en-US" sz="900" dirty="0">
-                <a:solidFill>
-                  <a:srgbClr val="5D5D72"/>
-                </a:solidFill>
-                <a:latin typeface="Calibri" pitchFamily="34" charset="0"/>
-                <a:ea typeface="Calibri" pitchFamily="34" charset="-122"/>
-                <a:cs typeface="Calibri" pitchFamily="34" charset="-120"/>
-              </a:rPr>
-              <a:t>22</a:t>
-            </a:r>
-            <a:endParaRPr lang="en-US" sz="900" dirty="0"/>
+          <p:cNvPr id="15" name="cuinotes-footer-mark"/>
+          <p:cNvSpPr txBox="1"/>
+          <p:nvPr/>
+        </p:nvSpPr>
+        <p:spPr>
+          <a:xfrm>
+            <a:off x="9951720" y="6455664"/>
+            <a:ext cx="2011680" cy="292608"/>
+          </a:xfrm>
+          <a:prstGeom prst="rect">
+            <a:avLst/>
+          </a:prstGeom>
+          <a:noFill/>
+        </p:spPr>
+        <p:txBody>
+          <a:bodyPr wrap="none" lIns="0" rIns="0" tIns="0" bIns="0">
+            <a:spAutoFit/>
+          </a:bodyPr>
+          <a:lstStyle/>
+          <a:p>
+            <a:pPr algn="r"/>
+            <a:r>
+              <a:rPr sz="1000">
+                <a:solidFill>
+                  <a:srgbClr val="8A939B"/>
+                </a:solidFill>
+                <a:hlinkClick r:id="rId3"/>
+              </a:rPr>
+              <a:t>cuinotes.com</a:t>
+            </a:r>
+            <a:r>
+              <a:rPr sz="1000">
+                <a:solidFill>
+                  <a:srgbClr val="8A939B"/>
+                </a:solidFill>
+              </a:rPr>
+              <a:t>  ·  22</a:t>
+            </a:r>
           </a:p>
         </p:txBody>
       </p:sp>
@@ -11428,6 +11027,10 @@
           </a:solidFill>
           <a:ln/>
         </p:spPr>
+        <p:txBody>
+          <a:bodyPr/>
+          <a:p/>
+        </p:txBody>
       </p:sp>
       <p:sp>
         <p:nvSpPr>
@@ -11526,6 +11129,10 @@
           </a:solidFill>
           <a:ln/>
         </p:spPr>
+        <p:txBody>
+          <a:bodyPr/>
+          <a:p/>
+        </p:txBody>
       </p:sp>
       <p:sp>
         <p:nvSpPr>
@@ -11607,79 +11214,44 @@
       </p:sp>
       <p:sp>
         <p:nvSpPr>
-          <p:cNvPr id="10" name="Text 8"/>
-          <p:cNvSpPr txBox="1"/>
-          <p:nvPr/>
-        </p:nvSpPr>
-        <p:spPr>
-          <a:xfrm>
-            <a:off x="640080" y="6446520"/>
-            <a:ext cx="8686800" cy="292608"/>
-          </a:xfrm>
-          <a:prstGeom prst="rect">
-            <a:avLst/>
-          </a:prstGeom>
-          <a:noFill/>
-          <a:ln/>
-        </p:spPr>
-        <p:txBody>
-          <a:bodyPr wrap="square" lIns="0" tIns="0" rIns="0" bIns="0" rtlCol="0" anchor="ctr"/>
-          <a:lstStyle/>
-          <a:p>
-            <a:pPr algn="l" indent="0" marL="0">
-              <a:buNone/>
-            </a:pPr>
-            <a:r>
-              <a:rPr lang="en-US" sz="900" dirty="0">
-                <a:solidFill>
-                  <a:srgbClr val="5D5D72"/>
-                </a:solidFill>
-                <a:latin typeface="Calibri" pitchFamily="34" charset="0"/>
-                <a:ea typeface="Calibri" pitchFamily="34" charset="-122"/>
-                <a:cs typeface="Calibri" pitchFamily="34" charset="-120"/>
-              </a:rPr>
-              <a:t>Usman Akram  •  COMSATS University Islamabad</a:t>
-            </a:r>
-            <a:endParaRPr lang="en-US" sz="900" dirty="0"/>
-          </a:p>
-        </p:txBody>
-      </p:sp>
-      <p:sp>
-        <p:nvSpPr>
-          <p:cNvPr id="11" name="Text 9"/>
-          <p:cNvSpPr txBox="1"/>
-          <p:nvPr/>
-        </p:nvSpPr>
-        <p:spPr>
-          <a:xfrm>
-            <a:off x="11155680" y="6446520"/>
-            <a:ext cx="457200" cy="292608"/>
-          </a:xfrm>
-          <a:prstGeom prst="rect">
-            <a:avLst/>
-          </a:prstGeom>
-          <a:noFill/>
-          <a:ln/>
-        </p:spPr>
-        <p:txBody>
-          <a:bodyPr wrap="square" lIns="0" tIns="0" rIns="0" bIns="0" rtlCol="0" anchor="ctr"/>
-          <a:lstStyle/>
-          <a:p>
-            <a:pPr algn="r" indent="0" marL="0">
-              <a:buNone/>
-            </a:pPr>
-            <a:r>
-              <a:rPr lang="en-US" sz="900" dirty="0">
-                <a:solidFill>
-                  <a:srgbClr val="5D5D72"/>
-                </a:solidFill>
-                <a:latin typeface="Calibri" pitchFamily="34" charset="0"/>
-                <a:ea typeface="Calibri" pitchFamily="34" charset="-122"/>
-                <a:cs typeface="Calibri" pitchFamily="34" charset="-120"/>
-              </a:rPr>
-              <a:t>23</a:t>
-            </a:r>
-            <a:endParaRPr lang="en-US" sz="900" dirty="0"/>
+          <p:cNvPr id="12" name="cuinotes-footer-mark"/>
+          <p:cNvSpPr txBox="1"/>
+          <p:nvPr/>
+        </p:nvSpPr>
+        <p:spPr>
+          <a:xfrm>
+            <a:off x="9951720" y="6455664"/>
+            <a:ext cx="2011680" cy="292608"/>
+          </a:xfrm>
+          <a:prstGeom prst="rect">
+            <a:avLst/>
+          </a:prstGeom>
+          <a:noFill/>
+        </p:spPr>
+        <p:txBody>
+          <a:bodyPr wrap="none" lIns="0" rIns="0" tIns="0" bIns="0">
+            <a:spAutoFit/>
+          </a:bodyPr>
+          <a:lstStyle/>
+          <a:p>
+            <a:pPr algn="r"/>
+            <a:r>
+              <a:rPr sz="1000">
+                <a:solidFill>
+                  <a:srgbClr val="8A939B"/>
+                </a:solidFill>
+                <a:hlinkClick r:id="rId3"/>
+              </a:rPr>
+              <a:t>cuinotes.com</a:t>
+            </a:r>
+            <a:r>
+              <a:rPr sz="1000">
+                <a:solidFill>
+                  <a:srgbClr val="8A939B"/>
+                </a:solidFill>
+              </a:rPr>
+              <a:t>  ·  23</a:t>
+            </a:r>
           </a:p>
         </p:txBody>
       </p:sp>
@@ -11814,6 +11386,10 @@
           </a:solidFill>
           <a:ln/>
         </p:spPr>
+        <p:txBody>
+          <a:bodyPr/>
+          <a:p/>
+        </p:txBody>
       </p:sp>
       <p:sp>
         <p:nvSpPr>
@@ -12119,79 +11695,44 @@
       </p:sp>
       <p:sp>
         <p:nvSpPr>
-          <p:cNvPr id="6" name="Text 4"/>
-          <p:cNvSpPr txBox="1"/>
-          <p:nvPr/>
-        </p:nvSpPr>
-        <p:spPr>
-          <a:xfrm>
-            <a:off x="640080" y="6446520"/>
-            <a:ext cx="8686800" cy="292608"/>
-          </a:xfrm>
-          <a:prstGeom prst="rect">
-            <a:avLst/>
-          </a:prstGeom>
-          <a:noFill/>
-          <a:ln/>
-        </p:spPr>
-        <p:txBody>
-          <a:bodyPr wrap="square" lIns="0" tIns="0" rIns="0" bIns="0" rtlCol="0" anchor="ctr"/>
-          <a:lstStyle/>
-          <a:p>
-            <a:pPr algn="l" indent="0" marL="0">
-              <a:buNone/>
-            </a:pPr>
-            <a:r>
-              <a:rPr lang="en-US" sz="900" dirty="0">
-                <a:solidFill>
-                  <a:srgbClr val="5D5D72"/>
-                </a:solidFill>
-                <a:latin typeface="Calibri" pitchFamily="34" charset="0"/>
-                <a:ea typeface="Calibri" pitchFamily="34" charset="-122"/>
-                <a:cs typeface="Calibri" pitchFamily="34" charset="-120"/>
-              </a:rPr>
-              <a:t>Usman Akram  •  COMSATS University Islamabad</a:t>
-            </a:r>
-            <a:endParaRPr lang="en-US" sz="900" dirty="0"/>
-          </a:p>
-        </p:txBody>
-      </p:sp>
-      <p:sp>
-        <p:nvSpPr>
-          <p:cNvPr id="7" name="Text 5"/>
-          <p:cNvSpPr txBox="1"/>
-          <p:nvPr/>
-        </p:nvSpPr>
-        <p:spPr>
-          <a:xfrm>
-            <a:off x="11155680" y="6446520"/>
-            <a:ext cx="457200" cy="292608"/>
-          </a:xfrm>
-          <a:prstGeom prst="rect">
-            <a:avLst/>
-          </a:prstGeom>
-          <a:noFill/>
-          <a:ln/>
-        </p:spPr>
-        <p:txBody>
-          <a:bodyPr wrap="square" lIns="0" tIns="0" rIns="0" bIns="0" rtlCol="0" anchor="ctr"/>
-          <a:lstStyle/>
-          <a:p>
-            <a:pPr algn="r" indent="0" marL="0">
-              <a:buNone/>
-            </a:pPr>
-            <a:r>
-              <a:rPr lang="en-US" sz="900" dirty="0">
-                <a:solidFill>
-                  <a:srgbClr val="5D5D72"/>
-                </a:solidFill>
-                <a:latin typeface="Calibri" pitchFamily="34" charset="0"/>
-                <a:ea typeface="Calibri" pitchFamily="34" charset="-122"/>
-                <a:cs typeface="Calibri" pitchFamily="34" charset="-120"/>
-              </a:rPr>
-              <a:t>24</a:t>
-            </a:r>
-            <a:endParaRPr lang="en-US" sz="900" dirty="0"/>
+          <p:cNvPr id="8" name="cuinotes-footer-mark"/>
+          <p:cNvSpPr txBox="1"/>
+          <p:nvPr/>
+        </p:nvSpPr>
+        <p:spPr>
+          <a:xfrm>
+            <a:off x="9951720" y="6455664"/>
+            <a:ext cx="2011680" cy="292608"/>
+          </a:xfrm>
+          <a:prstGeom prst="rect">
+            <a:avLst/>
+          </a:prstGeom>
+          <a:noFill/>
+        </p:spPr>
+        <p:txBody>
+          <a:bodyPr wrap="none" lIns="0" rIns="0" tIns="0" bIns="0">
+            <a:spAutoFit/>
+          </a:bodyPr>
+          <a:lstStyle/>
+          <a:p>
+            <a:pPr algn="r"/>
+            <a:r>
+              <a:rPr sz="1000">
+                <a:solidFill>
+                  <a:srgbClr val="8A939B"/>
+                </a:solidFill>
+                <a:hlinkClick r:id="rId3"/>
+              </a:rPr>
+              <a:t>cuinotes.com</a:t>
+            </a:r>
+            <a:r>
+              <a:rPr sz="1000">
+                <a:solidFill>
+                  <a:srgbClr val="8A939B"/>
+                </a:solidFill>
+              </a:rPr>
+              <a:t>  ·  24</a:t>
+            </a:r>
           </a:p>
         </p:txBody>
       </p:sp>
@@ -12377,6 +11918,10 @@
             </a:outerShdw>
           </a:effectLst>
         </p:spPr>
+        <p:txBody>
+          <a:bodyPr/>
+          <a:p/>
+        </p:txBody>
       </p:sp>
       <p:pic>
         <p:nvPicPr>
@@ -12474,6 +12019,10 @@
             </a:outerShdw>
           </a:effectLst>
         </p:spPr>
+        <p:txBody>
+          <a:bodyPr/>
+          <a:p/>
+        </p:txBody>
       </p:sp>
       <p:pic>
         <p:nvPicPr>
@@ -12501,79 +12050,44 @@
       </p:pic>
       <p:sp>
         <p:nvSpPr>
-          <p:cNvPr id="10" name="Text 6"/>
-          <p:cNvSpPr txBox="1"/>
-          <p:nvPr/>
-        </p:nvSpPr>
-        <p:spPr>
-          <a:xfrm>
-            <a:off x="640080" y="6446520"/>
-            <a:ext cx="8686800" cy="292608"/>
-          </a:xfrm>
-          <a:prstGeom prst="rect">
-            <a:avLst/>
-          </a:prstGeom>
-          <a:noFill/>
-          <a:ln/>
-        </p:spPr>
-        <p:txBody>
-          <a:bodyPr wrap="square" lIns="0" tIns="0" rIns="0" bIns="0" rtlCol="0" anchor="ctr"/>
-          <a:lstStyle/>
-          <a:p>
-            <a:pPr algn="l" indent="0" marL="0">
-              <a:buNone/>
-            </a:pPr>
-            <a:r>
-              <a:rPr lang="en-US" sz="900" dirty="0">
-                <a:solidFill>
-                  <a:srgbClr val="5D5D72"/>
-                </a:solidFill>
-                <a:latin typeface="Calibri" pitchFamily="34" charset="0"/>
-                <a:ea typeface="Calibri" pitchFamily="34" charset="-122"/>
-                <a:cs typeface="Calibri" pitchFamily="34" charset="-120"/>
-              </a:rPr>
-              <a:t>Usman Akram  •  COMSATS University Islamabad</a:t>
-            </a:r>
-            <a:endParaRPr lang="en-US" sz="900" dirty="0"/>
-          </a:p>
-        </p:txBody>
-      </p:sp>
-      <p:sp>
-        <p:nvSpPr>
-          <p:cNvPr id="11" name="Text 7"/>
-          <p:cNvSpPr txBox="1"/>
-          <p:nvPr/>
-        </p:nvSpPr>
-        <p:spPr>
-          <a:xfrm>
-            <a:off x="11155680" y="6446520"/>
-            <a:ext cx="457200" cy="292608"/>
-          </a:xfrm>
-          <a:prstGeom prst="rect">
-            <a:avLst/>
-          </a:prstGeom>
-          <a:noFill/>
-          <a:ln/>
-        </p:spPr>
-        <p:txBody>
-          <a:bodyPr wrap="square" lIns="0" tIns="0" rIns="0" bIns="0" rtlCol="0" anchor="ctr"/>
-          <a:lstStyle/>
-          <a:p>
-            <a:pPr algn="r" indent="0" marL="0">
-              <a:buNone/>
-            </a:pPr>
-            <a:r>
-              <a:rPr lang="en-US" sz="900" dirty="0">
-                <a:solidFill>
-                  <a:srgbClr val="5D5D72"/>
-                </a:solidFill>
-                <a:latin typeface="Calibri" pitchFamily="34" charset="0"/>
-                <a:ea typeface="Calibri" pitchFamily="34" charset="-122"/>
-                <a:cs typeface="Calibri" pitchFamily="34" charset="-120"/>
-              </a:rPr>
-              <a:t>25</a:t>
-            </a:r>
-            <a:endParaRPr lang="en-US" sz="900" dirty="0"/>
+          <p:cNvPr id="12" name="cuinotes-footer-mark"/>
+          <p:cNvSpPr txBox="1"/>
+          <p:nvPr/>
+        </p:nvSpPr>
+        <p:spPr>
+          <a:xfrm>
+            <a:off x="9951720" y="6455664"/>
+            <a:ext cx="2011680" cy="292608"/>
+          </a:xfrm>
+          <a:prstGeom prst="rect">
+            <a:avLst/>
+          </a:prstGeom>
+          <a:noFill/>
+        </p:spPr>
+        <p:txBody>
+          <a:bodyPr wrap="none" lIns="0" rIns="0" tIns="0" bIns="0">
+            <a:spAutoFit/>
+          </a:bodyPr>
+          <a:lstStyle/>
+          <a:p>
+            <a:pPr algn="r"/>
+            <a:r>
+              <a:rPr sz="1000">
+                <a:solidFill>
+                  <a:srgbClr val="8A939B"/>
+                </a:solidFill>
+                <a:hlinkClick r:id="rId5"/>
+              </a:rPr>
+              <a:t>cuinotes.com</a:t>
+            </a:r>
+            <a:r>
+              <a:rPr sz="1000">
+                <a:solidFill>
+                  <a:srgbClr val="8A939B"/>
+                </a:solidFill>
+              </a:rPr>
+              <a:t>  ·  25</a:t>
+            </a:r>
           </a:p>
         </p:txBody>
       </p:sp>
@@ -12759,6 +12273,10 @@
             </a:outerShdw>
           </a:effectLst>
         </p:spPr>
+        <p:txBody>
+          <a:bodyPr/>
+          <a:p/>
+        </p:txBody>
       </p:sp>
       <p:pic>
         <p:nvPicPr>
@@ -12786,79 +12304,44 @@
       </p:pic>
       <p:sp>
         <p:nvSpPr>
-          <p:cNvPr id="7" name="Text 4"/>
-          <p:cNvSpPr txBox="1"/>
-          <p:nvPr/>
-        </p:nvSpPr>
-        <p:spPr>
-          <a:xfrm>
-            <a:off x="640080" y="6446520"/>
-            <a:ext cx="8686800" cy="292608"/>
-          </a:xfrm>
-          <a:prstGeom prst="rect">
-            <a:avLst/>
-          </a:prstGeom>
-          <a:noFill/>
-          <a:ln/>
-        </p:spPr>
-        <p:txBody>
-          <a:bodyPr wrap="square" lIns="0" tIns="0" rIns="0" bIns="0" rtlCol="0" anchor="ctr"/>
-          <a:lstStyle/>
-          <a:p>
-            <a:pPr algn="l" indent="0" marL="0">
-              <a:buNone/>
-            </a:pPr>
-            <a:r>
-              <a:rPr lang="en-US" sz="900" dirty="0">
-                <a:solidFill>
-                  <a:srgbClr val="5D5D72"/>
-                </a:solidFill>
-                <a:latin typeface="Calibri" pitchFamily="34" charset="0"/>
-                <a:ea typeface="Calibri" pitchFamily="34" charset="-122"/>
-                <a:cs typeface="Calibri" pitchFamily="34" charset="-120"/>
-              </a:rPr>
-              <a:t>Usman Akram  •  COMSATS University Islamabad</a:t>
-            </a:r>
-            <a:endParaRPr lang="en-US" sz="900" dirty="0"/>
-          </a:p>
-        </p:txBody>
-      </p:sp>
-      <p:sp>
-        <p:nvSpPr>
-          <p:cNvPr id="8" name="Text 5"/>
-          <p:cNvSpPr txBox="1"/>
-          <p:nvPr/>
-        </p:nvSpPr>
-        <p:spPr>
-          <a:xfrm>
-            <a:off x="11155680" y="6446520"/>
-            <a:ext cx="457200" cy="292608"/>
-          </a:xfrm>
-          <a:prstGeom prst="rect">
-            <a:avLst/>
-          </a:prstGeom>
-          <a:noFill/>
-          <a:ln/>
-        </p:spPr>
-        <p:txBody>
-          <a:bodyPr wrap="square" lIns="0" tIns="0" rIns="0" bIns="0" rtlCol="0" anchor="ctr"/>
-          <a:lstStyle/>
-          <a:p>
-            <a:pPr algn="r" indent="0" marL="0">
-              <a:buNone/>
-            </a:pPr>
-            <a:r>
-              <a:rPr lang="en-US" sz="900" dirty="0">
-                <a:solidFill>
-                  <a:srgbClr val="5D5D72"/>
-                </a:solidFill>
-                <a:latin typeface="Calibri" pitchFamily="34" charset="0"/>
-                <a:ea typeface="Calibri" pitchFamily="34" charset="-122"/>
-                <a:cs typeface="Calibri" pitchFamily="34" charset="-120"/>
-              </a:rPr>
-              <a:t>26</a:t>
-            </a:r>
-            <a:endParaRPr lang="en-US" sz="900" dirty="0"/>
+          <p:cNvPr id="9" name="cuinotes-footer-mark"/>
+          <p:cNvSpPr txBox="1"/>
+          <p:nvPr/>
+        </p:nvSpPr>
+        <p:spPr>
+          <a:xfrm>
+            <a:off x="9951720" y="6455664"/>
+            <a:ext cx="2011680" cy="292608"/>
+          </a:xfrm>
+          <a:prstGeom prst="rect">
+            <a:avLst/>
+          </a:prstGeom>
+          <a:noFill/>
+        </p:spPr>
+        <p:txBody>
+          <a:bodyPr wrap="none" lIns="0" rIns="0" tIns="0" bIns="0">
+            <a:spAutoFit/>
+          </a:bodyPr>
+          <a:lstStyle/>
+          <a:p>
+            <a:pPr algn="r"/>
+            <a:r>
+              <a:rPr sz="1000">
+                <a:solidFill>
+                  <a:srgbClr val="8A939B"/>
+                </a:solidFill>
+                <a:hlinkClick r:id="rId4"/>
+              </a:rPr>
+              <a:t>cuinotes.com</a:t>
+            </a:r>
+            <a:r>
+              <a:rPr sz="1000">
+                <a:solidFill>
+                  <a:srgbClr val="8A939B"/>
+                </a:solidFill>
+              </a:rPr>
+              <a:t>  ·  26</a:t>
+            </a:r>
           </a:p>
         </p:txBody>
       </p:sp>
@@ -12995,6 +12478,10 @@
             <a:tailEnd type="triangle"/>
           </a:ln>
         </p:spPr>
+        <p:txBody>
+          <a:bodyPr/>
+          <a:p/>
+        </p:txBody>
       </p:sp>
       <p:sp>
         <p:nvSpPr>
@@ -13019,6 +12506,10 @@
             <a:tailEnd type="triangle"/>
           </a:ln>
         </p:spPr>
+        <p:txBody>
+          <a:bodyPr/>
+          <a:p/>
+        </p:txBody>
       </p:sp>
       <p:sp>
         <p:nvSpPr>
@@ -13084,6 +12575,10 @@
             <a:tailEnd type="triangle"/>
           </a:ln>
         </p:spPr>
+        <p:txBody>
+          <a:bodyPr/>
+          <a:p/>
+        </p:txBody>
       </p:sp>
       <p:sp>
         <p:nvSpPr>
@@ -13149,6 +12644,10 @@
             <a:tailEnd type="triangle"/>
           </a:ln>
         </p:spPr>
+        <p:txBody>
+          <a:bodyPr/>
+          <a:p/>
+        </p:txBody>
       </p:sp>
       <p:sp>
         <p:nvSpPr>
@@ -13173,6 +12672,10 @@
             <a:tailEnd type="triangle"/>
           </a:ln>
         </p:spPr>
+        <p:txBody>
+          <a:bodyPr/>
+          <a:p/>
+        </p:txBody>
       </p:sp>
       <p:sp>
         <p:nvSpPr>
@@ -13193,6 +12696,10 @@
           </a:solidFill>
           <a:ln/>
         </p:spPr>
+        <p:txBody>
+          <a:bodyPr/>
+          <a:p/>
+        </p:txBody>
       </p:sp>
       <p:sp>
         <p:nvSpPr>
@@ -13275,6 +12782,10 @@
           </a:solidFill>
           <a:ln/>
         </p:spPr>
+        <p:txBody>
+          <a:bodyPr/>
+          <a:p/>
+        </p:txBody>
       </p:sp>
       <p:sp>
         <p:nvSpPr>
@@ -13357,6 +12868,10 @@
           </a:solidFill>
           <a:ln/>
         </p:spPr>
+        <p:txBody>
+          <a:bodyPr/>
+          <a:p/>
+        </p:txBody>
       </p:sp>
       <p:sp>
         <p:nvSpPr>
@@ -13439,6 +12954,10 @@
           </a:solidFill>
           <a:ln/>
         </p:spPr>
+        <p:txBody>
+          <a:bodyPr/>
+          <a:p/>
+        </p:txBody>
       </p:sp>
       <p:sp>
         <p:nvSpPr>
@@ -13521,6 +13040,10 @@
           </a:solidFill>
           <a:ln/>
         </p:spPr>
+        <p:txBody>
+          <a:bodyPr/>
+          <a:p/>
+        </p:txBody>
       </p:sp>
       <p:sp>
         <p:nvSpPr>
@@ -13625,79 +13148,44 @@
       </p:sp>
       <p:sp>
         <p:nvSpPr>
-          <p:cNvPr id="22" name="Text 20"/>
-          <p:cNvSpPr txBox="1"/>
-          <p:nvPr/>
-        </p:nvSpPr>
-        <p:spPr>
-          <a:xfrm>
-            <a:off x="640080" y="6446520"/>
-            <a:ext cx="8686800" cy="292608"/>
-          </a:xfrm>
-          <a:prstGeom prst="rect">
-            <a:avLst/>
-          </a:prstGeom>
-          <a:noFill/>
-          <a:ln/>
-        </p:spPr>
-        <p:txBody>
-          <a:bodyPr wrap="square" lIns="0" tIns="0" rIns="0" bIns="0" rtlCol="0" anchor="ctr"/>
-          <a:lstStyle/>
-          <a:p>
-            <a:pPr algn="l" indent="0" marL="0">
-              <a:buNone/>
-            </a:pPr>
-            <a:r>
-              <a:rPr lang="en-US" sz="900" dirty="0">
-                <a:solidFill>
-                  <a:srgbClr val="5D5D72"/>
-                </a:solidFill>
-                <a:latin typeface="Calibri" pitchFamily="34" charset="0"/>
-                <a:ea typeface="Calibri" pitchFamily="34" charset="-122"/>
-                <a:cs typeface="Calibri" pitchFamily="34" charset="-120"/>
-              </a:rPr>
-              <a:t>Usman Akram  •  COMSATS University Islamabad</a:t>
-            </a:r>
-            <a:endParaRPr lang="en-US" sz="900" dirty="0"/>
-          </a:p>
-        </p:txBody>
-      </p:sp>
-      <p:sp>
-        <p:nvSpPr>
-          <p:cNvPr id="23" name="Text 21"/>
-          <p:cNvSpPr txBox="1"/>
-          <p:nvPr/>
-        </p:nvSpPr>
-        <p:spPr>
-          <a:xfrm>
-            <a:off x="11155680" y="6446520"/>
-            <a:ext cx="457200" cy="292608"/>
-          </a:xfrm>
-          <a:prstGeom prst="rect">
-            <a:avLst/>
-          </a:prstGeom>
-          <a:noFill/>
-          <a:ln/>
-        </p:spPr>
-        <p:txBody>
-          <a:bodyPr wrap="square" lIns="0" tIns="0" rIns="0" bIns="0" rtlCol="0" anchor="ctr"/>
-          <a:lstStyle/>
-          <a:p>
-            <a:pPr algn="r" indent="0" marL="0">
-              <a:buNone/>
-            </a:pPr>
-            <a:r>
-              <a:rPr lang="en-US" sz="900" dirty="0">
-                <a:solidFill>
-                  <a:srgbClr val="5D5D72"/>
-                </a:solidFill>
-                <a:latin typeface="Calibri" pitchFamily="34" charset="0"/>
-                <a:ea typeface="Calibri" pitchFamily="34" charset="-122"/>
-                <a:cs typeface="Calibri" pitchFamily="34" charset="-120"/>
-              </a:rPr>
-              <a:t>27</a:t>
-            </a:r>
-            <a:endParaRPr lang="en-US" sz="900" dirty="0"/>
+          <p:cNvPr id="24" name="cuinotes-footer-mark"/>
+          <p:cNvSpPr txBox="1"/>
+          <p:nvPr/>
+        </p:nvSpPr>
+        <p:spPr>
+          <a:xfrm>
+            <a:off x="9951720" y="6455664"/>
+            <a:ext cx="2011680" cy="292608"/>
+          </a:xfrm>
+          <a:prstGeom prst="rect">
+            <a:avLst/>
+          </a:prstGeom>
+          <a:noFill/>
+        </p:spPr>
+        <p:txBody>
+          <a:bodyPr wrap="none" lIns="0" rIns="0" tIns="0" bIns="0">
+            <a:spAutoFit/>
+          </a:bodyPr>
+          <a:lstStyle/>
+          <a:p>
+            <a:pPr algn="r"/>
+            <a:r>
+              <a:rPr sz="1000">
+                <a:solidFill>
+                  <a:srgbClr val="8A939B"/>
+                </a:solidFill>
+                <a:hlinkClick r:id="rId3"/>
+              </a:rPr>
+              <a:t>cuinotes.com</a:t>
+            </a:r>
+            <a:r>
+              <a:rPr sz="1000">
+                <a:solidFill>
+                  <a:srgbClr val="8A939B"/>
+                </a:solidFill>
+              </a:rPr>
+              <a:t>  ·  27</a:t>
+            </a:r>
           </a:p>
         </p:txBody>
       </p:sp>
@@ -13830,6 +13318,10 @@
           </a:solidFill>
           <a:ln/>
         </p:spPr>
+        <p:txBody>
+          <a:bodyPr/>
+          <a:p/>
+        </p:txBody>
       </p:sp>
       <p:sp>
         <p:nvSpPr>
@@ -13928,6 +13420,10 @@
           </a:solidFill>
           <a:ln/>
         </p:spPr>
+        <p:txBody>
+          <a:bodyPr/>
+          <a:p/>
+        </p:txBody>
       </p:sp>
       <p:sp>
         <p:nvSpPr>
@@ -14009,79 +13505,44 @@
       </p:sp>
       <p:sp>
         <p:nvSpPr>
-          <p:cNvPr id="10" name="Text 8"/>
-          <p:cNvSpPr txBox="1"/>
-          <p:nvPr/>
-        </p:nvSpPr>
-        <p:spPr>
-          <a:xfrm>
-            <a:off x="640080" y="6446520"/>
-            <a:ext cx="8686800" cy="292608"/>
-          </a:xfrm>
-          <a:prstGeom prst="rect">
-            <a:avLst/>
-          </a:prstGeom>
-          <a:noFill/>
-          <a:ln/>
-        </p:spPr>
-        <p:txBody>
-          <a:bodyPr wrap="square" lIns="0" tIns="0" rIns="0" bIns="0" rtlCol="0" anchor="ctr"/>
-          <a:lstStyle/>
-          <a:p>
-            <a:pPr algn="l" indent="0" marL="0">
-              <a:buNone/>
-            </a:pPr>
-            <a:r>
-              <a:rPr lang="en-US" sz="900" dirty="0">
-                <a:solidFill>
-                  <a:srgbClr val="5D5D72"/>
-                </a:solidFill>
-                <a:latin typeface="Calibri" pitchFamily="34" charset="0"/>
-                <a:ea typeface="Calibri" pitchFamily="34" charset="-122"/>
-                <a:cs typeface="Calibri" pitchFamily="34" charset="-120"/>
-              </a:rPr>
-              <a:t>Usman Akram  •  COMSATS University Islamabad</a:t>
-            </a:r>
-            <a:endParaRPr lang="en-US" sz="900" dirty="0"/>
-          </a:p>
-        </p:txBody>
-      </p:sp>
-      <p:sp>
-        <p:nvSpPr>
-          <p:cNvPr id="11" name="Text 9"/>
-          <p:cNvSpPr txBox="1"/>
-          <p:nvPr/>
-        </p:nvSpPr>
-        <p:spPr>
-          <a:xfrm>
-            <a:off x="11155680" y="6446520"/>
-            <a:ext cx="457200" cy="292608"/>
-          </a:xfrm>
-          <a:prstGeom prst="rect">
-            <a:avLst/>
-          </a:prstGeom>
-          <a:noFill/>
-          <a:ln/>
-        </p:spPr>
-        <p:txBody>
-          <a:bodyPr wrap="square" lIns="0" tIns="0" rIns="0" bIns="0" rtlCol="0" anchor="ctr"/>
-          <a:lstStyle/>
-          <a:p>
-            <a:pPr algn="r" indent="0" marL="0">
-              <a:buNone/>
-            </a:pPr>
-            <a:r>
-              <a:rPr lang="en-US" sz="900" dirty="0">
-                <a:solidFill>
-                  <a:srgbClr val="5D5D72"/>
-                </a:solidFill>
-                <a:latin typeface="Calibri" pitchFamily="34" charset="0"/>
-                <a:ea typeface="Calibri" pitchFamily="34" charset="-122"/>
-                <a:cs typeface="Calibri" pitchFamily="34" charset="-120"/>
-              </a:rPr>
-              <a:t>28</a:t>
-            </a:r>
-            <a:endParaRPr lang="en-US" sz="900" dirty="0"/>
+          <p:cNvPr id="12" name="cuinotes-footer-mark"/>
+          <p:cNvSpPr txBox="1"/>
+          <p:nvPr/>
+        </p:nvSpPr>
+        <p:spPr>
+          <a:xfrm>
+            <a:off x="9951720" y="6455664"/>
+            <a:ext cx="2011680" cy="292608"/>
+          </a:xfrm>
+          <a:prstGeom prst="rect">
+            <a:avLst/>
+          </a:prstGeom>
+          <a:noFill/>
+        </p:spPr>
+        <p:txBody>
+          <a:bodyPr wrap="none" lIns="0" rIns="0" tIns="0" bIns="0">
+            <a:spAutoFit/>
+          </a:bodyPr>
+          <a:lstStyle/>
+          <a:p>
+            <a:pPr algn="r"/>
+            <a:r>
+              <a:rPr sz="1000">
+                <a:solidFill>
+                  <a:srgbClr val="8A939B"/>
+                </a:solidFill>
+                <a:hlinkClick r:id="rId3"/>
+              </a:rPr>
+              <a:t>cuinotes.com</a:t>
+            </a:r>
+            <a:r>
+              <a:rPr sz="1000">
+                <a:solidFill>
+                  <a:srgbClr val="8A939B"/>
+                </a:solidFill>
+              </a:rPr>
+              <a:t>  ·  28</a:t>
+            </a:r>
           </a:p>
         </p:txBody>
       </p:sp>
@@ -14216,6 +13677,10 @@
           </a:solidFill>
           <a:ln/>
         </p:spPr>
+        <p:txBody>
+          <a:bodyPr/>
+          <a:p/>
+        </p:txBody>
       </p:sp>
       <p:sp>
         <p:nvSpPr>
@@ -14560,79 +14025,44 @@
       </p:sp>
       <p:sp>
         <p:nvSpPr>
-          <p:cNvPr id="7" name="Text 5"/>
-          <p:cNvSpPr txBox="1"/>
-          <p:nvPr/>
-        </p:nvSpPr>
-        <p:spPr>
-          <a:xfrm>
-            <a:off x="640080" y="6446520"/>
-            <a:ext cx="8686800" cy="292608"/>
-          </a:xfrm>
-          <a:prstGeom prst="rect">
-            <a:avLst/>
-          </a:prstGeom>
-          <a:noFill/>
-          <a:ln/>
-        </p:spPr>
-        <p:txBody>
-          <a:bodyPr wrap="square" lIns="0" tIns="0" rIns="0" bIns="0" rtlCol="0" anchor="ctr"/>
-          <a:lstStyle/>
-          <a:p>
-            <a:pPr algn="l" indent="0" marL="0">
-              <a:buNone/>
-            </a:pPr>
-            <a:r>
-              <a:rPr lang="en-US" sz="900" dirty="0">
-                <a:solidFill>
-                  <a:srgbClr val="5D5D72"/>
-                </a:solidFill>
-                <a:latin typeface="Calibri" pitchFamily="34" charset="0"/>
-                <a:ea typeface="Calibri" pitchFamily="34" charset="-122"/>
-                <a:cs typeface="Calibri" pitchFamily="34" charset="-120"/>
-              </a:rPr>
-              <a:t>Usman Akram  •  COMSATS University Islamabad</a:t>
-            </a:r>
-            <a:endParaRPr lang="en-US" sz="900" dirty="0"/>
-          </a:p>
-        </p:txBody>
-      </p:sp>
-      <p:sp>
-        <p:nvSpPr>
-          <p:cNvPr id="8" name="Text 6"/>
-          <p:cNvSpPr txBox="1"/>
-          <p:nvPr/>
-        </p:nvSpPr>
-        <p:spPr>
-          <a:xfrm>
-            <a:off x="11155680" y="6446520"/>
-            <a:ext cx="457200" cy="292608"/>
-          </a:xfrm>
-          <a:prstGeom prst="rect">
-            <a:avLst/>
-          </a:prstGeom>
-          <a:noFill/>
-          <a:ln/>
-        </p:spPr>
-        <p:txBody>
-          <a:bodyPr wrap="square" lIns="0" tIns="0" rIns="0" bIns="0" rtlCol="0" anchor="ctr"/>
-          <a:lstStyle/>
-          <a:p>
-            <a:pPr algn="r" indent="0" marL="0">
-              <a:buNone/>
-            </a:pPr>
-            <a:r>
-              <a:rPr lang="en-US" sz="900" dirty="0">
-                <a:solidFill>
-                  <a:srgbClr val="5D5D72"/>
-                </a:solidFill>
-                <a:latin typeface="Calibri" pitchFamily="34" charset="0"/>
-                <a:ea typeface="Calibri" pitchFamily="34" charset="-122"/>
-                <a:cs typeface="Calibri" pitchFamily="34" charset="-120"/>
-              </a:rPr>
-              <a:t>29</a:t>
-            </a:r>
-            <a:endParaRPr lang="en-US" sz="900" dirty="0"/>
+          <p:cNvPr id="9" name="cuinotes-footer-mark"/>
+          <p:cNvSpPr txBox="1"/>
+          <p:nvPr/>
+        </p:nvSpPr>
+        <p:spPr>
+          <a:xfrm>
+            <a:off x="9951720" y="6455664"/>
+            <a:ext cx="2011680" cy="292608"/>
+          </a:xfrm>
+          <a:prstGeom prst="rect">
+            <a:avLst/>
+          </a:prstGeom>
+          <a:noFill/>
+        </p:spPr>
+        <p:txBody>
+          <a:bodyPr wrap="none" lIns="0" rIns="0" tIns="0" bIns="0">
+            <a:spAutoFit/>
+          </a:bodyPr>
+          <a:lstStyle/>
+          <a:p>
+            <a:pPr algn="r"/>
+            <a:r>
+              <a:rPr sz="1000">
+                <a:solidFill>
+                  <a:srgbClr val="8A939B"/>
+                </a:solidFill>
+                <a:hlinkClick r:id="rId3"/>
+              </a:rPr>
+              <a:t>cuinotes.com</a:t>
+            </a:r>
+            <a:r>
+              <a:rPr sz="1000">
+                <a:solidFill>
+                  <a:srgbClr val="8A939B"/>
+                </a:solidFill>
+              </a:rPr>
+              <a:t>  ·  29</a:t>
+            </a:r>
           </a:p>
         </p:txBody>
       </p:sp>
@@ -14765,6 +14195,10 @@
           </a:solidFill>
           <a:ln/>
         </p:spPr>
+        <p:txBody>
+          <a:bodyPr/>
+          <a:p/>
+        </p:txBody>
       </p:sp>
       <p:sp>
         <p:nvSpPr>
@@ -14863,6 +14297,10 @@
           </a:solidFill>
           <a:ln/>
         </p:spPr>
+        <p:txBody>
+          <a:bodyPr/>
+          <a:p/>
+        </p:txBody>
       </p:sp>
       <p:sp>
         <p:nvSpPr>
@@ -14961,6 +14399,10 @@
           </a:solidFill>
           <a:ln/>
         </p:spPr>
+        <p:txBody>
+          <a:bodyPr/>
+          <a:p/>
+        </p:txBody>
       </p:sp>
       <p:sp>
         <p:nvSpPr>
@@ -15042,79 +14484,44 @@
       </p:sp>
       <p:sp>
         <p:nvSpPr>
-          <p:cNvPr id="13" name="Text 11"/>
-          <p:cNvSpPr txBox="1"/>
-          <p:nvPr/>
-        </p:nvSpPr>
-        <p:spPr>
-          <a:xfrm>
-            <a:off x="640080" y="6446520"/>
-            <a:ext cx="8686800" cy="292608"/>
-          </a:xfrm>
-          <a:prstGeom prst="rect">
-            <a:avLst/>
-          </a:prstGeom>
-          <a:noFill/>
-          <a:ln/>
-        </p:spPr>
-        <p:txBody>
-          <a:bodyPr wrap="square" lIns="0" tIns="0" rIns="0" bIns="0" rtlCol="0" anchor="ctr"/>
-          <a:lstStyle/>
-          <a:p>
-            <a:pPr algn="l" indent="0" marL="0">
-              <a:buNone/>
-            </a:pPr>
-            <a:r>
-              <a:rPr lang="en-US" sz="900" dirty="0">
-                <a:solidFill>
-                  <a:srgbClr val="5D5D72"/>
-                </a:solidFill>
-                <a:latin typeface="Calibri" pitchFamily="34" charset="0"/>
-                <a:ea typeface="Calibri" pitchFamily="34" charset="-122"/>
-                <a:cs typeface="Calibri" pitchFamily="34" charset="-120"/>
-              </a:rPr>
-              <a:t>Usman Akram  •  COMSATS University Islamabad</a:t>
-            </a:r>
-            <a:endParaRPr lang="en-US" sz="900" dirty="0"/>
-          </a:p>
-        </p:txBody>
-      </p:sp>
-      <p:sp>
-        <p:nvSpPr>
-          <p:cNvPr id="14" name="Text 12"/>
-          <p:cNvSpPr txBox="1"/>
-          <p:nvPr/>
-        </p:nvSpPr>
-        <p:spPr>
-          <a:xfrm>
-            <a:off x="11155680" y="6446520"/>
-            <a:ext cx="457200" cy="292608"/>
-          </a:xfrm>
-          <a:prstGeom prst="rect">
-            <a:avLst/>
-          </a:prstGeom>
-          <a:noFill/>
-          <a:ln/>
-        </p:spPr>
-        <p:txBody>
-          <a:bodyPr wrap="square" lIns="0" tIns="0" rIns="0" bIns="0" rtlCol="0" anchor="ctr"/>
-          <a:lstStyle/>
-          <a:p>
-            <a:pPr algn="r" indent="0" marL="0">
-              <a:buNone/>
-            </a:pPr>
-            <a:r>
-              <a:rPr lang="en-US" sz="900" dirty="0">
-                <a:solidFill>
-                  <a:srgbClr val="5D5D72"/>
-                </a:solidFill>
-                <a:latin typeface="Calibri" pitchFamily="34" charset="0"/>
-                <a:ea typeface="Calibri" pitchFamily="34" charset="-122"/>
-                <a:cs typeface="Calibri" pitchFamily="34" charset="-120"/>
-              </a:rPr>
-              <a:t>3</a:t>
-            </a:r>
-            <a:endParaRPr lang="en-US" sz="900" dirty="0"/>
+          <p:cNvPr id="15" name="cuinotes-footer-mark"/>
+          <p:cNvSpPr txBox="1"/>
+          <p:nvPr/>
+        </p:nvSpPr>
+        <p:spPr>
+          <a:xfrm>
+            <a:off x="9951720" y="6455664"/>
+            <a:ext cx="2011680" cy="292608"/>
+          </a:xfrm>
+          <a:prstGeom prst="rect">
+            <a:avLst/>
+          </a:prstGeom>
+          <a:noFill/>
+        </p:spPr>
+        <p:txBody>
+          <a:bodyPr wrap="none" lIns="0" rIns="0" tIns="0" bIns="0">
+            <a:spAutoFit/>
+          </a:bodyPr>
+          <a:lstStyle/>
+          <a:p>
+            <a:pPr algn="r"/>
+            <a:r>
+              <a:rPr sz="1000">
+                <a:solidFill>
+                  <a:srgbClr val="8A939B"/>
+                </a:solidFill>
+                <a:hlinkClick r:id="rId3"/>
+              </a:rPr>
+              <a:t>cuinotes.com</a:t>
+            </a:r>
+            <a:r>
+              <a:rPr sz="1000">
+                <a:solidFill>
+                  <a:srgbClr val="8A939B"/>
+                </a:solidFill>
+              </a:rPr>
+              <a:t>  ·  3</a:t>
+            </a:r>
           </a:p>
         </p:txBody>
       </p:sp>
@@ -15249,6 +14656,10 @@
           </a:solidFill>
           <a:ln/>
         </p:spPr>
+        <p:txBody>
+          <a:bodyPr/>
+          <a:p/>
+        </p:txBody>
       </p:sp>
       <p:sp>
         <p:nvSpPr>
@@ -15613,79 +15024,44 @@
       </p:sp>
       <p:sp>
         <p:nvSpPr>
-          <p:cNvPr id="7" name="Text 5"/>
-          <p:cNvSpPr txBox="1"/>
-          <p:nvPr/>
-        </p:nvSpPr>
-        <p:spPr>
-          <a:xfrm>
-            <a:off x="640080" y="6446520"/>
-            <a:ext cx="8686800" cy="292608"/>
-          </a:xfrm>
-          <a:prstGeom prst="rect">
-            <a:avLst/>
-          </a:prstGeom>
-          <a:noFill/>
-          <a:ln/>
-        </p:spPr>
-        <p:txBody>
-          <a:bodyPr wrap="square" lIns="0" tIns="0" rIns="0" bIns="0" rtlCol="0" anchor="ctr"/>
-          <a:lstStyle/>
-          <a:p>
-            <a:pPr algn="l" indent="0" marL="0">
-              <a:buNone/>
-            </a:pPr>
-            <a:r>
-              <a:rPr lang="en-US" sz="900" dirty="0">
-                <a:solidFill>
-                  <a:srgbClr val="5D5D72"/>
-                </a:solidFill>
-                <a:latin typeface="Calibri" pitchFamily="34" charset="0"/>
-                <a:ea typeface="Calibri" pitchFamily="34" charset="-122"/>
-                <a:cs typeface="Calibri" pitchFamily="34" charset="-120"/>
-              </a:rPr>
-              <a:t>Usman Akram  •  COMSATS University Islamabad</a:t>
-            </a:r>
-            <a:endParaRPr lang="en-US" sz="900" dirty="0"/>
-          </a:p>
-        </p:txBody>
-      </p:sp>
-      <p:sp>
-        <p:nvSpPr>
-          <p:cNvPr id="8" name="Text 6"/>
-          <p:cNvSpPr txBox="1"/>
-          <p:nvPr/>
-        </p:nvSpPr>
-        <p:spPr>
-          <a:xfrm>
-            <a:off x="11155680" y="6446520"/>
-            <a:ext cx="457200" cy="292608"/>
-          </a:xfrm>
-          <a:prstGeom prst="rect">
-            <a:avLst/>
-          </a:prstGeom>
-          <a:noFill/>
-          <a:ln/>
-        </p:spPr>
-        <p:txBody>
-          <a:bodyPr wrap="square" lIns="0" tIns="0" rIns="0" bIns="0" rtlCol="0" anchor="ctr"/>
-          <a:lstStyle/>
-          <a:p>
-            <a:pPr algn="r" indent="0" marL="0">
-              <a:buNone/>
-            </a:pPr>
-            <a:r>
-              <a:rPr lang="en-US" sz="900" dirty="0">
-                <a:solidFill>
-                  <a:srgbClr val="5D5D72"/>
-                </a:solidFill>
-                <a:latin typeface="Calibri" pitchFamily="34" charset="0"/>
-                <a:ea typeface="Calibri" pitchFamily="34" charset="-122"/>
-                <a:cs typeface="Calibri" pitchFamily="34" charset="-120"/>
-              </a:rPr>
-              <a:t>30</a:t>
-            </a:r>
-            <a:endParaRPr lang="en-US" sz="900" dirty="0"/>
+          <p:cNvPr id="9" name="cuinotes-footer-mark"/>
+          <p:cNvSpPr txBox="1"/>
+          <p:nvPr/>
+        </p:nvSpPr>
+        <p:spPr>
+          <a:xfrm>
+            <a:off x="9951720" y="6455664"/>
+            <a:ext cx="2011680" cy="292608"/>
+          </a:xfrm>
+          <a:prstGeom prst="rect">
+            <a:avLst/>
+          </a:prstGeom>
+          <a:noFill/>
+        </p:spPr>
+        <p:txBody>
+          <a:bodyPr wrap="none" lIns="0" rIns="0" tIns="0" bIns="0">
+            <a:spAutoFit/>
+          </a:bodyPr>
+          <a:lstStyle/>
+          <a:p>
+            <a:pPr algn="r"/>
+            <a:r>
+              <a:rPr sz="1000">
+                <a:solidFill>
+                  <a:srgbClr val="8A939B"/>
+                </a:solidFill>
+                <a:hlinkClick r:id="rId3"/>
+              </a:rPr>
+              <a:t>cuinotes.com</a:t>
+            </a:r>
+            <a:r>
+              <a:rPr sz="1000">
+                <a:solidFill>
+                  <a:srgbClr val="8A939B"/>
+                </a:solidFill>
+              </a:rPr>
+              <a:t>  ·  30</a:t>
+            </a:r>
           </a:p>
         </p:txBody>
       </p:sp>
@@ -15825,6 +15201,10 @@
             <a:prstDash val="solid"/>
           </a:ln>
         </p:spPr>
+        <p:txBody>
+          <a:bodyPr/>
+          <a:p/>
+        </p:txBody>
       </p:sp>
       <p:sp>
         <p:nvSpPr>
@@ -15906,79 +15286,44 @@
       </p:sp>
       <p:sp>
         <p:nvSpPr>
-          <p:cNvPr id="7" name="Text 5"/>
-          <p:cNvSpPr txBox="1"/>
-          <p:nvPr/>
-        </p:nvSpPr>
-        <p:spPr>
-          <a:xfrm>
-            <a:off x="640080" y="6446520"/>
-            <a:ext cx="8686800" cy="292608"/>
-          </a:xfrm>
-          <a:prstGeom prst="rect">
-            <a:avLst/>
-          </a:prstGeom>
-          <a:noFill/>
-          <a:ln/>
-        </p:spPr>
-        <p:txBody>
-          <a:bodyPr wrap="square" lIns="0" tIns="0" rIns="0" bIns="0" rtlCol="0" anchor="ctr"/>
-          <a:lstStyle/>
-          <a:p>
-            <a:pPr algn="l" indent="0" marL="0">
-              <a:buNone/>
-            </a:pPr>
-            <a:r>
-              <a:rPr lang="en-US" sz="900" dirty="0">
-                <a:solidFill>
-                  <a:srgbClr val="5D5D72"/>
-                </a:solidFill>
-                <a:latin typeface="Calibri" pitchFamily="34" charset="0"/>
-                <a:ea typeface="Calibri" pitchFamily="34" charset="-122"/>
-                <a:cs typeface="Calibri" pitchFamily="34" charset="-120"/>
-              </a:rPr>
-              <a:t>Usman Akram  •  COMSATS University Islamabad</a:t>
-            </a:r>
-            <a:endParaRPr lang="en-US" sz="900" dirty="0"/>
-          </a:p>
-        </p:txBody>
-      </p:sp>
-      <p:sp>
-        <p:nvSpPr>
-          <p:cNvPr id="8" name="Text 6"/>
-          <p:cNvSpPr txBox="1"/>
-          <p:nvPr/>
-        </p:nvSpPr>
-        <p:spPr>
-          <a:xfrm>
-            <a:off x="11155680" y="6446520"/>
-            <a:ext cx="457200" cy="292608"/>
-          </a:xfrm>
-          <a:prstGeom prst="rect">
-            <a:avLst/>
-          </a:prstGeom>
-          <a:noFill/>
-          <a:ln/>
-        </p:spPr>
-        <p:txBody>
-          <a:bodyPr wrap="square" lIns="0" tIns="0" rIns="0" bIns="0" rtlCol="0" anchor="ctr"/>
-          <a:lstStyle/>
-          <a:p>
-            <a:pPr algn="r" indent="0" marL="0">
-              <a:buNone/>
-            </a:pPr>
-            <a:r>
-              <a:rPr lang="en-US" sz="900" dirty="0">
-                <a:solidFill>
-                  <a:srgbClr val="5D5D72"/>
-                </a:solidFill>
-                <a:latin typeface="Calibri" pitchFamily="34" charset="0"/>
-                <a:ea typeface="Calibri" pitchFamily="34" charset="-122"/>
-                <a:cs typeface="Calibri" pitchFamily="34" charset="-120"/>
-              </a:rPr>
-              <a:t>31</a:t>
-            </a:r>
-            <a:endParaRPr lang="en-US" sz="900" dirty="0"/>
+          <p:cNvPr id="9" name="cuinotes-footer-mark"/>
+          <p:cNvSpPr txBox="1"/>
+          <p:nvPr/>
+        </p:nvSpPr>
+        <p:spPr>
+          <a:xfrm>
+            <a:off x="9951720" y="6455664"/>
+            <a:ext cx="2011680" cy="292608"/>
+          </a:xfrm>
+          <a:prstGeom prst="rect">
+            <a:avLst/>
+          </a:prstGeom>
+          <a:noFill/>
+        </p:spPr>
+        <p:txBody>
+          <a:bodyPr wrap="none" lIns="0" rIns="0" tIns="0" bIns="0">
+            <a:spAutoFit/>
+          </a:bodyPr>
+          <a:lstStyle/>
+          <a:p>
+            <a:pPr algn="r"/>
+            <a:r>
+              <a:rPr sz="1000">
+                <a:solidFill>
+                  <a:srgbClr val="8A939B"/>
+                </a:solidFill>
+                <a:hlinkClick r:id="rId3"/>
+              </a:rPr>
+              <a:t>cuinotes.com</a:t>
+            </a:r>
+            <a:r>
+              <a:rPr sz="1000">
+                <a:solidFill>
+                  <a:srgbClr val="8A939B"/>
+                </a:solidFill>
+              </a:rPr>
+              <a:t>  ·  31</a:t>
+            </a:r>
           </a:p>
         </p:txBody>
       </p:sp>
@@ -16111,6 +15456,10 @@
           </a:solidFill>
           <a:ln/>
         </p:spPr>
+        <p:txBody>
+          <a:bodyPr/>
+          <a:p/>
+        </p:txBody>
       </p:sp>
       <p:sp>
         <p:nvSpPr>
@@ -16209,6 +15558,10 @@
           </a:solidFill>
           <a:ln/>
         </p:spPr>
+        <p:txBody>
+          <a:bodyPr/>
+          <a:p/>
+        </p:txBody>
       </p:sp>
       <p:sp>
         <p:nvSpPr>
@@ -16307,6 +15660,10 @@
           </a:solidFill>
           <a:ln/>
         </p:spPr>
+        <p:txBody>
+          <a:bodyPr/>
+          <a:p/>
+        </p:txBody>
       </p:sp>
       <p:sp>
         <p:nvSpPr>
@@ -16405,6 +15762,10 @@
           </a:solidFill>
           <a:ln/>
         </p:spPr>
+        <p:txBody>
+          <a:bodyPr/>
+          <a:p/>
+        </p:txBody>
       </p:sp>
       <p:sp>
         <p:nvSpPr>
@@ -16503,6 +15864,10 @@
           </a:solidFill>
           <a:ln/>
         </p:spPr>
+        <p:txBody>
+          <a:bodyPr/>
+          <a:p/>
+        </p:txBody>
       </p:sp>
       <p:sp>
         <p:nvSpPr>
@@ -16601,6 +15966,10 @@
           </a:solidFill>
           <a:ln/>
         </p:spPr>
+        <p:txBody>
+          <a:bodyPr/>
+          <a:p/>
+        </p:txBody>
       </p:sp>
       <p:sp>
         <p:nvSpPr>
@@ -16699,6 +16068,10 @@
           </a:solidFill>
           <a:ln/>
         </p:spPr>
+        <p:txBody>
+          <a:bodyPr/>
+          <a:p/>
+        </p:txBody>
       </p:sp>
       <p:sp>
         <p:nvSpPr>
@@ -16780,79 +16153,44 @@
       </p:sp>
       <p:sp>
         <p:nvSpPr>
-          <p:cNvPr id="25" name="Text 23"/>
-          <p:cNvSpPr txBox="1"/>
-          <p:nvPr/>
-        </p:nvSpPr>
-        <p:spPr>
-          <a:xfrm>
-            <a:off x="640080" y="6446520"/>
-            <a:ext cx="8686800" cy="292608"/>
-          </a:xfrm>
-          <a:prstGeom prst="rect">
-            <a:avLst/>
-          </a:prstGeom>
-          <a:noFill/>
-          <a:ln/>
-        </p:spPr>
-        <p:txBody>
-          <a:bodyPr wrap="square" lIns="0" tIns="0" rIns="0" bIns="0" rtlCol="0" anchor="ctr"/>
-          <a:lstStyle/>
-          <a:p>
-            <a:pPr algn="l" indent="0" marL="0">
-              <a:buNone/>
-            </a:pPr>
-            <a:r>
-              <a:rPr lang="en-US" sz="900" dirty="0">
-                <a:solidFill>
-                  <a:srgbClr val="9AA3D8"/>
-                </a:solidFill>
-                <a:latin typeface="Calibri" pitchFamily="34" charset="0"/>
-                <a:ea typeface="Calibri" pitchFamily="34" charset="-122"/>
-                <a:cs typeface="Calibri" pitchFamily="34" charset="-120"/>
-              </a:rPr>
-              <a:t>Usman Akram  •  COMSATS University Islamabad</a:t>
-            </a:r>
-            <a:endParaRPr lang="en-US" sz="900" dirty="0"/>
-          </a:p>
-        </p:txBody>
-      </p:sp>
-      <p:sp>
-        <p:nvSpPr>
-          <p:cNvPr id="26" name="Text 24"/>
-          <p:cNvSpPr txBox="1"/>
-          <p:nvPr/>
-        </p:nvSpPr>
-        <p:spPr>
-          <a:xfrm>
-            <a:off x="11155680" y="6446520"/>
-            <a:ext cx="457200" cy="292608"/>
-          </a:xfrm>
-          <a:prstGeom prst="rect">
-            <a:avLst/>
-          </a:prstGeom>
-          <a:noFill/>
-          <a:ln/>
-        </p:spPr>
-        <p:txBody>
-          <a:bodyPr wrap="square" lIns="0" tIns="0" rIns="0" bIns="0" rtlCol="0" anchor="ctr"/>
-          <a:lstStyle/>
-          <a:p>
-            <a:pPr algn="r" indent="0" marL="0">
-              <a:buNone/>
-            </a:pPr>
-            <a:r>
-              <a:rPr lang="en-US" sz="900" dirty="0">
-                <a:solidFill>
-                  <a:srgbClr val="9AA3D8"/>
-                </a:solidFill>
-                <a:latin typeface="Calibri" pitchFamily="34" charset="0"/>
-                <a:ea typeface="Calibri" pitchFamily="34" charset="-122"/>
-                <a:cs typeface="Calibri" pitchFamily="34" charset="-120"/>
-              </a:rPr>
-              <a:t>32</a:t>
-            </a:r>
-            <a:endParaRPr lang="en-US" sz="900" dirty="0"/>
+          <p:cNvPr id="27" name="cuinotes-footer-mark"/>
+          <p:cNvSpPr txBox="1"/>
+          <p:nvPr/>
+        </p:nvSpPr>
+        <p:spPr>
+          <a:xfrm>
+            <a:off x="9951720" y="6455664"/>
+            <a:ext cx="2011680" cy="292608"/>
+          </a:xfrm>
+          <a:prstGeom prst="rect">
+            <a:avLst/>
+          </a:prstGeom>
+          <a:noFill/>
+        </p:spPr>
+        <p:txBody>
+          <a:bodyPr wrap="none" lIns="0" rIns="0" tIns="0" bIns="0">
+            <a:spAutoFit/>
+          </a:bodyPr>
+          <a:lstStyle/>
+          <a:p>
+            <a:pPr algn="r"/>
+            <a:r>
+              <a:rPr sz="1000">
+                <a:solidFill>
+                  <a:srgbClr val="8A939B"/>
+                </a:solidFill>
+                <a:hlinkClick r:id="rId3"/>
+              </a:rPr>
+              <a:t>cuinotes.com</a:t>
+            </a:r>
+            <a:r>
+              <a:rPr sz="1000">
+                <a:solidFill>
+                  <a:srgbClr val="8A939B"/>
+                </a:solidFill>
+              </a:rPr>
+              <a:t>  ·  32</a:t>
+            </a:r>
           </a:p>
         </p:txBody>
       </p:sp>
@@ -16987,6 +16325,10 @@
           </a:solidFill>
           <a:ln/>
         </p:spPr>
+        <p:txBody>
+          <a:bodyPr/>
+          <a:p/>
+        </p:txBody>
       </p:sp>
       <p:sp>
         <p:nvSpPr>
@@ -17371,79 +16713,44 @@
       </p:sp>
       <p:sp>
         <p:nvSpPr>
-          <p:cNvPr id="7" name="Text 5"/>
-          <p:cNvSpPr txBox="1"/>
-          <p:nvPr/>
-        </p:nvSpPr>
-        <p:spPr>
-          <a:xfrm>
-            <a:off x="640080" y="6446520"/>
-            <a:ext cx="8686800" cy="292608"/>
-          </a:xfrm>
-          <a:prstGeom prst="rect">
-            <a:avLst/>
-          </a:prstGeom>
-          <a:noFill/>
-          <a:ln/>
-        </p:spPr>
-        <p:txBody>
-          <a:bodyPr wrap="square" lIns="0" tIns="0" rIns="0" bIns="0" rtlCol="0" anchor="ctr"/>
-          <a:lstStyle/>
-          <a:p>
-            <a:pPr algn="l" indent="0" marL="0">
-              <a:buNone/>
-            </a:pPr>
-            <a:r>
-              <a:rPr lang="en-US" sz="900" dirty="0">
-                <a:solidFill>
-                  <a:srgbClr val="5D5D72"/>
-                </a:solidFill>
-                <a:latin typeface="Calibri" pitchFamily="34" charset="0"/>
-                <a:ea typeface="Calibri" pitchFamily="34" charset="-122"/>
-                <a:cs typeface="Calibri" pitchFamily="34" charset="-120"/>
-              </a:rPr>
-              <a:t>Usman Akram  •  COMSATS University Islamabad</a:t>
-            </a:r>
-            <a:endParaRPr lang="en-US" sz="900" dirty="0"/>
-          </a:p>
-        </p:txBody>
-      </p:sp>
-      <p:sp>
-        <p:nvSpPr>
-          <p:cNvPr id="8" name="Text 6"/>
-          <p:cNvSpPr txBox="1"/>
-          <p:nvPr/>
-        </p:nvSpPr>
-        <p:spPr>
-          <a:xfrm>
-            <a:off x="11155680" y="6446520"/>
-            <a:ext cx="457200" cy="292608"/>
-          </a:xfrm>
-          <a:prstGeom prst="rect">
-            <a:avLst/>
-          </a:prstGeom>
-          <a:noFill/>
-          <a:ln/>
-        </p:spPr>
-        <p:txBody>
-          <a:bodyPr wrap="square" lIns="0" tIns="0" rIns="0" bIns="0" rtlCol="0" anchor="ctr"/>
-          <a:lstStyle/>
-          <a:p>
-            <a:pPr algn="r" indent="0" marL="0">
-              <a:buNone/>
-            </a:pPr>
-            <a:r>
-              <a:rPr lang="en-US" sz="900" dirty="0">
-                <a:solidFill>
-                  <a:srgbClr val="5D5D72"/>
-                </a:solidFill>
-                <a:latin typeface="Calibri" pitchFamily="34" charset="0"/>
-                <a:ea typeface="Calibri" pitchFamily="34" charset="-122"/>
-                <a:cs typeface="Calibri" pitchFamily="34" charset="-120"/>
-              </a:rPr>
-              <a:t>4</a:t>
-            </a:r>
-            <a:endParaRPr lang="en-US" sz="900" dirty="0"/>
+          <p:cNvPr id="9" name="cuinotes-footer-mark"/>
+          <p:cNvSpPr txBox="1"/>
+          <p:nvPr/>
+        </p:nvSpPr>
+        <p:spPr>
+          <a:xfrm>
+            <a:off x="9951720" y="6455664"/>
+            <a:ext cx="2011680" cy="292608"/>
+          </a:xfrm>
+          <a:prstGeom prst="rect">
+            <a:avLst/>
+          </a:prstGeom>
+          <a:noFill/>
+        </p:spPr>
+        <p:txBody>
+          <a:bodyPr wrap="none" lIns="0" rIns="0" tIns="0" bIns="0">
+            <a:spAutoFit/>
+          </a:bodyPr>
+          <a:lstStyle/>
+          <a:p>
+            <a:pPr algn="r"/>
+            <a:r>
+              <a:rPr sz="1000">
+                <a:solidFill>
+                  <a:srgbClr val="8A939B"/>
+                </a:solidFill>
+                <a:hlinkClick r:id="rId3"/>
+              </a:rPr>
+              <a:t>cuinotes.com</a:t>
+            </a:r>
+            <a:r>
+              <a:rPr sz="1000">
+                <a:solidFill>
+                  <a:srgbClr val="8A939B"/>
+                </a:solidFill>
+              </a:rPr>
+              <a:t>  ·  4</a:t>
+            </a:r>
           </a:p>
         </p:txBody>
       </p:sp>
@@ -17576,6 +16883,10 @@
           </a:solidFill>
           <a:ln/>
         </p:spPr>
+        <p:txBody>
+          <a:bodyPr/>
+          <a:p/>
+        </p:txBody>
       </p:sp>
       <p:sp>
         <p:nvSpPr>
@@ -17674,6 +16985,10 @@
           </a:solidFill>
           <a:ln/>
         </p:spPr>
+        <p:txBody>
+          <a:bodyPr/>
+          <a:p/>
+        </p:txBody>
       </p:sp>
       <p:sp>
         <p:nvSpPr>
@@ -17755,79 +17070,44 @@
       </p:sp>
       <p:sp>
         <p:nvSpPr>
-          <p:cNvPr id="10" name="Text 8"/>
-          <p:cNvSpPr txBox="1"/>
-          <p:nvPr/>
-        </p:nvSpPr>
-        <p:spPr>
-          <a:xfrm>
-            <a:off x="640080" y="6446520"/>
-            <a:ext cx="8686800" cy="292608"/>
-          </a:xfrm>
-          <a:prstGeom prst="rect">
-            <a:avLst/>
-          </a:prstGeom>
-          <a:noFill/>
-          <a:ln/>
-        </p:spPr>
-        <p:txBody>
-          <a:bodyPr wrap="square" lIns="0" tIns="0" rIns="0" bIns="0" rtlCol="0" anchor="ctr"/>
-          <a:lstStyle/>
-          <a:p>
-            <a:pPr algn="l" indent="0" marL="0">
-              <a:buNone/>
-            </a:pPr>
-            <a:r>
-              <a:rPr lang="en-US" sz="900" dirty="0">
-                <a:solidFill>
-                  <a:srgbClr val="5D5D72"/>
-                </a:solidFill>
-                <a:latin typeface="Calibri" pitchFamily="34" charset="0"/>
-                <a:ea typeface="Calibri" pitchFamily="34" charset="-122"/>
-                <a:cs typeface="Calibri" pitchFamily="34" charset="-120"/>
-              </a:rPr>
-              <a:t>Usman Akram  •  COMSATS University Islamabad</a:t>
-            </a:r>
-            <a:endParaRPr lang="en-US" sz="900" dirty="0"/>
-          </a:p>
-        </p:txBody>
-      </p:sp>
-      <p:sp>
-        <p:nvSpPr>
-          <p:cNvPr id="11" name="Text 9"/>
-          <p:cNvSpPr txBox="1"/>
-          <p:nvPr/>
-        </p:nvSpPr>
-        <p:spPr>
-          <a:xfrm>
-            <a:off x="11155680" y="6446520"/>
-            <a:ext cx="457200" cy="292608"/>
-          </a:xfrm>
-          <a:prstGeom prst="rect">
-            <a:avLst/>
-          </a:prstGeom>
-          <a:noFill/>
-          <a:ln/>
-        </p:spPr>
-        <p:txBody>
-          <a:bodyPr wrap="square" lIns="0" tIns="0" rIns="0" bIns="0" rtlCol="0" anchor="ctr"/>
-          <a:lstStyle/>
-          <a:p>
-            <a:pPr algn="r" indent="0" marL="0">
-              <a:buNone/>
-            </a:pPr>
-            <a:r>
-              <a:rPr lang="en-US" sz="900" dirty="0">
-                <a:solidFill>
-                  <a:srgbClr val="5D5D72"/>
-                </a:solidFill>
-                <a:latin typeface="Calibri" pitchFamily="34" charset="0"/>
-                <a:ea typeface="Calibri" pitchFamily="34" charset="-122"/>
-                <a:cs typeface="Calibri" pitchFamily="34" charset="-120"/>
-              </a:rPr>
-              <a:t>5</a:t>
-            </a:r>
-            <a:endParaRPr lang="en-US" sz="900" dirty="0"/>
+          <p:cNvPr id="12" name="cuinotes-footer-mark"/>
+          <p:cNvSpPr txBox="1"/>
+          <p:nvPr/>
+        </p:nvSpPr>
+        <p:spPr>
+          <a:xfrm>
+            <a:off x="9951720" y="6455664"/>
+            <a:ext cx="2011680" cy="292608"/>
+          </a:xfrm>
+          <a:prstGeom prst="rect">
+            <a:avLst/>
+          </a:prstGeom>
+          <a:noFill/>
+        </p:spPr>
+        <p:txBody>
+          <a:bodyPr wrap="none" lIns="0" rIns="0" tIns="0" bIns="0">
+            <a:spAutoFit/>
+          </a:bodyPr>
+          <a:lstStyle/>
+          <a:p>
+            <a:pPr algn="r"/>
+            <a:r>
+              <a:rPr sz="1000">
+                <a:solidFill>
+                  <a:srgbClr val="8A939B"/>
+                </a:solidFill>
+                <a:hlinkClick r:id="rId3"/>
+              </a:rPr>
+              <a:t>cuinotes.com</a:t>
+            </a:r>
+            <a:r>
+              <a:rPr sz="1000">
+                <a:solidFill>
+                  <a:srgbClr val="8A939B"/>
+                </a:solidFill>
+              </a:rPr>
+              <a:t>  ·  5</a:t>
+            </a:r>
           </a:p>
         </p:txBody>
       </p:sp>
@@ -17962,6 +17242,10 @@
           </a:solidFill>
           <a:ln/>
         </p:spPr>
+        <p:txBody>
+          <a:bodyPr/>
+          <a:p/>
+        </p:txBody>
       </p:sp>
       <p:sp>
         <p:nvSpPr>
@@ -18238,6 +17522,10 @@
             </a:outerShdw>
           </a:effectLst>
         </p:spPr>
+        <p:txBody>
+          <a:bodyPr/>
+          <a:p/>
+        </p:txBody>
       </p:sp>
       <p:pic>
         <p:nvPicPr>
@@ -18265,79 +17553,44 @@
       </p:pic>
       <p:sp>
         <p:nvSpPr>
-          <p:cNvPr id="8" name="Text 5"/>
-          <p:cNvSpPr txBox="1"/>
-          <p:nvPr/>
-        </p:nvSpPr>
-        <p:spPr>
-          <a:xfrm>
-            <a:off x="640080" y="6446520"/>
-            <a:ext cx="8686800" cy="292608"/>
-          </a:xfrm>
-          <a:prstGeom prst="rect">
-            <a:avLst/>
-          </a:prstGeom>
-          <a:noFill/>
-          <a:ln/>
-        </p:spPr>
-        <p:txBody>
-          <a:bodyPr wrap="square" lIns="0" tIns="0" rIns="0" bIns="0" rtlCol="0" anchor="ctr"/>
-          <a:lstStyle/>
-          <a:p>
-            <a:pPr algn="l" indent="0" marL="0">
-              <a:buNone/>
-            </a:pPr>
-            <a:r>
-              <a:rPr lang="en-US" sz="900" dirty="0">
-                <a:solidFill>
-                  <a:srgbClr val="5D5D72"/>
-                </a:solidFill>
-                <a:latin typeface="Calibri" pitchFamily="34" charset="0"/>
-                <a:ea typeface="Calibri" pitchFamily="34" charset="-122"/>
-                <a:cs typeface="Calibri" pitchFamily="34" charset="-120"/>
-              </a:rPr>
-              <a:t>Usman Akram  •  COMSATS University Islamabad</a:t>
-            </a:r>
-            <a:endParaRPr lang="en-US" sz="900" dirty="0"/>
-          </a:p>
-        </p:txBody>
-      </p:sp>
-      <p:sp>
-        <p:nvSpPr>
-          <p:cNvPr id="9" name="Text 6"/>
-          <p:cNvSpPr txBox="1"/>
-          <p:nvPr/>
-        </p:nvSpPr>
-        <p:spPr>
-          <a:xfrm>
-            <a:off x="11155680" y="6446520"/>
-            <a:ext cx="457200" cy="292608"/>
-          </a:xfrm>
-          <a:prstGeom prst="rect">
-            <a:avLst/>
-          </a:prstGeom>
-          <a:noFill/>
-          <a:ln/>
-        </p:spPr>
-        <p:txBody>
-          <a:bodyPr wrap="square" lIns="0" tIns="0" rIns="0" bIns="0" rtlCol="0" anchor="ctr"/>
-          <a:lstStyle/>
-          <a:p>
-            <a:pPr algn="r" indent="0" marL="0">
-              <a:buNone/>
-            </a:pPr>
-            <a:r>
-              <a:rPr lang="en-US" sz="900" dirty="0">
-                <a:solidFill>
-                  <a:srgbClr val="5D5D72"/>
-                </a:solidFill>
-                <a:latin typeface="Calibri" pitchFamily="34" charset="0"/>
-                <a:ea typeface="Calibri" pitchFamily="34" charset="-122"/>
-                <a:cs typeface="Calibri" pitchFamily="34" charset="-120"/>
-              </a:rPr>
-              <a:t>6</a:t>
-            </a:r>
-            <a:endParaRPr lang="en-US" sz="900" dirty="0"/>
+          <p:cNvPr id="10" name="cuinotes-footer-mark"/>
+          <p:cNvSpPr txBox="1"/>
+          <p:nvPr/>
+        </p:nvSpPr>
+        <p:spPr>
+          <a:xfrm>
+            <a:off x="9951720" y="6455664"/>
+            <a:ext cx="2011680" cy="292608"/>
+          </a:xfrm>
+          <a:prstGeom prst="rect">
+            <a:avLst/>
+          </a:prstGeom>
+          <a:noFill/>
+        </p:spPr>
+        <p:txBody>
+          <a:bodyPr wrap="none" lIns="0" rIns="0" tIns="0" bIns="0">
+            <a:spAutoFit/>
+          </a:bodyPr>
+          <a:lstStyle/>
+          <a:p>
+            <a:pPr algn="r"/>
+            <a:r>
+              <a:rPr sz="1000">
+                <a:solidFill>
+                  <a:srgbClr val="8A939B"/>
+                </a:solidFill>
+                <a:hlinkClick r:id="rId4"/>
+              </a:rPr>
+              <a:t>cuinotes.com</a:t>
+            </a:r>
+            <a:r>
+              <a:rPr sz="1000">
+                <a:solidFill>
+                  <a:srgbClr val="8A939B"/>
+                </a:solidFill>
+              </a:rPr>
+              <a:t>  ·  6</a:t>
+            </a:r>
           </a:p>
         </p:txBody>
       </p:sp>
@@ -18477,6 +17730,10 @@
             <a:prstDash val="solid"/>
           </a:ln>
         </p:spPr>
+        <p:txBody>
+          <a:bodyPr/>
+          <a:p/>
+        </p:txBody>
       </p:sp>
       <p:sp>
         <p:nvSpPr>
@@ -18558,79 +17815,44 @@
       </p:sp>
       <p:sp>
         <p:nvSpPr>
-          <p:cNvPr id="7" name="Text 5"/>
-          <p:cNvSpPr txBox="1"/>
-          <p:nvPr/>
-        </p:nvSpPr>
-        <p:spPr>
-          <a:xfrm>
-            <a:off x="640080" y="6446520"/>
-            <a:ext cx="8686800" cy="292608"/>
-          </a:xfrm>
-          <a:prstGeom prst="rect">
-            <a:avLst/>
-          </a:prstGeom>
-          <a:noFill/>
-          <a:ln/>
-        </p:spPr>
-        <p:txBody>
-          <a:bodyPr wrap="square" lIns="0" tIns="0" rIns="0" bIns="0" rtlCol="0" anchor="ctr"/>
-          <a:lstStyle/>
-          <a:p>
-            <a:pPr algn="l" indent="0" marL="0">
-              <a:buNone/>
-            </a:pPr>
-            <a:r>
-              <a:rPr lang="en-US" sz="900" dirty="0">
-                <a:solidFill>
-                  <a:srgbClr val="5D5D72"/>
-                </a:solidFill>
-                <a:latin typeface="Calibri" pitchFamily="34" charset="0"/>
-                <a:ea typeface="Calibri" pitchFamily="34" charset="-122"/>
-                <a:cs typeface="Calibri" pitchFamily="34" charset="-120"/>
-              </a:rPr>
-              <a:t>Usman Akram  •  COMSATS University Islamabad</a:t>
-            </a:r>
-            <a:endParaRPr lang="en-US" sz="900" dirty="0"/>
-          </a:p>
-        </p:txBody>
-      </p:sp>
-      <p:sp>
-        <p:nvSpPr>
-          <p:cNvPr id="8" name="Text 6"/>
-          <p:cNvSpPr txBox="1"/>
-          <p:nvPr/>
-        </p:nvSpPr>
-        <p:spPr>
-          <a:xfrm>
-            <a:off x="11155680" y="6446520"/>
-            <a:ext cx="457200" cy="292608"/>
-          </a:xfrm>
-          <a:prstGeom prst="rect">
-            <a:avLst/>
-          </a:prstGeom>
-          <a:noFill/>
-          <a:ln/>
-        </p:spPr>
-        <p:txBody>
-          <a:bodyPr wrap="square" lIns="0" tIns="0" rIns="0" bIns="0" rtlCol="0" anchor="ctr"/>
-          <a:lstStyle/>
-          <a:p>
-            <a:pPr algn="r" indent="0" marL="0">
-              <a:buNone/>
-            </a:pPr>
-            <a:r>
-              <a:rPr lang="en-US" sz="900" dirty="0">
-                <a:solidFill>
-                  <a:srgbClr val="5D5D72"/>
-                </a:solidFill>
-                <a:latin typeface="Calibri" pitchFamily="34" charset="0"/>
-                <a:ea typeface="Calibri" pitchFamily="34" charset="-122"/>
-                <a:cs typeface="Calibri" pitchFamily="34" charset="-120"/>
-              </a:rPr>
-              <a:t>7</a:t>
-            </a:r>
-            <a:endParaRPr lang="en-US" sz="900" dirty="0"/>
+          <p:cNvPr id="9" name="cuinotes-footer-mark"/>
+          <p:cNvSpPr txBox="1"/>
+          <p:nvPr/>
+        </p:nvSpPr>
+        <p:spPr>
+          <a:xfrm>
+            <a:off x="9951720" y="6455664"/>
+            <a:ext cx="2011680" cy="292608"/>
+          </a:xfrm>
+          <a:prstGeom prst="rect">
+            <a:avLst/>
+          </a:prstGeom>
+          <a:noFill/>
+        </p:spPr>
+        <p:txBody>
+          <a:bodyPr wrap="none" lIns="0" rIns="0" tIns="0" bIns="0">
+            <a:spAutoFit/>
+          </a:bodyPr>
+          <a:lstStyle/>
+          <a:p>
+            <a:pPr algn="r"/>
+            <a:r>
+              <a:rPr sz="1000">
+                <a:solidFill>
+                  <a:srgbClr val="8A939B"/>
+                </a:solidFill>
+                <a:hlinkClick r:id="rId3"/>
+              </a:rPr>
+              <a:t>cuinotes.com</a:t>
+            </a:r>
+            <a:r>
+              <a:rPr sz="1000">
+                <a:solidFill>
+                  <a:srgbClr val="8A939B"/>
+                </a:solidFill>
+              </a:rPr>
+              <a:t>  ·  7</a:t>
+            </a:r>
           </a:p>
         </p:txBody>
       </p:sp>
@@ -18763,6 +17985,10 @@
           </a:solidFill>
           <a:ln/>
         </p:spPr>
+        <p:txBody>
+          <a:bodyPr/>
+          <a:p/>
+        </p:txBody>
       </p:sp>
       <p:sp>
         <p:nvSpPr>
@@ -18861,6 +18087,10 @@
           </a:solidFill>
           <a:ln/>
         </p:spPr>
+        <p:txBody>
+          <a:bodyPr/>
+          <a:p/>
+        </p:txBody>
       </p:sp>
       <p:sp>
         <p:nvSpPr>
@@ -18959,6 +18189,10 @@
           </a:solidFill>
           <a:ln/>
         </p:spPr>
+        <p:txBody>
+          <a:bodyPr/>
+          <a:p/>
+        </p:txBody>
       </p:sp>
       <p:sp>
         <p:nvSpPr>
@@ -19040,79 +18274,44 @@
       </p:sp>
       <p:sp>
         <p:nvSpPr>
-          <p:cNvPr id="13" name="Text 11"/>
-          <p:cNvSpPr txBox="1"/>
-          <p:nvPr/>
-        </p:nvSpPr>
-        <p:spPr>
-          <a:xfrm>
-            <a:off x="640080" y="6446520"/>
-            <a:ext cx="8686800" cy="292608"/>
-          </a:xfrm>
-          <a:prstGeom prst="rect">
-            <a:avLst/>
-          </a:prstGeom>
-          <a:noFill/>
-          <a:ln/>
-        </p:spPr>
-        <p:txBody>
-          <a:bodyPr wrap="square" lIns="0" tIns="0" rIns="0" bIns="0" rtlCol="0" anchor="ctr"/>
-          <a:lstStyle/>
-          <a:p>
-            <a:pPr algn="l" indent="0" marL="0">
-              <a:buNone/>
-            </a:pPr>
-            <a:r>
-              <a:rPr lang="en-US" sz="900" dirty="0">
-                <a:solidFill>
-                  <a:srgbClr val="5D5D72"/>
-                </a:solidFill>
-                <a:latin typeface="Calibri" pitchFamily="34" charset="0"/>
-                <a:ea typeface="Calibri" pitchFamily="34" charset="-122"/>
-                <a:cs typeface="Calibri" pitchFamily="34" charset="-120"/>
-              </a:rPr>
-              <a:t>Usman Akram  •  COMSATS University Islamabad</a:t>
-            </a:r>
-            <a:endParaRPr lang="en-US" sz="900" dirty="0"/>
-          </a:p>
-        </p:txBody>
-      </p:sp>
-      <p:sp>
-        <p:nvSpPr>
-          <p:cNvPr id="14" name="Text 12"/>
-          <p:cNvSpPr txBox="1"/>
-          <p:nvPr/>
-        </p:nvSpPr>
-        <p:spPr>
-          <a:xfrm>
-            <a:off x="11155680" y="6446520"/>
-            <a:ext cx="457200" cy="292608"/>
-          </a:xfrm>
-          <a:prstGeom prst="rect">
-            <a:avLst/>
-          </a:prstGeom>
-          <a:noFill/>
-          <a:ln/>
-        </p:spPr>
-        <p:txBody>
-          <a:bodyPr wrap="square" lIns="0" tIns="0" rIns="0" bIns="0" rtlCol="0" anchor="ctr"/>
-          <a:lstStyle/>
-          <a:p>
-            <a:pPr algn="r" indent="0" marL="0">
-              <a:buNone/>
-            </a:pPr>
-            <a:r>
-              <a:rPr lang="en-US" sz="900" dirty="0">
-                <a:solidFill>
-                  <a:srgbClr val="5D5D72"/>
-                </a:solidFill>
-                <a:latin typeface="Calibri" pitchFamily="34" charset="0"/>
-                <a:ea typeface="Calibri" pitchFamily="34" charset="-122"/>
-                <a:cs typeface="Calibri" pitchFamily="34" charset="-120"/>
-              </a:rPr>
-              <a:t>8</a:t>
-            </a:r>
-            <a:endParaRPr lang="en-US" sz="900" dirty="0"/>
+          <p:cNvPr id="15" name="cuinotes-footer-mark"/>
+          <p:cNvSpPr txBox="1"/>
+          <p:nvPr/>
+        </p:nvSpPr>
+        <p:spPr>
+          <a:xfrm>
+            <a:off x="9951720" y="6455664"/>
+            <a:ext cx="2011680" cy="292608"/>
+          </a:xfrm>
+          <a:prstGeom prst="rect">
+            <a:avLst/>
+          </a:prstGeom>
+          <a:noFill/>
+        </p:spPr>
+        <p:txBody>
+          <a:bodyPr wrap="none" lIns="0" rIns="0" tIns="0" bIns="0">
+            <a:spAutoFit/>
+          </a:bodyPr>
+          <a:lstStyle/>
+          <a:p>
+            <a:pPr algn="r"/>
+            <a:r>
+              <a:rPr sz="1000">
+                <a:solidFill>
+                  <a:srgbClr val="8A939B"/>
+                </a:solidFill>
+                <a:hlinkClick r:id="rId3"/>
+              </a:rPr>
+              <a:t>cuinotes.com</a:t>
+            </a:r>
+            <a:r>
+              <a:rPr sz="1000">
+                <a:solidFill>
+                  <a:srgbClr val="8A939B"/>
+                </a:solidFill>
+              </a:rPr>
+              <a:t>  ·  8</a:t>
+            </a:r>
           </a:p>
         </p:txBody>
       </p:sp>
@@ -19247,6 +18446,10 @@
           </a:solidFill>
           <a:ln/>
         </p:spPr>
+        <p:txBody>
+          <a:bodyPr/>
+          <a:p/>
+        </p:txBody>
       </p:sp>
       <p:sp>
         <p:nvSpPr>
@@ -19420,79 +18623,44 @@
       </p:sp>
       <p:sp>
         <p:nvSpPr>
-          <p:cNvPr id="7" name="Text 5"/>
-          <p:cNvSpPr txBox="1"/>
-          <p:nvPr/>
-        </p:nvSpPr>
-        <p:spPr>
-          <a:xfrm>
-            <a:off x="640080" y="6446520"/>
-            <a:ext cx="8686800" cy="292608"/>
-          </a:xfrm>
-          <a:prstGeom prst="rect">
-            <a:avLst/>
-          </a:prstGeom>
-          <a:noFill/>
-          <a:ln/>
-        </p:spPr>
-        <p:txBody>
-          <a:bodyPr wrap="square" lIns="0" tIns="0" rIns="0" bIns="0" rtlCol="0" anchor="ctr"/>
-          <a:lstStyle/>
-          <a:p>
-            <a:pPr algn="l" indent="0" marL="0">
-              <a:buNone/>
-            </a:pPr>
-            <a:r>
-              <a:rPr lang="en-US" sz="900" dirty="0">
-                <a:solidFill>
-                  <a:srgbClr val="5D5D72"/>
-                </a:solidFill>
-                <a:latin typeface="Calibri" pitchFamily="34" charset="0"/>
-                <a:ea typeface="Calibri" pitchFamily="34" charset="-122"/>
-                <a:cs typeface="Calibri" pitchFamily="34" charset="-120"/>
-              </a:rPr>
-              <a:t>Usman Akram  •  COMSATS University Islamabad</a:t>
-            </a:r>
-            <a:endParaRPr lang="en-US" sz="900" dirty="0"/>
-          </a:p>
-        </p:txBody>
-      </p:sp>
-      <p:sp>
-        <p:nvSpPr>
-          <p:cNvPr id="8" name="Text 6"/>
-          <p:cNvSpPr txBox="1"/>
-          <p:nvPr/>
-        </p:nvSpPr>
-        <p:spPr>
-          <a:xfrm>
-            <a:off x="11155680" y="6446520"/>
-            <a:ext cx="457200" cy="292608"/>
-          </a:xfrm>
-          <a:prstGeom prst="rect">
-            <a:avLst/>
-          </a:prstGeom>
-          <a:noFill/>
-          <a:ln/>
-        </p:spPr>
-        <p:txBody>
-          <a:bodyPr wrap="square" lIns="0" tIns="0" rIns="0" bIns="0" rtlCol="0" anchor="ctr"/>
-          <a:lstStyle/>
-          <a:p>
-            <a:pPr algn="r" indent="0" marL="0">
-              <a:buNone/>
-            </a:pPr>
-            <a:r>
-              <a:rPr lang="en-US" sz="900" dirty="0">
-                <a:solidFill>
-                  <a:srgbClr val="5D5D72"/>
-                </a:solidFill>
-                <a:latin typeface="Calibri" pitchFamily="34" charset="0"/>
-                <a:ea typeface="Calibri" pitchFamily="34" charset="-122"/>
-                <a:cs typeface="Calibri" pitchFamily="34" charset="-120"/>
-              </a:rPr>
-              <a:t>9</a:t>
-            </a:r>
-            <a:endParaRPr lang="en-US" sz="900" dirty="0"/>
+          <p:cNvPr id="9" name="cuinotes-footer-mark"/>
+          <p:cNvSpPr txBox="1"/>
+          <p:nvPr/>
+        </p:nvSpPr>
+        <p:spPr>
+          <a:xfrm>
+            <a:off x="9951720" y="6455664"/>
+            <a:ext cx="2011680" cy="292608"/>
+          </a:xfrm>
+          <a:prstGeom prst="rect">
+            <a:avLst/>
+          </a:prstGeom>
+          <a:noFill/>
+        </p:spPr>
+        <p:txBody>
+          <a:bodyPr wrap="none" lIns="0" rIns="0" tIns="0" bIns="0">
+            <a:spAutoFit/>
+          </a:bodyPr>
+          <a:lstStyle/>
+          <a:p>
+            <a:pPr algn="r"/>
+            <a:r>
+              <a:rPr sz="1000">
+                <a:solidFill>
+                  <a:srgbClr val="8A939B"/>
+                </a:solidFill>
+                <a:hlinkClick r:id="rId3"/>
+              </a:rPr>
+              <a:t>cuinotes.com</a:t>
+            </a:r>
+            <a:r>
+              <a:rPr sz="1000">
+                <a:solidFill>
+                  <a:srgbClr val="8A939B"/>
+                </a:solidFill>
+              </a:rPr>
+              <a:t>  ·  9</a:t>
+            </a:r>
           </a:p>
         </p:txBody>
       </p:sp>

--- a/slides/CSC336-Lecture-29-Routing-and-API-Integration.pptx
+++ b/slides/CSC336-Lecture-29-Routing-and-API-Integration.pptx
@@ -5591,9 +5591,13 @@
             </a:avLst>
           </a:prstGeom>
           <a:solidFill>
-            <a:srgbClr val="1E1E4C"/>
+            <a:srgbClr val="F7F8F9"/>
           </a:solidFill>
-          <a:ln/>
+          <a:ln w="9525">
+            <a:solidFill>
+              <a:srgbClr val="D0D5DD"/>
+            </a:solidFill>
+          </a:ln>
         </p:spPr>
         <p:txBody>
           <a:bodyPr/>
@@ -5630,7 +5634,7 @@
             <a:r>
               <a:rPr lang="en-US" sz="1366" dirty="0">
                 <a:solidFill>
-                  <a:srgbClr val="C9D3F5"/>
+                  <a:srgbClr val="1F2429"/>
                 </a:solidFill>
                 <a:latin typeface="Courier New" pitchFamily="34" charset="0"/>
                 <a:ea typeface="Courier New" pitchFamily="34" charset="-122"/>
@@ -5659,7 +5663,7 @@
             <a:r>
               <a:rPr lang="en-US" sz="1366" dirty="0">
                 <a:solidFill>
-                  <a:srgbClr val="C9D3F5"/>
+                  <a:srgbClr val="1F2429"/>
                 </a:solidFill>
                 <a:latin typeface="Courier New" pitchFamily="34" charset="0"/>
                 <a:ea typeface="Courier New" pitchFamily="34" charset="-122"/>
@@ -5679,7 +5683,7 @@
             <a:r>
               <a:rPr lang="en-US" sz="1366" dirty="0">
                 <a:solidFill>
-                  <a:srgbClr val="C9D3F5"/>
+                  <a:srgbClr val="1F2429"/>
                 </a:solidFill>
                 <a:latin typeface="Courier New" pitchFamily="34" charset="0"/>
                 <a:ea typeface="Courier New" pitchFamily="34" charset="-122"/>
@@ -5699,7 +5703,7 @@
             <a:r>
               <a:rPr lang="en-US" sz="1366" dirty="0">
                 <a:solidFill>
-                  <a:srgbClr val="C9D3F5"/>
+                  <a:srgbClr val="1F2429"/>
                 </a:solidFill>
                 <a:latin typeface="Courier New" pitchFamily="34" charset="0"/>
                 <a:ea typeface="Courier New" pitchFamily="34" charset="-122"/>
@@ -5719,7 +5723,7 @@
             <a:r>
               <a:rPr lang="en-US" sz="1366" dirty="0">
                 <a:solidFill>
-                  <a:srgbClr val="C9D3F5"/>
+                  <a:srgbClr val="1F2429"/>
                 </a:solidFill>
                 <a:latin typeface="Courier New" pitchFamily="34" charset="0"/>
                 <a:ea typeface="Courier New" pitchFamily="34" charset="-122"/>
@@ -5739,7 +5743,7 @@
             <a:r>
               <a:rPr lang="en-US" sz="1366" dirty="0">
                 <a:solidFill>
-                  <a:srgbClr val="C9D3F5"/>
+                  <a:srgbClr val="1F2429"/>
                 </a:solidFill>
                 <a:latin typeface="Courier New" pitchFamily="34" charset="0"/>
                 <a:ea typeface="Courier New" pitchFamily="34" charset="-122"/>
@@ -5759,7 +5763,7 @@
             <a:r>
               <a:rPr lang="en-US" sz="1366" dirty="0">
                 <a:solidFill>
-                  <a:srgbClr val="C9D3F5"/>
+                  <a:srgbClr val="1F2429"/>
                 </a:solidFill>
                 <a:latin typeface="Courier New" pitchFamily="34" charset="0"/>
                 <a:ea typeface="Courier New" pitchFamily="34" charset="-122"/>
@@ -5779,7 +5783,7 @@
             <a:r>
               <a:rPr lang="en-US" sz="1366" dirty="0">
                 <a:solidFill>
-                  <a:srgbClr val="C9D3F5"/>
+                  <a:srgbClr val="1F2429"/>
                 </a:solidFill>
                 <a:latin typeface="Courier New" pitchFamily="34" charset="0"/>
                 <a:ea typeface="Courier New" pitchFamily="34" charset="-122"/>
@@ -5799,7 +5803,7 @@
             <a:r>
               <a:rPr lang="en-US" sz="1366" dirty="0">
                 <a:solidFill>
-                  <a:srgbClr val="C9D3F5"/>
+                  <a:srgbClr val="1F2429"/>
                 </a:solidFill>
                 <a:latin typeface="Courier New" pitchFamily="34" charset="0"/>
                 <a:ea typeface="Courier New" pitchFamily="34" charset="-122"/>
@@ -5819,7 +5823,7 @@
             <a:r>
               <a:rPr lang="en-US" sz="1366" dirty="0">
                 <a:solidFill>
-                  <a:srgbClr val="C9D3F5"/>
+                  <a:srgbClr val="1F2429"/>
                 </a:solidFill>
                 <a:latin typeface="Courier New" pitchFamily="34" charset="0"/>
                 <a:ea typeface="Courier New" pitchFamily="34" charset="-122"/>
@@ -5839,7 +5843,7 @@
             <a:r>
               <a:rPr lang="en-US" sz="1366" dirty="0">
                 <a:solidFill>
-                  <a:srgbClr val="C9D3F5"/>
+                  <a:srgbClr val="1F2429"/>
                 </a:solidFill>
                 <a:latin typeface="Courier New" pitchFamily="34" charset="0"/>
                 <a:ea typeface="Courier New" pitchFamily="34" charset="-122"/>
@@ -5859,7 +5863,7 @@
             <a:r>
               <a:rPr lang="en-US" sz="1366" dirty="0">
                 <a:solidFill>
-                  <a:srgbClr val="C9D3F5"/>
+                  <a:srgbClr val="1F2429"/>
                 </a:solidFill>
                 <a:latin typeface="Courier New" pitchFamily="34" charset="0"/>
                 <a:ea typeface="Courier New" pitchFamily="34" charset="-122"/>
@@ -6735,9 +6739,13 @@
             </a:avLst>
           </a:prstGeom>
           <a:solidFill>
-            <a:srgbClr val="1E1E4C"/>
+            <a:srgbClr val="F7F8F9"/>
           </a:solidFill>
-          <a:ln/>
+          <a:ln w="9525">
+            <a:solidFill>
+              <a:srgbClr val="D0D5DD"/>
+            </a:solidFill>
+          </a:ln>
         </p:spPr>
         <p:txBody>
           <a:bodyPr/>
@@ -6774,7 +6782,7 @@
             <a:r>
               <a:rPr lang="en-US" sz="1400" dirty="0">
                 <a:solidFill>
-                  <a:srgbClr val="C9D3F5"/>
+                  <a:srgbClr val="1F2429"/>
                 </a:solidFill>
                 <a:latin typeface="Courier New" pitchFamily="34" charset="0"/>
                 <a:ea typeface="Courier New" pitchFamily="34" charset="-122"/>
@@ -6794,7 +6802,7 @@
             <a:r>
               <a:rPr lang="en-US" sz="1400" dirty="0">
                 <a:solidFill>
-                  <a:srgbClr val="C9D3F5"/>
+                  <a:srgbClr val="1F2429"/>
                 </a:solidFill>
                 <a:latin typeface="Courier New" pitchFamily="34" charset="0"/>
                 <a:ea typeface="Courier New" pitchFamily="34" charset="-122"/>
@@ -6814,7 +6822,7 @@
             <a:r>
               <a:rPr lang="en-US" sz="1400" dirty="0">
                 <a:solidFill>
-                  <a:srgbClr val="C9D3F5"/>
+                  <a:srgbClr val="1F2429"/>
                 </a:solidFill>
                 <a:latin typeface="Courier New" pitchFamily="34" charset="0"/>
                 <a:ea typeface="Courier New" pitchFamily="34" charset="-122"/>
@@ -6843,7 +6851,7 @@
             <a:r>
               <a:rPr lang="en-US" sz="1400" dirty="0">
                 <a:solidFill>
-                  <a:srgbClr val="C9D3F5"/>
+                  <a:srgbClr val="1F2429"/>
                 </a:solidFill>
                 <a:latin typeface="Courier New" pitchFamily="34" charset="0"/>
                 <a:ea typeface="Courier New" pitchFamily="34" charset="-122"/>
@@ -6863,7 +6871,7 @@
             <a:r>
               <a:rPr lang="en-US" sz="1400" dirty="0">
                 <a:solidFill>
-                  <a:srgbClr val="C9D3F5"/>
+                  <a:srgbClr val="1F2429"/>
                 </a:solidFill>
                 <a:latin typeface="Courier New" pitchFamily="34" charset="0"/>
                 <a:ea typeface="Courier New" pitchFamily="34" charset="-122"/>
@@ -7441,9 +7449,13 @@
             </a:avLst>
           </a:prstGeom>
           <a:solidFill>
-            <a:srgbClr val="1E1E4C"/>
+            <a:srgbClr val="F7F8F9"/>
           </a:solidFill>
-          <a:ln/>
+          <a:ln w="9525">
+            <a:solidFill>
+              <a:srgbClr val="D0D5DD"/>
+            </a:solidFill>
+          </a:ln>
         </p:spPr>
         <p:txBody>
           <a:bodyPr/>
@@ -7480,7 +7492,7 @@
             <a:r>
               <a:rPr lang="en-US" sz="1366" dirty="0">
                 <a:solidFill>
-                  <a:srgbClr val="C9D3F5"/>
+                  <a:srgbClr val="1F2429"/>
                 </a:solidFill>
                 <a:latin typeface="Courier New" pitchFamily="34" charset="0"/>
                 <a:ea typeface="Courier New" pitchFamily="34" charset="-122"/>
@@ -7509,7 +7521,7 @@
             <a:r>
               <a:rPr lang="en-US" sz="1366" dirty="0">
                 <a:solidFill>
-                  <a:srgbClr val="C9D3F5"/>
+                  <a:srgbClr val="1F2429"/>
                 </a:solidFill>
                 <a:latin typeface="Courier New" pitchFamily="34" charset="0"/>
                 <a:ea typeface="Courier New" pitchFamily="34" charset="-122"/>
@@ -7529,7 +7541,7 @@
             <a:r>
               <a:rPr lang="en-US" sz="1366" dirty="0">
                 <a:solidFill>
-                  <a:srgbClr val="C9D3F5"/>
+                  <a:srgbClr val="1F2429"/>
                 </a:solidFill>
                 <a:latin typeface="Courier New" pitchFamily="34" charset="0"/>
                 <a:ea typeface="Courier New" pitchFamily="34" charset="-122"/>
@@ -7558,7 +7570,7 @@
             <a:r>
               <a:rPr lang="en-US" sz="1366" dirty="0">
                 <a:solidFill>
-                  <a:srgbClr val="C9D3F5"/>
+                  <a:srgbClr val="1F2429"/>
                 </a:solidFill>
                 <a:latin typeface="Courier New" pitchFamily="34" charset="0"/>
                 <a:ea typeface="Courier New" pitchFamily="34" charset="-122"/>
@@ -7578,7 +7590,7 @@
             <a:r>
               <a:rPr lang="en-US" sz="1366" dirty="0">
                 <a:solidFill>
-                  <a:srgbClr val="C9D3F5"/>
+                  <a:srgbClr val="1F2429"/>
                 </a:solidFill>
                 <a:latin typeface="Courier New" pitchFamily="34" charset="0"/>
                 <a:ea typeface="Courier New" pitchFamily="34" charset="-122"/>
@@ -7598,7 +7610,7 @@
             <a:r>
               <a:rPr lang="en-US" sz="1366" dirty="0">
                 <a:solidFill>
-                  <a:srgbClr val="C9D3F5"/>
+                  <a:srgbClr val="1F2429"/>
                 </a:solidFill>
                 <a:latin typeface="Courier New" pitchFamily="34" charset="0"/>
                 <a:ea typeface="Courier New" pitchFamily="34" charset="-122"/>
@@ -7618,7 +7630,7 @@
             <a:r>
               <a:rPr lang="en-US" sz="1366" dirty="0">
                 <a:solidFill>
-                  <a:srgbClr val="C9D3F5"/>
+                  <a:srgbClr val="1F2429"/>
                 </a:solidFill>
                 <a:latin typeface="Courier New" pitchFamily="34" charset="0"/>
                 <a:ea typeface="Courier New" pitchFamily="34" charset="-122"/>
@@ -7638,7 +7650,7 @@
             <a:r>
               <a:rPr lang="en-US" sz="1366" dirty="0">
                 <a:solidFill>
-                  <a:srgbClr val="C9D3F5"/>
+                  <a:srgbClr val="1F2429"/>
                 </a:solidFill>
                 <a:latin typeface="Courier New" pitchFamily="34" charset="0"/>
                 <a:ea typeface="Courier New" pitchFamily="34" charset="-122"/>
@@ -7667,7 +7679,7 @@
             <a:r>
               <a:rPr lang="en-US" sz="1366" dirty="0">
                 <a:solidFill>
-                  <a:srgbClr val="C9D3F5"/>
+                  <a:srgbClr val="1F2429"/>
                 </a:solidFill>
                 <a:latin typeface="Courier New" pitchFamily="34" charset="0"/>
                 <a:ea typeface="Courier New" pitchFamily="34" charset="-122"/>
@@ -7687,7 +7699,7 @@
             <a:r>
               <a:rPr lang="en-US" sz="1366" dirty="0">
                 <a:solidFill>
-                  <a:srgbClr val="C9D3F5"/>
+                  <a:srgbClr val="1F2429"/>
                 </a:solidFill>
                 <a:latin typeface="Courier New" pitchFamily="34" charset="0"/>
                 <a:ea typeface="Courier New" pitchFamily="34" charset="-122"/>
@@ -8226,9 +8238,13 @@
             </a:avLst>
           </a:prstGeom>
           <a:solidFill>
-            <a:srgbClr val="1E1E4C"/>
+            <a:srgbClr val="F7F8F9"/>
           </a:solidFill>
-          <a:ln/>
+          <a:ln w="9525">
+            <a:solidFill>
+              <a:srgbClr val="D0D5DD"/>
+            </a:solidFill>
+          </a:ln>
         </p:spPr>
         <p:txBody>
           <a:bodyPr/>
@@ -8265,7 +8281,7 @@
             <a:r>
               <a:rPr lang="en-US" sz="1400" dirty="0">
                 <a:solidFill>
-                  <a:srgbClr val="C9D3F5"/>
+                  <a:srgbClr val="1F2429"/>
                 </a:solidFill>
                 <a:latin typeface="Courier New" pitchFamily="34" charset="0"/>
                 <a:ea typeface="Courier New" pitchFamily="34" charset="-122"/>
@@ -8285,7 +8301,7 @@
             <a:r>
               <a:rPr lang="en-US" sz="1400" dirty="0">
                 <a:solidFill>
-                  <a:srgbClr val="C9D3F5"/>
+                  <a:srgbClr val="1F2429"/>
                 </a:solidFill>
                 <a:latin typeface="Courier New" pitchFamily="34" charset="0"/>
                 <a:ea typeface="Courier New" pitchFamily="34" charset="-122"/>
@@ -8305,7 +8321,7 @@
             <a:r>
               <a:rPr lang="en-US" sz="1400" dirty="0">
                 <a:solidFill>
-                  <a:srgbClr val="C9D3F5"/>
+                  <a:srgbClr val="1F2429"/>
                 </a:solidFill>
                 <a:latin typeface="Courier New" pitchFamily="34" charset="0"/>
                 <a:ea typeface="Courier New" pitchFamily="34" charset="-122"/>
@@ -8325,7 +8341,7 @@
             <a:r>
               <a:rPr lang="en-US" sz="1400" dirty="0">
                 <a:solidFill>
-                  <a:srgbClr val="C9D3F5"/>
+                  <a:srgbClr val="1F2429"/>
                 </a:solidFill>
                 <a:latin typeface="Courier New" pitchFamily="34" charset="0"/>
                 <a:ea typeface="Courier New" pitchFamily="34" charset="-122"/>
@@ -8345,7 +8361,7 @@
             <a:r>
               <a:rPr lang="en-US" sz="1400" dirty="0">
                 <a:solidFill>
-                  <a:srgbClr val="C9D3F5"/>
+                  <a:srgbClr val="1F2429"/>
                 </a:solidFill>
                 <a:latin typeface="Courier New" pitchFamily="34" charset="0"/>
                 <a:ea typeface="Courier New" pitchFamily="34" charset="-122"/>
@@ -8365,7 +8381,7 @@
             <a:r>
               <a:rPr lang="en-US" sz="1400" dirty="0">
                 <a:solidFill>
-                  <a:srgbClr val="C9D3F5"/>
+                  <a:srgbClr val="1F2429"/>
                 </a:solidFill>
                 <a:latin typeface="Courier New" pitchFamily="34" charset="0"/>
                 <a:ea typeface="Courier New" pitchFamily="34" charset="-122"/>
@@ -8385,7 +8401,7 @@
             <a:r>
               <a:rPr lang="en-US" sz="1400" dirty="0">
                 <a:solidFill>
-                  <a:srgbClr val="C9D3F5"/>
+                  <a:srgbClr val="1F2429"/>
                 </a:solidFill>
                 <a:latin typeface="Courier New" pitchFamily="34" charset="0"/>
                 <a:ea typeface="Courier New" pitchFamily="34" charset="-122"/>
@@ -9524,9 +9540,13 @@
             </a:avLst>
           </a:prstGeom>
           <a:solidFill>
-            <a:srgbClr val="1E1E4C"/>
+            <a:srgbClr val="F7F8F9"/>
           </a:solidFill>
-          <a:ln/>
+          <a:ln w="9525">
+            <a:solidFill>
+              <a:srgbClr val="D0D5DD"/>
+            </a:solidFill>
+          </a:ln>
         </p:spPr>
         <p:txBody>
           <a:bodyPr/>
@@ -9563,7 +9583,7 @@
             <a:r>
               <a:rPr lang="en-US" sz="1110" dirty="0">
                 <a:solidFill>
-                  <a:srgbClr val="C9D3F5"/>
+                  <a:srgbClr val="1F2429"/>
                 </a:solidFill>
                 <a:latin typeface="Courier New" pitchFamily="34" charset="0"/>
                 <a:ea typeface="Courier New" pitchFamily="34" charset="-122"/>
@@ -9583,7 +9603,7 @@
             <a:r>
               <a:rPr lang="en-US" sz="1110" dirty="0">
                 <a:solidFill>
-                  <a:srgbClr val="C9D3F5"/>
+                  <a:srgbClr val="1F2429"/>
                 </a:solidFill>
                 <a:latin typeface="Courier New" pitchFamily="34" charset="0"/>
                 <a:ea typeface="Courier New" pitchFamily="34" charset="-122"/>
@@ -9603,7 +9623,7 @@
             <a:r>
               <a:rPr lang="en-US" sz="1110" dirty="0">
                 <a:solidFill>
-                  <a:srgbClr val="C9D3F5"/>
+                  <a:srgbClr val="1F2429"/>
                 </a:solidFill>
                 <a:latin typeface="Courier New" pitchFamily="34" charset="0"/>
                 <a:ea typeface="Courier New" pitchFamily="34" charset="-122"/>
@@ -9623,7 +9643,7 @@
             <a:r>
               <a:rPr lang="en-US" sz="1110" dirty="0">
                 <a:solidFill>
-                  <a:srgbClr val="C9D3F5"/>
+                  <a:srgbClr val="1F2429"/>
                 </a:solidFill>
                 <a:latin typeface="Courier New" pitchFamily="34" charset="0"/>
                 <a:ea typeface="Courier New" pitchFamily="34" charset="-122"/>
@@ -9643,7 +9663,7 @@
             <a:r>
               <a:rPr lang="en-US" sz="1110" dirty="0">
                 <a:solidFill>
-                  <a:srgbClr val="C9D3F5"/>
+                  <a:srgbClr val="1F2429"/>
                 </a:solidFill>
                 <a:latin typeface="Courier New" pitchFamily="34" charset="0"/>
                 <a:ea typeface="Courier New" pitchFamily="34" charset="-122"/>
@@ -9663,7 +9683,7 @@
             <a:r>
               <a:rPr lang="en-US" sz="1110" dirty="0">
                 <a:solidFill>
-                  <a:srgbClr val="C9D3F5"/>
+                  <a:srgbClr val="1F2429"/>
                 </a:solidFill>
                 <a:latin typeface="Courier New" pitchFamily="34" charset="0"/>
                 <a:ea typeface="Courier New" pitchFamily="34" charset="-122"/>
@@ -9683,7 +9703,7 @@
             <a:r>
               <a:rPr lang="en-US" sz="1110" dirty="0">
                 <a:solidFill>
-                  <a:srgbClr val="C9D3F5"/>
+                  <a:srgbClr val="1F2429"/>
                 </a:solidFill>
                 <a:latin typeface="Courier New" pitchFamily="34" charset="0"/>
                 <a:ea typeface="Courier New" pitchFamily="34" charset="-122"/>
@@ -9703,7 +9723,7 @@
             <a:r>
               <a:rPr lang="en-US" sz="1110" dirty="0">
                 <a:solidFill>
-                  <a:srgbClr val="C9D3F5"/>
+                  <a:srgbClr val="1F2429"/>
                 </a:solidFill>
                 <a:latin typeface="Courier New" pitchFamily="34" charset="0"/>
                 <a:ea typeface="Courier New" pitchFamily="34" charset="-122"/>
@@ -9723,7 +9743,7 @@
             <a:r>
               <a:rPr lang="en-US" sz="1110" dirty="0">
                 <a:solidFill>
-                  <a:srgbClr val="C9D3F5"/>
+                  <a:srgbClr val="1F2429"/>
                 </a:solidFill>
                 <a:latin typeface="Courier New" pitchFamily="34" charset="0"/>
                 <a:ea typeface="Courier New" pitchFamily="34" charset="-122"/>
@@ -9743,7 +9763,7 @@
             <a:r>
               <a:rPr lang="en-US" sz="1110" dirty="0">
                 <a:solidFill>
-                  <a:srgbClr val="C9D3F5"/>
+                  <a:srgbClr val="1F2429"/>
                 </a:solidFill>
                 <a:latin typeface="Courier New" pitchFamily="34" charset="0"/>
                 <a:ea typeface="Courier New" pitchFamily="34" charset="-122"/>
@@ -9763,7 +9783,7 @@
             <a:r>
               <a:rPr lang="en-US" sz="1110" dirty="0">
                 <a:solidFill>
-                  <a:srgbClr val="C9D3F5"/>
+                  <a:srgbClr val="1F2429"/>
                 </a:solidFill>
                 <a:latin typeface="Courier New" pitchFamily="34" charset="0"/>
                 <a:ea typeface="Courier New" pitchFamily="34" charset="-122"/>
@@ -9783,7 +9803,7 @@
             <a:r>
               <a:rPr lang="en-US" sz="1110" dirty="0">
                 <a:solidFill>
-                  <a:srgbClr val="C9D3F5"/>
+                  <a:srgbClr val="1F2429"/>
                 </a:solidFill>
                 <a:latin typeface="Courier New" pitchFamily="34" charset="0"/>
                 <a:ea typeface="Courier New" pitchFamily="34" charset="-122"/>
@@ -9803,7 +9823,7 @@
             <a:r>
               <a:rPr lang="en-US" sz="1110" dirty="0">
                 <a:solidFill>
-                  <a:srgbClr val="C9D3F5"/>
+                  <a:srgbClr val="1F2429"/>
                 </a:solidFill>
                 <a:latin typeface="Courier New" pitchFamily="34" charset="0"/>
                 <a:ea typeface="Courier New" pitchFamily="34" charset="-122"/>
@@ -9823,7 +9843,7 @@
             <a:r>
               <a:rPr lang="en-US" sz="1110" dirty="0">
                 <a:solidFill>
-                  <a:srgbClr val="C9D3F5"/>
+                  <a:srgbClr val="1F2429"/>
                 </a:solidFill>
                 <a:latin typeface="Courier New" pitchFamily="34" charset="0"/>
                 <a:ea typeface="Courier New" pitchFamily="34" charset="-122"/>
@@ -9843,7 +9863,7 @@
             <a:r>
               <a:rPr lang="en-US" sz="1110" dirty="0">
                 <a:solidFill>
-                  <a:srgbClr val="C9D3F5"/>
+                  <a:srgbClr val="1F2429"/>
                 </a:solidFill>
                 <a:latin typeface="Courier New" pitchFamily="34" charset="0"/>
                 <a:ea typeface="Courier New" pitchFamily="34" charset="-122"/>
@@ -9863,7 +9883,7 @@
             <a:r>
               <a:rPr lang="en-US" sz="1110" dirty="0">
                 <a:solidFill>
-                  <a:srgbClr val="C9D3F5"/>
+                  <a:srgbClr val="1F2429"/>
                 </a:solidFill>
                 <a:latin typeface="Courier New" pitchFamily="34" charset="0"/>
                 <a:ea typeface="Courier New" pitchFamily="34" charset="-122"/>
@@ -10045,9 +10065,13 @@
             </a:avLst>
           </a:prstGeom>
           <a:solidFill>
-            <a:srgbClr val="1E1E4C"/>
+            <a:srgbClr val="F7F8F9"/>
           </a:solidFill>
-          <a:ln/>
+          <a:ln w="9525">
+            <a:solidFill>
+              <a:srgbClr val="D0D5DD"/>
+            </a:solidFill>
+          </a:ln>
         </p:spPr>
         <p:txBody>
           <a:bodyPr/>
@@ -10084,7 +10108,7 @@
             <a:r>
               <a:rPr lang="en-US" sz="1110" dirty="0">
                 <a:solidFill>
-                  <a:srgbClr val="C9D3F5"/>
+                  <a:srgbClr val="1F2429"/>
                 </a:solidFill>
                 <a:latin typeface="Courier New" pitchFamily="34" charset="0"/>
                 <a:ea typeface="Courier New" pitchFamily="34" charset="-122"/>
@@ -10104,7 +10128,7 @@
             <a:r>
               <a:rPr lang="en-US" sz="1110" dirty="0">
                 <a:solidFill>
-                  <a:srgbClr val="C9D3F5"/>
+                  <a:srgbClr val="1F2429"/>
                 </a:solidFill>
                 <a:latin typeface="Courier New" pitchFamily="34" charset="0"/>
                 <a:ea typeface="Courier New" pitchFamily="34" charset="-122"/>
@@ -10124,7 +10148,7 @@
             <a:r>
               <a:rPr lang="en-US" sz="1110" dirty="0">
                 <a:solidFill>
-                  <a:srgbClr val="C9D3F5"/>
+                  <a:srgbClr val="1F2429"/>
                 </a:solidFill>
                 <a:latin typeface="Courier New" pitchFamily="34" charset="0"/>
                 <a:ea typeface="Courier New" pitchFamily="34" charset="-122"/>
@@ -10144,7 +10168,7 @@
             <a:r>
               <a:rPr lang="en-US" sz="1110" dirty="0">
                 <a:solidFill>
-                  <a:srgbClr val="C9D3F5"/>
+                  <a:srgbClr val="1F2429"/>
                 </a:solidFill>
                 <a:latin typeface="Courier New" pitchFamily="34" charset="0"/>
                 <a:ea typeface="Courier New" pitchFamily="34" charset="-122"/>
@@ -10164,7 +10188,7 @@
             <a:r>
               <a:rPr lang="en-US" sz="1110" dirty="0">
                 <a:solidFill>
-                  <a:srgbClr val="C9D3F5"/>
+                  <a:srgbClr val="1F2429"/>
                 </a:solidFill>
                 <a:latin typeface="Courier New" pitchFamily="34" charset="0"/>
                 <a:ea typeface="Courier New" pitchFamily="34" charset="-122"/>
@@ -10184,7 +10208,7 @@
             <a:r>
               <a:rPr lang="en-US" sz="1110" dirty="0">
                 <a:solidFill>
-                  <a:srgbClr val="C9D3F5"/>
+                  <a:srgbClr val="1F2429"/>
                 </a:solidFill>
                 <a:latin typeface="Courier New" pitchFamily="34" charset="0"/>
                 <a:ea typeface="Courier New" pitchFamily="34" charset="-122"/>
@@ -10204,7 +10228,7 @@
             <a:r>
               <a:rPr lang="en-US" sz="1110" dirty="0">
                 <a:solidFill>
-                  <a:srgbClr val="C9D3F5"/>
+                  <a:srgbClr val="1F2429"/>
                 </a:solidFill>
                 <a:latin typeface="Courier New" pitchFamily="34" charset="0"/>
                 <a:ea typeface="Courier New" pitchFamily="34" charset="-122"/>
@@ -10224,7 +10248,7 @@
             <a:r>
               <a:rPr lang="en-US" sz="1110" dirty="0">
                 <a:solidFill>
-                  <a:srgbClr val="C9D3F5"/>
+                  <a:srgbClr val="1F2429"/>
                 </a:solidFill>
                 <a:latin typeface="Courier New" pitchFamily="34" charset="0"/>
                 <a:ea typeface="Courier New" pitchFamily="34" charset="-122"/>
@@ -10244,7 +10268,7 @@
             <a:r>
               <a:rPr lang="en-US" sz="1110" dirty="0">
                 <a:solidFill>
-                  <a:srgbClr val="C9D3F5"/>
+                  <a:srgbClr val="1F2429"/>
                 </a:solidFill>
                 <a:latin typeface="Courier New" pitchFamily="34" charset="0"/>
                 <a:ea typeface="Courier New" pitchFamily="34" charset="-122"/>
@@ -10264,7 +10288,7 @@
             <a:r>
               <a:rPr lang="en-US" sz="1110" dirty="0">
                 <a:solidFill>
-                  <a:srgbClr val="C9D3F5"/>
+                  <a:srgbClr val="1F2429"/>
                 </a:solidFill>
                 <a:latin typeface="Courier New" pitchFamily="34" charset="0"/>
                 <a:ea typeface="Courier New" pitchFamily="34" charset="-122"/>
@@ -10284,7 +10308,7 @@
             <a:r>
               <a:rPr lang="en-US" sz="1110" dirty="0">
                 <a:solidFill>
-                  <a:srgbClr val="C9D3F5"/>
+                  <a:srgbClr val="1F2429"/>
                 </a:solidFill>
                 <a:latin typeface="Courier New" pitchFamily="34" charset="0"/>
                 <a:ea typeface="Courier New" pitchFamily="34" charset="-122"/>
@@ -10304,7 +10328,7 @@
             <a:r>
               <a:rPr lang="en-US" sz="1110" dirty="0">
                 <a:solidFill>
-                  <a:srgbClr val="C9D3F5"/>
+                  <a:srgbClr val="1F2429"/>
                 </a:solidFill>
                 <a:latin typeface="Courier New" pitchFamily="34" charset="0"/>
                 <a:ea typeface="Courier New" pitchFamily="34" charset="-122"/>
@@ -10324,7 +10348,7 @@
             <a:r>
               <a:rPr lang="en-US" sz="1110" dirty="0">
                 <a:solidFill>
-                  <a:srgbClr val="C9D3F5"/>
+                  <a:srgbClr val="1F2429"/>
                 </a:solidFill>
                 <a:latin typeface="Courier New" pitchFamily="34" charset="0"/>
                 <a:ea typeface="Courier New" pitchFamily="34" charset="-122"/>
@@ -10344,7 +10368,7 @@
             <a:r>
               <a:rPr lang="en-US" sz="1110" dirty="0">
                 <a:solidFill>
-                  <a:srgbClr val="C9D3F5"/>
+                  <a:srgbClr val="1F2429"/>
                 </a:solidFill>
                 <a:latin typeface="Courier New" pitchFamily="34" charset="0"/>
                 <a:ea typeface="Courier New" pitchFamily="34" charset="-122"/>
@@ -10364,7 +10388,7 @@
             <a:r>
               <a:rPr lang="en-US" sz="1110" dirty="0">
                 <a:solidFill>
-                  <a:srgbClr val="C9D3F5"/>
+                  <a:srgbClr val="1F2429"/>
                 </a:solidFill>
                 <a:latin typeface="Courier New" pitchFamily="34" charset="0"/>
                 <a:ea typeface="Courier New" pitchFamily="34" charset="-122"/>
@@ -10384,7 +10408,7 @@
             <a:r>
               <a:rPr lang="en-US" sz="1110" dirty="0">
                 <a:solidFill>
-                  <a:srgbClr val="C9D3F5"/>
+                  <a:srgbClr val="1F2429"/>
                 </a:solidFill>
                 <a:latin typeface="Courier New" pitchFamily="34" charset="0"/>
                 <a:ea typeface="Courier New" pitchFamily="34" charset="-122"/>
@@ -11382,9 +11406,13 @@
             </a:avLst>
           </a:prstGeom>
           <a:solidFill>
-            <a:srgbClr val="1E1E4C"/>
+            <a:srgbClr val="F7F8F9"/>
           </a:solidFill>
-          <a:ln/>
+          <a:ln w="9525">
+            <a:solidFill>
+              <a:srgbClr val="D0D5DD"/>
+            </a:solidFill>
+          </a:ln>
         </p:spPr>
         <p:txBody>
           <a:bodyPr/>
@@ -11421,7 +11449,7 @@
             <a:r>
               <a:rPr lang="en-US" sz="1269" dirty="0">
                 <a:solidFill>
-                  <a:srgbClr val="C9D3F5"/>
+                  <a:srgbClr val="1F2429"/>
                 </a:solidFill>
                 <a:latin typeface="Courier New" pitchFamily="34" charset="0"/>
                 <a:ea typeface="Courier New" pitchFamily="34" charset="-122"/>
@@ -11441,7 +11469,7 @@
             <a:r>
               <a:rPr lang="en-US" sz="1269" dirty="0">
                 <a:solidFill>
-                  <a:srgbClr val="C9D3F5"/>
+                  <a:srgbClr val="1F2429"/>
                 </a:solidFill>
                 <a:latin typeface="Courier New" pitchFamily="34" charset="0"/>
                 <a:ea typeface="Courier New" pitchFamily="34" charset="-122"/>
@@ -11461,7 +11489,7 @@
             <a:r>
               <a:rPr lang="en-US" sz="1269" dirty="0">
                 <a:solidFill>
-                  <a:srgbClr val="C9D3F5"/>
+                  <a:srgbClr val="1F2429"/>
                 </a:solidFill>
                 <a:latin typeface="Courier New" pitchFamily="34" charset="0"/>
                 <a:ea typeface="Courier New" pitchFamily="34" charset="-122"/>
@@ -11481,7 +11509,7 @@
             <a:r>
               <a:rPr lang="en-US" sz="1269" dirty="0">
                 <a:solidFill>
-                  <a:srgbClr val="C9D3F5"/>
+                  <a:srgbClr val="1F2429"/>
                 </a:solidFill>
                 <a:latin typeface="Courier New" pitchFamily="34" charset="0"/>
                 <a:ea typeface="Courier New" pitchFamily="34" charset="-122"/>
@@ -11501,7 +11529,7 @@
             <a:r>
               <a:rPr lang="en-US" sz="1269" dirty="0">
                 <a:solidFill>
-                  <a:srgbClr val="C9D3F5"/>
+                  <a:srgbClr val="1F2429"/>
                 </a:solidFill>
                 <a:latin typeface="Courier New" pitchFamily="34" charset="0"/>
                 <a:ea typeface="Courier New" pitchFamily="34" charset="-122"/>
@@ -11521,7 +11549,7 @@
             <a:r>
               <a:rPr lang="en-US" sz="1269" dirty="0">
                 <a:solidFill>
-                  <a:srgbClr val="C9D3F5"/>
+                  <a:srgbClr val="1F2429"/>
                 </a:solidFill>
                 <a:latin typeface="Courier New" pitchFamily="34" charset="0"/>
                 <a:ea typeface="Courier New" pitchFamily="34" charset="-122"/>
@@ -11541,7 +11569,7 @@
             <a:r>
               <a:rPr lang="en-US" sz="1269" dirty="0">
                 <a:solidFill>
-                  <a:srgbClr val="C9D3F5"/>
+                  <a:srgbClr val="1F2429"/>
                 </a:solidFill>
                 <a:latin typeface="Courier New" pitchFamily="34" charset="0"/>
                 <a:ea typeface="Courier New" pitchFamily="34" charset="-122"/>
@@ -11561,7 +11589,7 @@
             <a:r>
               <a:rPr lang="en-US" sz="1269" dirty="0">
                 <a:solidFill>
-                  <a:srgbClr val="C9D3F5"/>
+                  <a:srgbClr val="1F2429"/>
                 </a:solidFill>
                 <a:latin typeface="Courier New" pitchFamily="34" charset="0"/>
                 <a:ea typeface="Courier New" pitchFamily="34" charset="-122"/>
@@ -11581,7 +11609,7 @@
             <a:r>
               <a:rPr lang="en-US" sz="1269" dirty="0">
                 <a:solidFill>
-                  <a:srgbClr val="C9D3F5"/>
+                  <a:srgbClr val="1F2429"/>
                 </a:solidFill>
                 <a:latin typeface="Courier New" pitchFamily="34" charset="0"/>
                 <a:ea typeface="Courier New" pitchFamily="34" charset="-122"/>
@@ -11601,7 +11629,7 @@
             <a:r>
               <a:rPr lang="en-US" sz="1269" dirty="0">
                 <a:solidFill>
-                  <a:srgbClr val="C9D3F5"/>
+                  <a:srgbClr val="1F2429"/>
                 </a:solidFill>
                 <a:latin typeface="Courier New" pitchFamily="34" charset="0"/>
                 <a:ea typeface="Courier New" pitchFamily="34" charset="-122"/>
@@ -11621,7 +11649,7 @@
             <a:r>
               <a:rPr lang="en-US" sz="1269" dirty="0">
                 <a:solidFill>
-                  <a:srgbClr val="C9D3F5"/>
+                  <a:srgbClr val="1F2429"/>
                 </a:solidFill>
                 <a:latin typeface="Courier New" pitchFamily="34" charset="0"/>
                 <a:ea typeface="Courier New" pitchFamily="34" charset="-122"/>
@@ -11641,7 +11669,7 @@
             <a:r>
               <a:rPr lang="en-US" sz="1269" dirty="0">
                 <a:solidFill>
-                  <a:srgbClr val="C9D3F5"/>
+                  <a:srgbClr val="1F2429"/>
                 </a:solidFill>
                 <a:latin typeface="Courier New" pitchFamily="34" charset="0"/>
                 <a:ea typeface="Courier New" pitchFamily="34" charset="-122"/>
@@ -11661,7 +11689,7 @@
             <a:r>
               <a:rPr lang="en-US" sz="1269" dirty="0">
                 <a:solidFill>
-                  <a:srgbClr val="C9D3F5"/>
+                  <a:srgbClr val="1F2429"/>
                 </a:solidFill>
                 <a:latin typeface="Courier New" pitchFamily="34" charset="0"/>
                 <a:ea typeface="Courier New" pitchFamily="34" charset="-122"/>
@@ -11681,7 +11709,7 @@
             <a:r>
               <a:rPr lang="en-US" sz="1269" dirty="0">
                 <a:solidFill>
-                  <a:srgbClr val="C9D3F5"/>
+                  <a:srgbClr val="1F2429"/>
                 </a:solidFill>
                 <a:latin typeface="Courier New" pitchFamily="34" charset="0"/>
                 <a:ea typeface="Courier New" pitchFamily="34" charset="-122"/>
@@ -13673,9 +13701,13 @@
             </a:avLst>
           </a:prstGeom>
           <a:solidFill>
-            <a:srgbClr val="1E1E4C"/>
+            <a:srgbClr val="F7F8F9"/>
           </a:solidFill>
-          <a:ln/>
+          <a:ln w="9525">
+            <a:solidFill>
+              <a:srgbClr val="D0D5DD"/>
+            </a:solidFill>
+          </a:ln>
         </p:spPr>
         <p:txBody>
           <a:bodyPr/>
@@ -13712,7 +13744,7 @@
             <a:r>
               <a:rPr lang="en-US" sz="1029" dirty="0">
                 <a:solidFill>
-                  <a:srgbClr val="C9D3F5"/>
+                  <a:srgbClr val="1F2429"/>
                 </a:solidFill>
                 <a:latin typeface="Courier New" pitchFamily="34" charset="0"/>
                 <a:ea typeface="Courier New" pitchFamily="34" charset="-122"/>
@@ -13732,7 +13764,7 @@
             <a:r>
               <a:rPr lang="en-US" sz="1029" dirty="0">
                 <a:solidFill>
-                  <a:srgbClr val="C9D3F5"/>
+                  <a:srgbClr val="1F2429"/>
                 </a:solidFill>
                 <a:latin typeface="Courier New" pitchFamily="34" charset="0"/>
                 <a:ea typeface="Courier New" pitchFamily="34" charset="-122"/>
@@ -13752,7 +13784,7 @@
             <a:r>
               <a:rPr lang="en-US" sz="1029" dirty="0">
                 <a:solidFill>
-                  <a:srgbClr val="C9D3F5"/>
+                  <a:srgbClr val="1F2429"/>
                 </a:solidFill>
                 <a:latin typeface="Courier New" pitchFamily="34" charset="0"/>
                 <a:ea typeface="Courier New" pitchFamily="34" charset="-122"/>
@@ -13772,7 +13804,7 @@
             <a:r>
               <a:rPr lang="en-US" sz="1029" dirty="0">
                 <a:solidFill>
-                  <a:srgbClr val="C9D3F5"/>
+                  <a:srgbClr val="1F2429"/>
                 </a:solidFill>
                 <a:latin typeface="Courier New" pitchFamily="34" charset="0"/>
                 <a:ea typeface="Courier New" pitchFamily="34" charset="-122"/>
@@ -13792,7 +13824,7 @@
             <a:r>
               <a:rPr lang="en-US" sz="1029" dirty="0">
                 <a:solidFill>
-                  <a:srgbClr val="C9D3F5"/>
+                  <a:srgbClr val="1F2429"/>
                 </a:solidFill>
                 <a:latin typeface="Courier New" pitchFamily="34" charset="0"/>
                 <a:ea typeface="Courier New" pitchFamily="34" charset="-122"/>
@@ -13812,7 +13844,7 @@
             <a:r>
               <a:rPr lang="en-US" sz="1029" dirty="0">
                 <a:solidFill>
-                  <a:srgbClr val="C9D3F5"/>
+                  <a:srgbClr val="1F2429"/>
                 </a:solidFill>
                 <a:latin typeface="Courier New" pitchFamily="34" charset="0"/>
                 <a:ea typeface="Courier New" pitchFamily="34" charset="-122"/>
@@ -13832,7 +13864,7 @@
             <a:r>
               <a:rPr lang="en-US" sz="1029" dirty="0">
                 <a:solidFill>
-                  <a:srgbClr val="C9D3F5"/>
+                  <a:srgbClr val="1F2429"/>
                 </a:solidFill>
                 <a:latin typeface="Courier New" pitchFamily="34" charset="0"/>
                 <a:ea typeface="Courier New" pitchFamily="34" charset="-122"/>
@@ -13852,7 +13884,7 @@
             <a:r>
               <a:rPr lang="en-US" sz="1029" dirty="0">
                 <a:solidFill>
-                  <a:srgbClr val="C9D3F5"/>
+                  <a:srgbClr val="1F2429"/>
                 </a:solidFill>
                 <a:latin typeface="Courier New" pitchFamily="34" charset="0"/>
                 <a:ea typeface="Courier New" pitchFamily="34" charset="-122"/>
@@ -13872,7 +13904,7 @@
             <a:r>
               <a:rPr lang="en-US" sz="1029" dirty="0">
                 <a:solidFill>
-                  <a:srgbClr val="C9D3F5"/>
+                  <a:srgbClr val="1F2429"/>
                 </a:solidFill>
                 <a:latin typeface="Courier New" pitchFamily="34" charset="0"/>
                 <a:ea typeface="Courier New" pitchFamily="34" charset="-122"/>
@@ -13892,7 +13924,7 @@
             <a:r>
               <a:rPr lang="en-US" sz="1029" dirty="0">
                 <a:solidFill>
-                  <a:srgbClr val="C9D3F5"/>
+                  <a:srgbClr val="1F2429"/>
                 </a:solidFill>
                 <a:latin typeface="Courier New" pitchFamily="34" charset="0"/>
                 <a:ea typeface="Courier New" pitchFamily="34" charset="-122"/>
@@ -13912,7 +13944,7 @@
             <a:r>
               <a:rPr lang="en-US" sz="1029" dirty="0">
                 <a:solidFill>
-                  <a:srgbClr val="C9D3F5"/>
+                  <a:srgbClr val="1F2429"/>
                 </a:solidFill>
                 <a:latin typeface="Courier New" pitchFamily="34" charset="0"/>
                 <a:ea typeface="Courier New" pitchFamily="34" charset="-122"/>
@@ -13932,7 +13964,7 @@
             <a:r>
               <a:rPr lang="en-US" sz="1029" dirty="0">
                 <a:solidFill>
-                  <a:srgbClr val="C9D3F5"/>
+                  <a:srgbClr val="1F2429"/>
                 </a:solidFill>
                 <a:latin typeface="Courier New" pitchFamily="34" charset="0"/>
                 <a:ea typeface="Courier New" pitchFamily="34" charset="-122"/>
@@ -13952,7 +13984,7 @@
             <a:r>
               <a:rPr lang="en-US" sz="1029" dirty="0">
                 <a:solidFill>
-                  <a:srgbClr val="C9D3F5"/>
+                  <a:srgbClr val="1F2429"/>
                 </a:solidFill>
                 <a:latin typeface="Courier New" pitchFamily="34" charset="0"/>
                 <a:ea typeface="Courier New" pitchFamily="34" charset="-122"/>
@@ -13972,7 +14004,7 @@
             <a:r>
               <a:rPr lang="en-US" sz="1029" dirty="0">
                 <a:solidFill>
-                  <a:srgbClr val="C9D3F5"/>
+                  <a:srgbClr val="1F2429"/>
                 </a:solidFill>
                 <a:latin typeface="Courier New" pitchFamily="34" charset="0"/>
                 <a:ea typeface="Courier New" pitchFamily="34" charset="-122"/>
@@ -14652,9 +14684,13 @@
             </a:avLst>
           </a:prstGeom>
           <a:solidFill>
-            <a:srgbClr val="1E1E4C"/>
+            <a:srgbClr val="F7F8F9"/>
           </a:solidFill>
-          <a:ln/>
+          <a:ln w="9525">
+            <a:solidFill>
+              <a:srgbClr val="D0D5DD"/>
+            </a:solidFill>
+          </a:ln>
         </p:spPr>
         <p:txBody>
           <a:bodyPr/>
@@ -14691,7 +14727,7 @@
             <a:r>
               <a:rPr lang="en-US" sz="1000" dirty="0">
                 <a:solidFill>
-                  <a:srgbClr val="C9D3F5"/>
+                  <a:srgbClr val="1F2429"/>
                 </a:solidFill>
                 <a:latin typeface="Courier New" pitchFamily="34" charset="0"/>
                 <a:ea typeface="Courier New" pitchFamily="34" charset="-122"/>
@@ -14711,7 +14747,7 @@
             <a:r>
               <a:rPr lang="en-US" sz="1000" dirty="0">
                 <a:solidFill>
-                  <a:srgbClr val="C9D3F5"/>
+                  <a:srgbClr val="1F2429"/>
                 </a:solidFill>
                 <a:latin typeface="Courier New" pitchFamily="34" charset="0"/>
                 <a:ea typeface="Courier New" pitchFamily="34" charset="-122"/>
@@ -14731,7 +14767,7 @@
             <a:r>
               <a:rPr lang="en-US" sz="1000" dirty="0">
                 <a:solidFill>
-                  <a:srgbClr val="C9D3F5"/>
+                  <a:srgbClr val="1F2429"/>
                 </a:solidFill>
                 <a:latin typeface="Courier New" pitchFamily="34" charset="0"/>
                 <a:ea typeface="Courier New" pitchFamily="34" charset="-122"/>
@@ -14751,7 +14787,7 @@
             <a:r>
               <a:rPr lang="en-US" sz="1000" dirty="0">
                 <a:solidFill>
-                  <a:srgbClr val="C9D3F5"/>
+                  <a:srgbClr val="1F2429"/>
                 </a:solidFill>
                 <a:latin typeface="Courier New" pitchFamily="34" charset="0"/>
                 <a:ea typeface="Courier New" pitchFamily="34" charset="-122"/>
@@ -14771,7 +14807,7 @@
             <a:r>
               <a:rPr lang="en-US" sz="1000" dirty="0">
                 <a:solidFill>
-                  <a:srgbClr val="C9D3F5"/>
+                  <a:srgbClr val="1F2429"/>
                 </a:solidFill>
                 <a:latin typeface="Courier New" pitchFamily="34" charset="0"/>
                 <a:ea typeface="Courier New" pitchFamily="34" charset="-122"/>
@@ -14791,7 +14827,7 @@
             <a:r>
               <a:rPr lang="en-US" sz="1000" dirty="0">
                 <a:solidFill>
-                  <a:srgbClr val="C9D3F5"/>
+                  <a:srgbClr val="1F2429"/>
                 </a:solidFill>
                 <a:latin typeface="Courier New" pitchFamily="34" charset="0"/>
                 <a:ea typeface="Courier New" pitchFamily="34" charset="-122"/>
@@ -14811,7 +14847,7 @@
             <a:r>
               <a:rPr lang="en-US" sz="1000" dirty="0">
                 <a:solidFill>
-                  <a:srgbClr val="C9D3F5"/>
+                  <a:srgbClr val="1F2429"/>
                 </a:solidFill>
                 <a:latin typeface="Courier New" pitchFamily="34" charset="0"/>
                 <a:ea typeface="Courier New" pitchFamily="34" charset="-122"/>
@@ -14831,7 +14867,7 @@
             <a:r>
               <a:rPr lang="en-US" sz="1000" dirty="0">
                 <a:solidFill>
-                  <a:srgbClr val="C9D3F5"/>
+                  <a:srgbClr val="1F2429"/>
                 </a:solidFill>
                 <a:latin typeface="Courier New" pitchFamily="34" charset="0"/>
                 <a:ea typeface="Courier New" pitchFamily="34" charset="-122"/>
@@ -14851,7 +14887,7 @@
             <a:r>
               <a:rPr lang="en-US" sz="1000" dirty="0">
                 <a:solidFill>
-                  <a:srgbClr val="C9D3F5"/>
+                  <a:srgbClr val="1F2429"/>
                 </a:solidFill>
                 <a:latin typeface="Courier New" pitchFamily="34" charset="0"/>
                 <a:ea typeface="Courier New" pitchFamily="34" charset="-122"/>
@@ -14871,7 +14907,7 @@
             <a:r>
               <a:rPr lang="en-US" sz="1000" dirty="0">
                 <a:solidFill>
-                  <a:srgbClr val="C9D3F5"/>
+                  <a:srgbClr val="1F2429"/>
                 </a:solidFill>
                 <a:latin typeface="Courier New" pitchFamily="34" charset="0"/>
                 <a:ea typeface="Courier New" pitchFamily="34" charset="-122"/>
@@ -14891,7 +14927,7 @@
             <a:r>
               <a:rPr lang="en-US" sz="1000" dirty="0">
                 <a:solidFill>
-                  <a:srgbClr val="C9D3F5"/>
+                  <a:srgbClr val="1F2429"/>
                 </a:solidFill>
                 <a:latin typeface="Courier New" pitchFamily="34" charset="0"/>
                 <a:ea typeface="Courier New" pitchFamily="34" charset="-122"/>
@@ -14911,7 +14947,7 @@
             <a:r>
               <a:rPr lang="en-US" sz="1000" dirty="0">
                 <a:solidFill>
-                  <a:srgbClr val="C9D3F5"/>
+                  <a:srgbClr val="1F2429"/>
                 </a:solidFill>
                 <a:latin typeface="Courier New" pitchFamily="34" charset="0"/>
                 <a:ea typeface="Courier New" pitchFamily="34" charset="-122"/>
@@ -14931,7 +14967,7 @@
             <a:r>
               <a:rPr lang="en-US" sz="1000" dirty="0">
                 <a:solidFill>
-                  <a:srgbClr val="C9D3F5"/>
+                  <a:srgbClr val="1F2429"/>
                 </a:solidFill>
                 <a:latin typeface="Courier New" pitchFamily="34" charset="0"/>
                 <a:ea typeface="Courier New" pitchFamily="34" charset="-122"/>
@@ -14951,7 +14987,7 @@
             <a:r>
               <a:rPr lang="en-US" sz="1000" dirty="0">
                 <a:solidFill>
-                  <a:srgbClr val="C9D3F5"/>
+                  <a:srgbClr val="1F2429"/>
                 </a:solidFill>
                 <a:latin typeface="Courier New" pitchFamily="34" charset="0"/>
                 <a:ea typeface="Courier New" pitchFamily="34" charset="-122"/>
@@ -14971,7 +15007,7 @@
             <a:r>
               <a:rPr lang="en-US" sz="1000" dirty="0">
                 <a:solidFill>
-                  <a:srgbClr val="C9D3F5"/>
+                  <a:srgbClr val="1F2429"/>
                 </a:solidFill>
                 <a:latin typeface="Courier New" pitchFamily="34" charset="0"/>
                 <a:ea typeface="Courier New" pitchFamily="34" charset="-122"/>
@@ -15184,7 +15220,7 @@
         <p:spPr>
           <a:xfrm>
             <a:off x="640080" y="1965960"/>
-            <a:ext cx="10911535" cy="1920240"/>
+            <a:ext cx="10911535" cy="3657600"/>
           </a:xfrm>
           <a:prstGeom prst="roundRect">
             <a:avLst>
@@ -15215,7 +15251,7 @@
         <p:spPr>
           <a:xfrm>
             <a:off x="868680" y="2103120"/>
-            <a:ext cx="10454335" cy="274320"/>
+            <a:ext cx="10454335" cy="400000"/>
           </a:xfrm>
           <a:prstGeom prst="rect">
             <a:avLst/>
@@ -15231,7 +15267,7 @@
               <a:buNone/>
             </a:pPr>
             <a:r>
-              <a:rPr lang="en-US" sz="1000" b="1" spc="200" kern="0" dirty="0">
+              <a:rPr lang="en-US" sz="1800" b="1" spc="200" kern="0" dirty="0">
                 <a:solidFill>
                   <a:srgbClr val="8A3A12"/>
                 </a:solidFill>
@@ -15241,7 +15277,7 @@
               </a:rPr>
               <a:t>WARNING</a:t>
             </a:r>
-            <a:endParaRPr lang="en-US" sz="1000" dirty="0"/>
+            <a:endParaRPr lang="en-US" sz="1800" dirty="0"/>
           </a:p>
         </p:txBody>
       </p:sp>
@@ -15253,24 +15289,24 @@
         </p:nvSpPr>
         <p:spPr>
           <a:xfrm>
-            <a:off x="868680" y="2404872"/>
-            <a:ext cx="10454335" cy="1325880"/>
-          </a:xfrm>
-          <a:prstGeom prst="rect">
-            <a:avLst/>
-          </a:prstGeom>
-          <a:noFill/>
-          <a:ln/>
-        </p:spPr>
-        <p:txBody>
-          <a:bodyPr wrap="square" lIns="0" tIns="0" rIns="0" bIns="0" rtlCol="0" anchor="t"/>
-          <a:lstStyle/>
-          <a:p>
-            <a:pPr indent="0" marL="0">
-              <a:buNone/>
-            </a:pPr>
-            <a:r>
-              <a:rPr lang="en-US" sz="1250" dirty="0">
+            <a:off x="868680" y="2795960"/>
+            <a:ext cx="10454335" cy="2500000"/>
+          </a:xfrm>
+          <a:prstGeom prst="rect">
+            <a:avLst/>
+          </a:prstGeom>
+          <a:noFill/>
+          <a:ln/>
+        </p:spPr>
+        <p:txBody>
+          <a:bodyPr wrap="square" lIns="0" tIns="0" rIns="0" bIns="0" rtlCol="0" anchor="ctr"/>
+          <a:lstStyle/>
+          <a:p>
+            <a:pPr indent="0" marL="0">
+              <a:buNone/>
+            </a:pPr>
+            <a:r>
+              <a:rPr lang="en-US" sz="2800" dirty="0">
                 <a:solidFill>
                   <a:srgbClr val="26262F"/>
                 </a:solidFill>
@@ -15280,7 +15316,7 @@
               </a:rPr>
               <a:t>If your Express API (e.g. localhost:5000) and your Vite dev server (e.g. localhost:5173) run on different ports, the browser treats them as different origins. Make sure Express uses the cors middleware (Lecture 25) so the browser allows these requests during development.</a:t>
             </a:r>
-            <a:endParaRPr lang="en-US" sz="1250" dirty="0"/>
+            <a:endParaRPr lang="en-US" sz="2800" dirty="0"/>
           </a:p>
         </p:txBody>
       </p:sp>
@@ -16321,9 +16357,13 @@
             </a:avLst>
           </a:prstGeom>
           <a:solidFill>
-            <a:srgbClr val="1E1E4C"/>
+            <a:srgbClr val="F7F8F9"/>
           </a:solidFill>
-          <a:ln/>
+          <a:ln w="9525">
+            <a:solidFill>
+              <a:srgbClr val="D0D5DD"/>
+            </a:solidFill>
+          </a:ln>
         </p:spPr>
         <p:txBody>
           <a:bodyPr/>
@@ -16360,7 +16400,7 @@
             <a:r>
               <a:rPr lang="en-US" sz="1000" dirty="0">
                 <a:solidFill>
-                  <a:srgbClr val="C9D3F5"/>
+                  <a:srgbClr val="1F2429"/>
                 </a:solidFill>
                 <a:latin typeface="Courier New" pitchFamily="34" charset="0"/>
                 <a:ea typeface="Courier New" pitchFamily="34" charset="-122"/>
@@ -16380,7 +16420,7 @@
             <a:r>
               <a:rPr lang="en-US" sz="1000" dirty="0">
                 <a:solidFill>
-                  <a:srgbClr val="C9D3F5"/>
+                  <a:srgbClr val="1F2429"/>
                 </a:solidFill>
                 <a:latin typeface="Courier New" pitchFamily="34" charset="0"/>
                 <a:ea typeface="Courier New" pitchFamily="34" charset="-122"/>
@@ -16400,7 +16440,7 @@
             <a:r>
               <a:rPr lang="en-US" sz="1000" dirty="0">
                 <a:solidFill>
-                  <a:srgbClr val="C9D3F5"/>
+                  <a:srgbClr val="1F2429"/>
                 </a:solidFill>
                 <a:latin typeface="Courier New" pitchFamily="34" charset="0"/>
                 <a:ea typeface="Courier New" pitchFamily="34" charset="-122"/>
@@ -16420,7 +16460,7 @@
             <a:r>
               <a:rPr lang="en-US" sz="1000" dirty="0">
                 <a:solidFill>
-                  <a:srgbClr val="C9D3F5"/>
+                  <a:srgbClr val="1F2429"/>
                 </a:solidFill>
                 <a:latin typeface="Courier New" pitchFamily="34" charset="0"/>
                 <a:ea typeface="Courier New" pitchFamily="34" charset="-122"/>
@@ -16440,7 +16480,7 @@
             <a:r>
               <a:rPr lang="en-US" sz="1000" dirty="0">
                 <a:solidFill>
-                  <a:srgbClr val="C9D3F5"/>
+                  <a:srgbClr val="1F2429"/>
                 </a:solidFill>
                 <a:latin typeface="Courier New" pitchFamily="34" charset="0"/>
                 <a:ea typeface="Courier New" pitchFamily="34" charset="-122"/>
@@ -16460,7 +16500,7 @@
             <a:r>
               <a:rPr lang="en-US" sz="1000" dirty="0">
                 <a:solidFill>
-                  <a:srgbClr val="C9D3F5"/>
+                  <a:srgbClr val="1F2429"/>
                 </a:solidFill>
                 <a:latin typeface="Courier New" pitchFamily="34" charset="0"/>
                 <a:ea typeface="Courier New" pitchFamily="34" charset="-122"/>
@@ -16480,7 +16520,7 @@
             <a:r>
               <a:rPr lang="en-US" sz="1000" dirty="0">
                 <a:solidFill>
-                  <a:srgbClr val="C9D3F5"/>
+                  <a:srgbClr val="1F2429"/>
                 </a:solidFill>
                 <a:latin typeface="Courier New" pitchFamily="34" charset="0"/>
                 <a:ea typeface="Courier New" pitchFamily="34" charset="-122"/>
@@ -16500,7 +16540,7 @@
             <a:r>
               <a:rPr lang="en-US" sz="1000" dirty="0">
                 <a:solidFill>
-                  <a:srgbClr val="C9D3F5"/>
+                  <a:srgbClr val="1F2429"/>
                 </a:solidFill>
                 <a:latin typeface="Courier New" pitchFamily="34" charset="0"/>
                 <a:ea typeface="Courier New" pitchFamily="34" charset="-122"/>
@@ -16520,7 +16560,7 @@
             <a:r>
               <a:rPr lang="en-US" sz="1000" dirty="0">
                 <a:solidFill>
-                  <a:srgbClr val="C9D3F5"/>
+                  <a:srgbClr val="1F2429"/>
                 </a:solidFill>
                 <a:latin typeface="Courier New" pitchFamily="34" charset="0"/>
                 <a:ea typeface="Courier New" pitchFamily="34" charset="-122"/>
@@ -16540,7 +16580,7 @@
             <a:r>
               <a:rPr lang="en-US" sz="1000" dirty="0">
                 <a:solidFill>
-                  <a:srgbClr val="C9D3F5"/>
+                  <a:srgbClr val="1F2429"/>
                 </a:solidFill>
                 <a:latin typeface="Courier New" pitchFamily="34" charset="0"/>
                 <a:ea typeface="Courier New" pitchFamily="34" charset="-122"/>
@@ -16560,7 +16600,7 @@
             <a:r>
               <a:rPr lang="en-US" sz="1000" dirty="0">
                 <a:solidFill>
-                  <a:srgbClr val="C9D3F5"/>
+                  <a:srgbClr val="1F2429"/>
                 </a:solidFill>
                 <a:latin typeface="Courier New" pitchFamily="34" charset="0"/>
                 <a:ea typeface="Courier New" pitchFamily="34" charset="-122"/>
@@ -16580,7 +16620,7 @@
             <a:r>
               <a:rPr lang="en-US" sz="1000" dirty="0">
                 <a:solidFill>
-                  <a:srgbClr val="C9D3F5"/>
+                  <a:srgbClr val="1F2429"/>
                 </a:solidFill>
                 <a:latin typeface="Courier New" pitchFamily="34" charset="0"/>
                 <a:ea typeface="Courier New" pitchFamily="34" charset="-122"/>
@@ -16600,7 +16640,7 @@
             <a:r>
               <a:rPr lang="en-US" sz="1000" dirty="0">
                 <a:solidFill>
-                  <a:srgbClr val="C9D3F5"/>
+                  <a:srgbClr val="1F2429"/>
                 </a:solidFill>
                 <a:latin typeface="Courier New" pitchFamily="34" charset="0"/>
                 <a:ea typeface="Courier New" pitchFamily="34" charset="-122"/>
@@ -16620,7 +16660,7 @@
             <a:r>
               <a:rPr lang="en-US" sz="1000" dirty="0">
                 <a:solidFill>
-                  <a:srgbClr val="C9D3F5"/>
+                  <a:srgbClr val="1F2429"/>
                 </a:solidFill>
                 <a:latin typeface="Courier New" pitchFamily="34" charset="0"/>
                 <a:ea typeface="Courier New" pitchFamily="34" charset="-122"/>
@@ -16640,7 +16680,7 @@
             <a:r>
               <a:rPr lang="en-US" sz="1000" dirty="0">
                 <a:solidFill>
-                  <a:srgbClr val="C9D3F5"/>
+                  <a:srgbClr val="1F2429"/>
                 </a:solidFill>
                 <a:latin typeface="Courier New" pitchFamily="34" charset="0"/>
                 <a:ea typeface="Courier New" pitchFamily="34" charset="-122"/>
@@ -16660,7 +16700,7 @@
             <a:r>
               <a:rPr lang="en-US" sz="1000" dirty="0">
                 <a:solidFill>
-                  <a:srgbClr val="C9D3F5"/>
+                  <a:srgbClr val="1F2429"/>
                 </a:solidFill>
                 <a:latin typeface="Courier New" pitchFamily="34" charset="0"/>
                 <a:ea typeface="Courier New" pitchFamily="34" charset="-122"/>
@@ -17238,9 +17278,13 @@
             </a:avLst>
           </a:prstGeom>
           <a:solidFill>
-            <a:srgbClr val="1E1E4C"/>
+            <a:srgbClr val="F7F8F9"/>
           </a:solidFill>
-          <a:ln/>
+          <a:ln w="9525">
+            <a:solidFill>
+              <a:srgbClr val="D0D5DD"/>
+            </a:solidFill>
+          </a:ln>
         </p:spPr>
         <p:txBody>
           <a:bodyPr/>
@@ -17277,7 +17321,7 @@
             <a:r>
               <a:rPr lang="en-US" sz="1300" dirty="0">
                 <a:solidFill>
-                  <a:srgbClr val="C9D3F5"/>
+                  <a:srgbClr val="1F2429"/>
                 </a:solidFill>
                 <a:latin typeface="Courier New" pitchFamily="34" charset="0"/>
                 <a:ea typeface="Courier New" pitchFamily="34" charset="-122"/>
@@ -17297,7 +17341,7 @@
             <a:r>
               <a:rPr lang="en-US" sz="1300" dirty="0">
                 <a:solidFill>
-                  <a:srgbClr val="C9D3F5"/>
+                  <a:srgbClr val="1F2429"/>
                 </a:solidFill>
                 <a:latin typeface="Courier New" pitchFamily="34" charset="0"/>
                 <a:ea typeface="Courier New" pitchFamily="34" charset="-122"/>
@@ -17317,7 +17361,7 @@
             <a:r>
               <a:rPr lang="en-US" sz="1300" dirty="0">
                 <a:solidFill>
-                  <a:srgbClr val="C9D3F5"/>
+                  <a:srgbClr val="1F2429"/>
                 </a:solidFill>
                 <a:latin typeface="Courier New" pitchFamily="34" charset="0"/>
                 <a:ea typeface="Courier New" pitchFamily="34" charset="-122"/>
@@ -17337,7 +17381,7 @@
             <a:r>
               <a:rPr lang="en-US" sz="1300" dirty="0">
                 <a:solidFill>
-                  <a:srgbClr val="C9D3F5"/>
+                  <a:srgbClr val="1F2429"/>
                 </a:solidFill>
                 <a:latin typeface="Courier New" pitchFamily="34" charset="0"/>
                 <a:ea typeface="Courier New" pitchFamily="34" charset="-122"/>
@@ -17357,7 +17401,7 @@
             <a:r>
               <a:rPr lang="en-US" sz="1300" dirty="0">
                 <a:solidFill>
-                  <a:srgbClr val="C9D3F5"/>
+                  <a:srgbClr val="1F2429"/>
                 </a:solidFill>
                 <a:latin typeface="Courier New" pitchFamily="34" charset="0"/>
                 <a:ea typeface="Courier New" pitchFamily="34" charset="-122"/>
@@ -17377,7 +17421,7 @@
             <a:r>
               <a:rPr lang="en-US" sz="1300" dirty="0">
                 <a:solidFill>
-                  <a:srgbClr val="C9D3F5"/>
+                  <a:srgbClr val="1F2429"/>
                 </a:solidFill>
                 <a:latin typeface="Courier New" pitchFamily="34" charset="0"/>
                 <a:ea typeface="Courier New" pitchFamily="34" charset="-122"/>
@@ -17397,7 +17441,7 @@
             <a:r>
               <a:rPr lang="en-US" sz="1300" dirty="0">
                 <a:solidFill>
-                  <a:srgbClr val="C9D3F5"/>
+                  <a:srgbClr val="1F2429"/>
                 </a:solidFill>
                 <a:latin typeface="Courier New" pitchFamily="34" charset="0"/>
                 <a:ea typeface="Courier New" pitchFamily="34" charset="-122"/>
@@ -17417,7 +17461,7 @@
             <a:r>
               <a:rPr lang="en-US" sz="1300" dirty="0">
                 <a:solidFill>
-                  <a:srgbClr val="C9D3F5"/>
+                  <a:srgbClr val="1F2429"/>
                 </a:solidFill>
                 <a:latin typeface="Courier New" pitchFamily="34" charset="0"/>
                 <a:ea typeface="Courier New" pitchFamily="34" charset="-122"/>
@@ -17437,7 +17481,7 @@
             <a:r>
               <a:rPr lang="en-US" sz="1300" dirty="0">
                 <a:solidFill>
-                  <a:srgbClr val="C9D3F5"/>
+                  <a:srgbClr val="1F2429"/>
                 </a:solidFill>
                 <a:latin typeface="Courier New" pitchFamily="34" charset="0"/>
                 <a:ea typeface="Courier New" pitchFamily="34" charset="-122"/>
@@ -17457,7 +17501,7 @@
             <a:r>
               <a:rPr lang="en-US" sz="1300" dirty="0">
                 <a:solidFill>
-                  <a:srgbClr val="C9D3F5"/>
+                  <a:srgbClr val="1F2429"/>
                 </a:solidFill>
                 <a:latin typeface="Courier New" pitchFamily="34" charset="0"/>
                 <a:ea typeface="Courier New" pitchFamily="34" charset="-122"/>
@@ -17477,7 +17521,7 @@
             <a:r>
               <a:rPr lang="en-US" sz="1300" dirty="0">
                 <a:solidFill>
-                  <a:srgbClr val="C9D3F5"/>
+                  <a:srgbClr val="1F2429"/>
                 </a:solidFill>
                 <a:latin typeface="Courier New" pitchFamily="34" charset="0"/>
                 <a:ea typeface="Courier New" pitchFamily="34" charset="-122"/>
@@ -17713,7 +17757,7 @@
         <p:spPr>
           <a:xfrm>
             <a:off x="640080" y="1965960"/>
-            <a:ext cx="10911535" cy="1737360"/>
+            <a:ext cx="10911535" cy="3657600"/>
           </a:xfrm>
           <a:prstGeom prst="roundRect">
             <a:avLst>
@@ -17744,7 +17788,7 @@
         <p:spPr>
           <a:xfrm>
             <a:off x="868680" y="2103120"/>
-            <a:ext cx="10454335" cy="274320"/>
+            <a:ext cx="10454335" cy="400000"/>
           </a:xfrm>
           <a:prstGeom prst="rect">
             <a:avLst/>
@@ -17760,7 +17804,7 @@
               <a:buNone/>
             </a:pPr>
             <a:r>
-              <a:rPr lang="en-US" sz="1000" b="1" spc="200" kern="0" dirty="0">
+              <a:rPr lang="en-US" sz="1800" b="1" spc="200" kern="0" dirty="0">
                 <a:solidFill>
                   <a:srgbClr val="1F7A46"/>
                 </a:solidFill>
@@ -17770,7 +17814,7 @@
               </a:rPr>
               <a:t>TIP</a:t>
             </a:r>
-            <a:endParaRPr lang="en-US" sz="1000" dirty="0"/>
+            <a:endParaRPr lang="en-US" sz="1800" dirty="0"/>
           </a:p>
         </p:txBody>
       </p:sp>
@@ -17782,24 +17826,24 @@
         </p:nvSpPr>
         <p:spPr>
           <a:xfrm>
-            <a:off x="868680" y="2404872"/>
-            <a:ext cx="10454335" cy="1143000"/>
-          </a:xfrm>
-          <a:prstGeom prst="rect">
-            <a:avLst/>
-          </a:prstGeom>
-          <a:noFill/>
-          <a:ln/>
-        </p:spPr>
-        <p:txBody>
-          <a:bodyPr wrap="square" lIns="0" tIns="0" rIns="0" bIns="0" rtlCol="0" anchor="t"/>
-          <a:lstStyle/>
-          <a:p>
-            <a:pPr indent="0" marL="0">
-              <a:buNone/>
-            </a:pPr>
-            <a:r>
-              <a:rPr lang="en-US" sz="1250" dirty="0">
+            <a:off x="868680" y="2795960"/>
+            <a:ext cx="10454335" cy="2500000"/>
+          </a:xfrm>
+          <a:prstGeom prst="rect">
+            <a:avLst/>
+          </a:prstGeom>
+          <a:noFill/>
+          <a:ln/>
+        </p:spPr>
+        <p:txBody>
+          <a:bodyPr wrap="square" lIns="0" tIns="0" rIns="0" bIns="0" rtlCol="0" anchor="ctr"/>
+          <a:lstStyle/>
+          <a:p>
+            <a:pPr indent="0" marL="0">
+              <a:buNone/>
+            </a:pPr>
+            <a:r>
+              <a:rPr lang="en-US" sz="2800" dirty="0">
                 <a:solidFill>
                   <a:srgbClr val="26262F"/>
                 </a:solidFill>
@@ -17809,7 +17853,7 @@
               </a:rPr>
               <a:t>NavLink behaves like Link but automatically adds an active CSS class (or lets you compute a class/style) when its to path matches the current URL -- handy for highlighting the current page in a navbar.</a:t>
             </a:r>
-            <a:endParaRPr lang="en-US" sz="1250" dirty="0"/>
+            <a:endParaRPr lang="en-US" sz="2800" dirty="0"/>
           </a:p>
         </p:txBody>
       </p:sp>
@@ -18442,9 +18486,13 @@
             </a:avLst>
           </a:prstGeom>
           <a:solidFill>
-            <a:srgbClr val="1E1E4C"/>
+            <a:srgbClr val="F7F8F9"/>
           </a:solidFill>
-          <a:ln/>
+          <a:ln w="9525">
+            <a:solidFill>
+              <a:srgbClr val="D0D5DD"/>
+            </a:solidFill>
+          </a:ln>
         </p:spPr>
         <p:txBody>
           <a:bodyPr/>
@@ -18481,7 +18529,7 @@
             <a:r>
               <a:rPr lang="en-US" sz="1400" dirty="0">
                 <a:solidFill>
-                  <a:srgbClr val="C9D3F5"/>
+                  <a:srgbClr val="1F2429"/>
                 </a:solidFill>
                 <a:latin typeface="Courier New" pitchFamily="34" charset="0"/>
                 <a:ea typeface="Courier New" pitchFamily="34" charset="-122"/>
@@ -18510,7 +18558,7 @@
             <a:r>
               <a:rPr lang="en-US" sz="1400" dirty="0">
                 <a:solidFill>
-                  <a:srgbClr val="C9D3F5"/>
+                  <a:srgbClr val="1F2429"/>
                 </a:solidFill>
                 <a:latin typeface="Courier New" pitchFamily="34" charset="0"/>
                 <a:ea typeface="Courier New" pitchFamily="34" charset="-122"/>
@@ -18530,7 +18578,7 @@
             <a:r>
               <a:rPr lang="en-US" sz="1400" dirty="0">
                 <a:solidFill>
-                  <a:srgbClr val="C9D3F5"/>
+                  <a:srgbClr val="1F2429"/>
                 </a:solidFill>
                 <a:latin typeface="Courier New" pitchFamily="34" charset="0"/>
                 <a:ea typeface="Courier New" pitchFamily="34" charset="-122"/>
@@ -18550,7 +18598,7 @@
             <a:r>
               <a:rPr lang="en-US" sz="1400" dirty="0">
                 <a:solidFill>
-                  <a:srgbClr val="C9D3F5"/>
+                  <a:srgbClr val="1F2429"/>
                 </a:solidFill>
                 <a:latin typeface="Courier New" pitchFamily="34" charset="0"/>
                 <a:ea typeface="Courier New" pitchFamily="34" charset="-122"/>
@@ -18570,7 +18618,7 @@
             <a:r>
               <a:rPr lang="en-US" sz="1400" dirty="0">
                 <a:solidFill>
-                  <a:srgbClr val="C9D3F5"/>
+                  <a:srgbClr val="1F2429"/>
                 </a:solidFill>
                 <a:latin typeface="Courier New" pitchFamily="34" charset="0"/>
                 <a:ea typeface="Courier New" pitchFamily="34" charset="-122"/>
